--- a/presentation/may-hoc-v3.pptx
+++ b/presentation/may-hoc-v3.pptx
@@ -5867,7 +5867,7 @@
           <a:p>
             <a:r>
               <a:rPr lang="en-US" dirty="0"/>
-              <a:t>Đây là phần nhóm muốn nhấn mạnh nhất về quy trình. Bộ dữ liệu ghi nhãn "ngoài thực thể" bằng ký tự số không, chứ không phải chữ O. Thư viện seqeval không nhận ra điều đó, nên coi mỗi đoạn số không là một thực thể giả thuộc loại gạch dưới, và cộng cả vào micro F1. Trên test có 6.772 thực thể giả như vậy, gần bằng số thực thể thật. Kết quả là các số cũ, ví dụ PhoBERT 60,90% và ViHealthBERT 61,28%, đều bị lệch. Sau khi đổi số không thành O và chấm lại trên cùng checkpoint, cả ba Transformer đều tăng 1,5 đến 1,8 điểm. Quan trọng hơn là kết luận: số cũ nói ViHealthBERT hơn PhoBERT 0,37 điểm; số đúng là 0,32 điểm với khoảng tin cậy từ −0,41 đến +1,04, chứa 0, tức hai mô hình ngang nhau. Bài học: phải kiểm tra tập nhãn trước khi tin vào thước đo. Thời gian: 1 phút 15 giây.</a:t>
+              <a:t>Đây là phần nhóm muốn nhấn mạnh nhất về quy trình. Bộ dữ liệu ghi nhãn "ngoài thực thể" bằng ký tự số không, chứ không phải chữ O. Thư viện seqeval không nhận ra điều đó, nên coi mỗi đoạn số không là một thực thể giả thuộc loại gạch dưới, và cộng cả vào micro F1. Trên test có 6.772 thực thể giả như vậy, gần bằng số thực thể thật. Kết quả là các số cũ, ví dụ PhoBERT 60,90% và ViHealthBERT 61,28%, đều bị lệch. Sau khi đổi số không thành O và chấm lại trên cùng checkpoint, cả ba Transformer đều tăng 1,5 đến 1,8 điểm. Quan trọng hơn là kết luận: số cũ nói ViHealthBERT hơn PhoBERT 0,37 điểm; số đúng là 0,32 điểm với khoảng tin cậy từ −0,41 đến +1,04, chứa 0, tức chênh lệch không phân biệt được với 0; đây không phải phép kiểm định tương đương, nên nhóm không nói mô hình nào tốt hơn. Bài học: phải kiểm tra tập nhãn trước khi tin vào thước đo. Thời gian: 1 phút 15 giây.</a:t>
             </a:r>
             <a:endParaRPr lang="en-US" dirty="0"/>
           </a:p>
@@ -6043,7 +6043,7 @@
           <a:p>
             <a:r>
               <a:rPr lang="en-US" dirty="0"/>
-              <a:t>Để biết chênh lệch có thật hay không, nhóm dùng paired bootstrap trên tập test. CRF hơn cả PhoBERT và ViHealthBERT, và khoảng tin cậy không chứa 0, nên đó là khác biệt thật, dù chỉ khoảng một điểm. Giữa ViHealthBERT và PhoBERT, chênh lệch 0,32 điểm với khoảng tin cậy chứa 0: không kết luận được mô hình nào tốt hơn. Kết quả chạy lại ba seed với cách chấm đúng củng cố điều này: PhoBERT 62,98 ± 0,33 và ViHealthBERT 62,88 ± 0,12, chênh lệch nhỏ hơn độ dao động giữa các seed. Biểu đồ bên phải cho thấy pretrain y tế giúp một số loại nhưng làm giảm loại khác, nên tổng thể bù trừ nhau. Thời gian: 1 phút.</a:t>
+              <a:t>Để biết chênh lệch có thật hay không, nhóm dùng paired bootstrap trên tập test. CRF hơn cả PhoBERT và ViHealthBERT, và khoảng tin cậy không chứa 0, nên chênh lệch có ý nghĩa thống kê, dù chỉ khoảng một điểm. Giữa ViHealthBERT và PhoBERT, chênh lệch 0,32 điểm với khoảng tin cậy chứa 0: chênh lệch không phân biệt được với 0. Đây không phải phép kiểm định tương đương, nên nhóm chỉ nói rằng chưa tách được hai mô hình. Kết quả chạy lại ba seed với cách chấm đúng củng cố điều này: PhoBERT 62,98 ± 0,33 và ViHealthBERT 62,88 ± 0,12, chênh lệch nhỏ hơn độ dao động giữa các seed. Biểu đồ bên phải cho thấy pretrain y tế giúp một số loại nhưng làm giảm loại khác, nên tổng thể bù trừ nhau. Thời gian: 1 phút.</a:t>
             </a:r>
             <a:endParaRPr lang="en-US" dirty="0"/>
           </a:p>
@@ -6307,7 +6307,7 @@
           <a:p>
             <a:r>
               <a:rPr lang="en-US" dirty="0"/>
-              <a:t>Nhóm phân loại lỗi ở mức thực thể thành năm nhóm: khớp chính xác, lệch ranh giới, sai loại, bỏ sót và đoán thừa. Transformer bỏ sót ít hơn nhiều so với CRF, nhưng đoán thừa gần gấp đôi. Số thực thể bị sai loại rất ít ở mọi mô hình, nên vấn đề chính không phải nhầm loại mà là xác định ranh giới và đoán thừa. Confusion matrix bên trái của ViHealthBERT, chuẩn hoá theo hàng, cho thấy nhầm lẫn lớn nhất là giữa thực thể và nhãn O, và giữa các loại gần nghĩa như bệnh và cơ quan. Đây chính là loại lỗi mà lớp CRF xử lý tốt, nên hướng tự nhiên tiếp theo là BERT-CRF; nhóm chưa thực hiện hướng này. Thời gian: 50 giây.</a:t>
+              <a:t>Nhóm phân loại lỗi ở mức thực thể thành năm nhóm: khớp chính xác, lệch ranh giới, sai loại, bỏ sót và đoán thừa. Transformer bỏ sót ít hơn nhiều so với CRF, nhưng đoán thừa gần gấp đôi. Số thực thể bị sai loại rất ít ở mọi mô hình, nên vấn đề chính không phải nhầm loại mà là xác định ranh giới và đoán thừa. Confusion matrix bên trái là của ViHealthBERT ở mức token, chuẩn hoá theo hàng, chỉ giữ 7 loại nhiều nhất cho dễ đọc. Nhầm lẫn lớn nhất là giữa thực thể và nhãn O, ví dụ 14% token DATETIME bị đoán thành O; giữa hai loại, lớn nhất là MEDDEVICETECHNIQUE bị đoán thành DRUGCHEMICAL, 10%. Đây chính là loại lỗi mà lớp CRF xử lý tốt, nên hướng tự nhiên tiếp theo là BERT-CRF; nhóm chưa thực hiện hướng này. Thời gian: 50 giây.</a:t>
             </a:r>
             <a:endParaRPr lang="en-US" dirty="0"/>
           </a:p>
@@ -6571,7 +6571,7 @@
           <a:p>
             <a:r>
               <a:rPr lang="en-US" dirty="0"/>
-              <a:t>Thí nghiệm thứ ba đo trực tiếp điều quan trọng: sửa lỗi có giúp NER không. Nhóm chạy cùng checkpoint PhoBERT của demo trên bốn phiên bản transcript PhoWhisper của 3.437 câu test. Ban đầu có vẻ sửa lỗi giúp tăng F1, nhưng khi thêm nhánh đối chứng chỉ viết thường và bỏ dấu câu, phần tăng gần như biến mất: sửa lỗi chỉ thêm 0,054 điểm, tương đương 3 thực thể. Toàn bộ phần tăng 1,35 điểm đến từ chuẩn hoá, chủ yếu là bỏ dấu chấm ở cuối câu mà PhoWhisper luôn thêm vào. Với Whisper-small mà demo dùng, transcript vốn không có dấu câu, nên chuẩn hoá cũng không thay đổi gì. Vì vậy nhóm không đưa mô hình sửa lỗi vào demo. Lưu ý: các số này đo trên PhoWhisper, không phải pipeline Whisper-small của demo. Thời gian: 1 phút 10 giây.</a:t>
+              <a:t>Thí nghiệm thứ ba đo trực tiếp điều quan trọng: sửa lỗi có giúp NER không. Nhóm chạy cùng checkpoint PhoBERT của demo trên bốn phiên bản transcript PhoWhisper của 3.437 câu test. Ban đầu có vẻ sửa lỗi giúp tăng F1, nhưng khi thêm nhánh đối chứng chỉ viết thường và bỏ dấu câu, phần tăng gần như biến mất: sửa lỗi chỉ thêm 0,054 điểm, tương đương 3 thực thể. Toàn bộ phần tăng 1,35 điểm đến từ chuẩn hoá, chủ yếu là bỏ dấu chấm ở cuối câu mà PhoWhisper luôn thêm vào. Trong 500 transcript Whisper-small hiện có, không câu nào có chữ hoa hay dấu câu, nên bước chuẩn hoá sẽ không thay đổi câu nào trong số đó; nhóm chưa đo tác động trên pipeline demo đầy đủ. Vì vậy nhóm không đưa mô hình sửa lỗi vào demo. Lưu ý: các số này đo trên PhoWhisper, không phải pipeline Whisper-small của demo. Thời gian: 1 phút 10 giây.</a:t>
             </a:r>
             <a:endParaRPr lang="en-US" dirty="0"/>
           </a:p>
@@ -6747,7 +6747,7 @@
           <a:p>
             <a:r>
               <a:rPr lang="en-US" dirty="0"/>
-              <a:t>Hệ thống thực tế nhận transcript do ASR sinh ra. Nhóm dùng transcript có sẵn: PhoWhisper-medium trên toàn bộ 3.437 câu nói test, và Whisper-small của demo trên 500 câu đầu. PhoWhisper có WER 23,9% và giữ nguyên 78,5% thực thể vàng. Trên cùng 500 câu, Whisper-small kém hơn: WER 25,3% và chỉ 61,4% thực thể còn nguyên; thiết bị – kỹ thuật và phẫu thuật mất nhiều nhất. Phân tích lỗi cho thấy sai dấu chỉ chiếm 2,4% lỗi, còn hơn một nửa là chèn hoặc xoá từ ở hai đầu câu, tức lỗi cắt đoạn âm thanh, thứ mà mô hình văn bản không sửa được. Đó cũng là lý do sửa lỗi văn bản không giúp NER. Thời gian: 1 phút.</a:t>
+              <a:t>Hệ thống thực tế nhận transcript do ASR sinh ra. Nhóm dùng transcript có sẵn: PhoWhisper-medium trên toàn bộ 3.437 câu nói test, và Whisper-small của demo trên 500 câu đầu. Trên 3.437 câu, PhoWhisper-medium có WER 23,9% và giữ nguyên 78,5% trong 8.112 thực thể vàng; đây không phải mô hình của demo. Trên cùng 500 câu, Whisper-small kém hơn: WER 25,3% và chỉ 61,4% thực thể còn nguyên; thiết bị – kỹ thuật và phẫu thuật mất nhiều nhất. Phân tích lỗi cho thấy sai dấu chỉ chiếm 2,4% lỗi, còn hơn một nửa là chèn hoặc xoá từ ở hai đầu câu, tức lỗi cắt đoạn âm thanh, thứ mà mô hình văn bản không sửa được. Đó cũng là lý do sửa lỗi văn bản không giúp NER. Thời gian: 1 phút.</a:t>
             </a:r>
             <a:endParaRPr lang="en-US" dirty="0"/>
           </a:p>
@@ -6923,7 +6923,7 @@
           <a:p>
             <a:r>
               <a:rPr lang="en-US" dirty="0"/>
-              <a:t>Tóm lại: trên tập test lệch miền của VietMed-NER, CRF đạt F1 strict cao nhất với 63,80%. PhoBERT và ViHealthBERT ngang nhau sau khi sửa lỗi chấm điểm và kiểm định thống kê. Transformer, đặc biệt ViHealthBERT, nhận ra thực thể chưa gặp tốt hơn nhiều, gần 42%. Các hướng thử thêm, học Vi-Ner trước và sửa lỗi transcript trước NER, không cải thiện F1 tổng nên không được đưa vào demo. Thông điệp chính: nút thắt nằm ở dữ liệu, gồm lệch miền, lớp hiếm và ranh giới nhãn, hơn là ở việc chọn mô hình. Cảm ơn Thầy và các bạn đã lắng nghe; nhóm sẵn sàng trả lời câu hỏi. Thời gian: 45 giây.</a:t>
+              <a:t>Tóm lại: trên tập test lệch miền của VietMed-NER, CRF đạt F1 strict cao nhất với 63,80%. Giữa PhoBERT và ViHealthBERT, sau khi sửa lỗi chấm điểm, chênh lệch không phân biệt được với 0 theo bootstrap và ba seed. Transformer, đặc biệt ViHealthBERT, nhận ra thực thể chưa gặp tốt hơn nhiều, gần 42%. Các hướng thử thêm, học Vi-Ner trước và sửa lỗi transcript trước NER, không cải thiện F1 tổng nên không được đưa vào demo. Thông điệp chính: nút thắt nằm ở dữ liệu, gồm lệch miền, lớp hiếm và ranh giới nhãn, hơn là ở việc chọn mô hình. Cảm ơn Thầy và các bạn đã lắng nghe; nhóm sẵn sàng trả lời câu hỏi. Thời gian: 45 giây.</a:t>
             </a:r>
             <a:endParaRPr lang="en-US" dirty="0"/>
           </a:p>
@@ -10263,7 +10263,7 @@
                 <a:ea typeface="Calibri" pitchFamily="34" charset="-122"/>
                 <a:cs typeface="Calibri" pitchFamily="34" charset="-120"/>
               </a:rPr>
-              <a:t>CI95 chứa 0 ⇒ hai mô hình </a:t>
+              <a:t>CI95 chứa 0 ⇒ </a:t>
             </a:r>
             <a:r>
               <a:rPr lang="en-US" sz="1100" b="1" dirty="0">
@@ -10274,7 +10274,7 @@
                 <a:ea typeface="Calibri" pitchFamily="34" charset="-122"/>
                 <a:cs typeface="Calibri" pitchFamily="34" charset="-120"/>
               </a:rPr>
-              <a:t>ngang nhau</a:t>
+              <a:t>chênh lệch không phân biệt được với 0</a:t>
             </a:r>
             <a:endParaRPr lang="en-US" sz="1100" dirty="0"/>
           </a:p>
@@ -14547,7 +14547,7 @@
                 <a:ea typeface="Cambria" pitchFamily="34" charset="-122"/>
                 <a:cs typeface="Cambria" pitchFamily="34" charset="-120"/>
               </a:rPr>
-              <a:t>CRF hơn khoảng 1 điểm; PhoBERT ≈ ViHealthBERT</a:t>
+              <a:t>CRF hơn ~1 điểm; hai BERT tiếng Việt chưa tách được</a:t>
             </a:r>
             <a:endParaRPr lang="en-US" sz="2300" dirty="0"/>
           </a:p>
@@ -14935,10 +14935,10 @@
             <a:tbl>
               <a:tblPr/>
               <a:tblGrid>
-                <a:gridCol w="2194560"/>
-                <a:gridCol w="822960"/>
-                <a:gridCol w="1600200"/>
-                <a:gridCol w="1417320"/>
+                <a:gridCol w="2057400"/>
+                <a:gridCol w="731520"/>
+                <a:gridCol w="1463040"/>
+                <a:gridCol w="1783080"/>
               </a:tblGrid>
               <a:tr h="411480">
                 <a:tc>
@@ -14950,7 +14950,7 @@
                         <a:buNone/>
                       </a:pPr>
                       <a:r>
-                        <a:rPr lang="en-US" sz="1250" b="1" dirty="0">
+                        <a:rPr lang="en-US" sz="1200" b="1" dirty="0">
                           <a:solidFill>
                             <a:srgbClr val="FFFFFF"/>
                           </a:solidFill>
@@ -14960,7 +14960,7 @@
                         </a:rPr>
                         <a:t>Cặp (A − B)</a:t>
                       </a:r>
-                      <a:endParaRPr lang="en-US" sz="1250" dirty="0">
+                      <a:endParaRPr lang="en-US" sz="1200" dirty="0">
                         <a:latin typeface="Calibri" charset="0"/>
                         <a:ea typeface="Calibri" charset="0"/>
                         <a:cs typeface="Calibri" charset="0"/>
@@ -15018,7 +15018,7 @@
                         <a:buNone/>
                       </a:pPr>
                       <a:r>
-                        <a:rPr lang="en-US" sz="1250" b="1" dirty="0">
+                        <a:rPr lang="en-US" sz="1200" b="1" dirty="0">
                           <a:solidFill>
                             <a:srgbClr val="FFFFFF"/>
                           </a:solidFill>
@@ -15028,7 +15028,7 @@
                         </a:rPr>
                         <a:t>Δ F1</a:t>
                       </a:r>
-                      <a:endParaRPr lang="en-US" sz="1250" dirty="0">
+                      <a:endParaRPr lang="en-US" sz="1200" dirty="0">
                         <a:latin typeface="Calibri" charset="0"/>
                         <a:ea typeface="Calibri" charset="0"/>
                         <a:cs typeface="Calibri" charset="0"/>
@@ -15086,7 +15086,7 @@
                         <a:buNone/>
                       </a:pPr>
                       <a:r>
-                        <a:rPr lang="en-US" sz="1250" b="1" dirty="0">
+                        <a:rPr lang="en-US" sz="1200" b="1" dirty="0">
                           <a:solidFill>
                             <a:srgbClr val="FFFFFF"/>
                           </a:solidFill>
@@ -15096,7 +15096,7 @@
                         </a:rPr>
                         <a:t>CI95 bootstrap</a:t>
                       </a:r>
-                      <a:endParaRPr lang="en-US" sz="1250" dirty="0">
+                      <a:endParaRPr lang="en-US" sz="1200" dirty="0">
                         <a:latin typeface="Calibri" charset="0"/>
                         <a:ea typeface="Calibri" charset="0"/>
                         <a:cs typeface="Calibri" charset="0"/>
@@ -15154,7 +15154,7 @@
                         <a:buNone/>
                       </a:pPr>
                       <a:r>
-                        <a:rPr lang="en-US" sz="1250" b="1" dirty="0">
+                        <a:rPr lang="en-US" sz="1200" b="1" dirty="0">
                           <a:solidFill>
                             <a:srgbClr val="FFFFFF"/>
                           </a:solidFill>
@@ -15164,7 +15164,7 @@
                         </a:rPr>
                         <a:t>Kết luận</a:t>
                       </a:r>
-                      <a:endParaRPr lang="en-US" sz="1250" dirty="0">
+                      <a:endParaRPr lang="en-US" sz="1200" dirty="0">
                         <a:latin typeface="Calibri" charset="0"/>
                         <a:ea typeface="Calibri" charset="0"/>
                         <a:cs typeface="Calibri" charset="0"/>
@@ -15224,7 +15224,7 @@
                         <a:buNone/>
                       </a:pPr>
                       <a:r>
-                        <a:rPr lang="en-US" sz="1250" dirty="0">
+                        <a:rPr lang="en-US" sz="1200" dirty="0">
                           <a:solidFill>
                             <a:srgbClr val="1B2733"/>
                           </a:solidFill>
@@ -15234,7 +15234,7 @@
                         </a:rPr>
                         <a:t>CRF - ViHealthBERT</a:t>
                       </a:r>
-                      <a:endParaRPr lang="en-US" sz="1250" dirty="0">
+                      <a:endParaRPr lang="en-US" sz="1200" dirty="0">
                         <a:latin typeface="Calibri" charset="0"/>
                         <a:ea typeface="Calibri" charset="0"/>
                         <a:cs typeface="Calibri" charset="0"/>
@@ -15292,7 +15292,7 @@
                         <a:buNone/>
                       </a:pPr>
                       <a:r>
-                        <a:rPr lang="en-US" sz="1250" dirty="0">
+                        <a:rPr lang="en-US" sz="1200" dirty="0">
                           <a:solidFill>
                             <a:srgbClr val="1B2733"/>
                           </a:solidFill>
@@ -15302,7 +15302,7 @@
                         </a:rPr>
                         <a:t>+1,05</a:t>
                       </a:r>
-                      <a:endParaRPr lang="en-US" sz="1250" dirty="0">
+                      <a:endParaRPr lang="en-US" sz="1200" dirty="0">
                         <a:latin typeface="Calibri" charset="0"/>
                         <a:ea typeface="Calibri" charset="0"/>
                         <a:cs typeface="Calibri" charset="0"/>
@@ -15360,7 +15360,7 @@
                         <a:buNone/>
                       </a:pPr>
                       <a:r>
-                        <a:rPr lang="en-US" sz="1250" dirty="0">
+                        <a:rPr lang="en-US" sz="1200" dirty="0">
                           <a:solidFill>
                             <a:srgbClr val="1B2733"/>
                           </a:solidFill>
@@ -15370,7 +15370,7 @@
                         </a:rPr>
                         <a:t>[+0,08; +2,05]</a:t>
                       </a:r>
-                      <a:endParaRPr lang="en-US" sz="1250" dirty="0">
+                      <a:endParaRPr lang="en-US" sz="1200" dirty="0">
                         <a:latin typeface="Calibri" charset="0"/>
                         <a:ea typeface="Calibri" charset="0"/>
                         <a:cs typeface="Calibri" charset="0"/>
@@ -15428,7 +15428,7 @@
                         <a:buNone/>
                       </a:pPr>
                       <a:r>
-                        <a:rPr lang="en-US" sz="1250" dirty="0">
+                        <a:rPr lang="en-US" sz="1200" dirty="0">
                           <a:solidFill>
                             <a:srgbClr val="1B2733"/>
                           </a:solidFill>
@@ -15436,9 +15436,9 @@
                           <a:ea typeface="Calibri" pitchFamily="34" charset="-122"/>
                           <a:cs typeface="Calibri" pitchFamily="34" charset="-120"/>
                         </a:rPr>
-                        <a:t>Khác biệt thật</a:t>
+                        <a:t>CI không chứa 0</a:t>
                       </a:r>
-                      <a:endParaRPr lang="en-US" sz="1250" dirty="0">
+                      <a:endParaRPr lang="en-US" sz="1200" dirty="0">
                         <a:latin typeface="Calibri" charset="0"/>
                         <a:ea typeface="Calibri" charset="0"/>
                         <a:cs typeface="Calibri" charset="0"/>
@@ -15498,7 +15498,7 @@
                         <a:buNone/>
                       </a:pPr>
                       <a:r>
-                        <a:rPr lang="en-US" sz="1250" dirty="0">
+                        <a:rPr lang="en-US" sz="1200" dirty="0">
                           <a:solidFill>
                             <a:srgbClr val="1B2733"/>
                           </a:solidFill>
@@ -15508,7 +15508,7 @@
                         </a:rPr>
                         <a:t>CRF - PhoBERT</a:t>
                       </a:r>
-                      <a:endParaRPr lang="en-US" sz="1250" dirty="0">
+                      <a:endParaRPr lang="en-US" sz="1200" dirty="0">
                         <a:latin typeface="Calibri" charset="0"/>
                         <a:ea typeface="Calibri" charset="0"/>
                         <a:cs typeface="Calibri" charset="0"/>
@@ -15566,7 +15566,7 @@
                         <a:buNone/>
                       </a:pPr>
                       <a:r>
-                        <a:rPr lang="en-US" sz="1250" dirty="0">
+                        <a:rPr lang="en-US" sz="1200" dirty="0">
                           <a:solidFill>
                             <a:srgbClr val="1B2733"/>
                           </a:solidFill>
@@ -15576,7 +15576,7 @@
                         </a:rPr>
                         <a:t>+1,37</a:t>
                       </a:r>
-                      <a:endParaRPr lang="en-US" sz="1250" dirty="0">
+                      <a:endParaRPr lang="en-US" sz="1200" dirty="0">
                         <a:latin typeface="Calibri" charset="0"/>
                         <a:ea typeface="Calibri" charset="0"/>
                         <a:cs typeface="Calibri" charset="0"/>
@@ -15634,7 +15634,7 @@
                         <a:buNone/>
                       </a:pPr>
                       <a:r>
-                        <a:rPr lang="en-US" sz="1250" dirty="0">
+                        <a:rPr lang="en-US" sz="1200" dirty="0">
                           <a:solidFill>
                             <a:srgbClr val="1B2733"/>
                           </a:solidFill>
@@ -15644,7 +15644,7 @@
                         </a:rPr>
                         <a:t>[+0,43; +2,31]</a:t>
                       </a:r>
-                      <a:endParaRPr lang="en-US" sz="1250" dirty="0">
+                      <a:endParaRPr lang="en-US" sz="1200" dirty="0">
                         <a:latin typeface="Calibri" charset="0"/>
                         <a:ea typeface="Calibri" charset="0"/>
                         <a:cs typeface="Calibri" charset="0"/>
@@ -15702,7 +15702,7 @@
                         <a:buNone/>
                       </a:pPr>
                       <a:r>
-                        <a:rPr lang="en-US" sz="1250" dirty="0">
+                        <a:rPr lang="en-US" sz="1200" dirty="0">
                           <a:solidFill>
                             <a:srgbClr val="1B2733"/>
                           </a:solidFill>
@@ -15710,9 +15710,9 @@
                           <a:ea typeface="Calibri" pitchFamily="34" charset="-122"/>
                           <a:cs typeface="Calibri" pitchFamily="34" charset="-120"/>
                         </a:rPr>
-                        <a:t>Khác biệt thật</a:t>
+                        <a:t>CI không chứa 0</a:t>
                       </a:r>
-                      <a:endParaRPr lang="en-US" sz="1250" dirty="0">
+                      <a:endParaRPr lang="en-US" sz="1200" dirty="0">
                         <a:latin typeface="Calibri" charset="0"/>
                         <a:ea typeface="Calibri" charset="0"/>
                         <a:cs typeface="Calibri" charset="0"/>
@@ -15772,7 +15772,7 @@
                         <a:buNone/>
                       </a:pPr>
                       <a:r>
-                        <a:rPr lang="en-US" sz="1250" b="1" dirty="0">
+                        <a:rPr lang="en-US" sz="1200" b="1" dirty="0">
                           <a:solidFill>
                             <a:srgbClr val="1B2733"/>
                           </a:solidFill>
@@ -15782,7 +15782,7 @@
                         </a:rPr>
                         <a:t>ViHealthBERT - PhoBERT</a:t>
                       </a:r>
-                      <a:endParaRPr lang="en-US" sz="1250" dirty="0">
+                      <a:endParaRPr lang="en-US" sz="1200" dirty="0">
                         <a:latin typeface="Calibri" charset="0"/>
                         <a:ea typeface="Calibri" charset="0"/>
                         <a:cs typeface="Calibri" charset="0"/>
@@ -15840,7 +15840,7 @@
                         <a:buNone/>
                       </a:pPr>
                       <a:r>
-                        <a:rPr lang="en-US" sz="1250" b="1" dirty="0">
+                        <a:rPr lang="en-US" sz="1200" b="1" dirty="0">
                           <a:solidFill>
                             <a:srgbClr val="1B2733"/>
                           </a:solidFill>
@@ -15850,7 +15850,7 @@
                         </a:rPr>
                         <a:t>+0,32</a:t>
                       </a:r>
-                      <a:endParaRPr lang="en-US" sz="1250" dirty="0">
+                      <a:endParaRPr lang="en-US" sz="1200" dirty="0">
                         <a:latin typeface="Calibri" charset="0"/>
                         <a:ea typeface="Calibri" charset="0"/>
                         <a:cs typeface="Calibri" charset="0"/>
@@ -15908,7 +15908,7 @@
                         <a:buNone/>
                       </a:pPr>
                       <a:r>
-                        <a:rPr lang="en-US" sz="1250" b="1" dirty="0">
+                        <a:rPr lang="en-US" sz="1200" b="1" dirty="0">
                           <a:solidFill>
                             <a:srgbClr val="1B2733"/>
                           </a:solidFill>
@@ -15918,7 +15918,7 @@
                         </a:rPr>
                         <a:t>[−0,41; +1,04]</a:t>
                       </a:r>
-                      <a:endParaRPr lang="en-US" sz="1250" dirty="0">
+                      <a:endParaRPr lang="en-US" sz="1200" dirty="0">
                         <a:latin typeface="Calibri" charset="0"/>
                         <a:ea typeface="Calibri" charset="0"/>
                         <a:cs typeface="Calibri" charset="0"/>
@@ -15976,7 +15976,7 @@
                         <a:buNone/>
                       </a:pPr>
                       <a:r>
-                        <a:rPr lang="en-US" sz="1250" b="1" dirty="0">
+                        <a:rPr lang="en-US" sz="1200" b="1" dirty="0">
                           <a:solidFill>
                             <a:srgbClr val="1B2733"/>
                           </a:solidFill>
@@ -15984,9 +15984,9 @@
                           <a:ea typeface="Calibri" pitchFamily="34" charset="-122"/>
                           <a:cs typeface="Calibri" pitchFamily="34" charset="-120"/>
                         </a:rPr>
-                        <a:t>Ngang nhau</a:t>
+                        <a:t>Không phân biệt được với 0</a:t>
                       </a:r>
-                      <a:endParaRPr lang="en-US" sz="1250" dirty="0">
+                      <a:endParaRPr lang="en-US" sz="1200" dirty="0">
                         <a:latin typeface="Calibri" charset="0"/>
                         <a:ea typeface="Calibri" charset="0"/>
                         <a:cs typeface="Calibri" charset="0"/>
@@ -16046,7 +16046,7 @@
                         <a:buNone/>
                       </a:pPr>
                       <a:r>
-                        <a:rPr lang="en-US" sz="1250" dirty="0">
+                        <a:rPr lang="en-US" sz="1200" dirty="0">
                           <a:solidFill>
                             <a:srgbClr val="1B2733"/>
                           </a:solidFill>
@@ -16056,7 +16056,7 @@
                         </a:rPr>
                         <a:t>PhoBERT - XLM-R</a:t>
                       </a:r>
-                      <a:endParaRPr lang="en-US" sz="1250" dirty="0">
+                      <a:endParaRPr lang="en-US" sz="1200" dirty="0">
                         <a:latin typeface="Calibri" charset="0"/>
                         <a:ea typeface="Calibri" charset="0"/>
                         <a:cs typeface="Calibri" charset="0"/>
@@ -16114,7 +16114,7 @@
                         <a:buNone/>
                       </a:pPr>
                       <a:r>
-                        <a:rPr lang="en-US" sz="1250" dirty="0">
+                        <a:rPr lang="en-US" sz="1200" dirty="0">
                           <a:solidFill>
                             <a:srgbClr val="1B2733"/>
                           </a:solidFill>
@@ -16124,7 +16124,7 @@
                         </a:rPr>
                         <a:t>+3,80</a:t>
                       </a:r>
-                      <a:endParaRPr lang="en-US" sz="1250" dirty="0">
+                      <a:endParaRPr lang="en-US" sz="1200" dirty="0">
                         <a:latin typeface="Calibri" charset="0"/>
                         <a:ea typeface="Calibri" charset="0"/>
                         <a:cs typeface="Calibri" charset="0"/>
@@ -16182,7 +16182,7 @@
                         <a:buNone/>
                       </a:pPr>
                       <a:r>
-                        <a:rPr lang="en-US" sz="1250" dirty="0">
+                        <a:rPr lang="en-US" sz="1200" dirty="0">
                           <a:solidFill>
                             <a:srgbClr val="1B2733"/>
                           </a:solidFill>
@@ -16192,7 +16192,7 @@
                         </a:rPr>
                         <a:t>[+2,89; +4,82]</a:t>
                       </a:r>
-                      <a:endParaRPr lang="en-US" sz="1250" dirty="0">
+                      <a:endParaRPr lang="en-US" sz="1200" dirty="0">
                         <a:latin typeface="Calibri" charset="0"/>
                         <a:ea typeface="Calibri" charset="0"/>
                         <a:cs typeface="Calibri" charset="0"/>
@@ -16250,7 +16250,7 @@
                         <a:buNone/>
                       </a:pPr>
                       <a:r>
-                        <a:rPr lang="en-US" sz="1250" dirty="0">
+                        <a:rPr lang="en-US" sz="1200" dirty="0">
                           <a:solidFill>
                             <a:srgbClr val="1B2733"/>
                           </a:solidFill>
@@ -16258,9 +16258,9 @@
                           <a:ea typeface="Calibri" pitchFamily="34" charset="-122"/>
                           <a:cs typeface="Calibri" pitchFamily="34" charset="-120"/>
                         </a:rPr>
-                        <a:t>Khác biệt thật</a:t>
+                        <a:t>CI không chứa 0</a:t>
                       </a:r>
-                      <a:endParaRPr lang="en-US" sz="1250" dirty="0">
+                      <a:endParaRPr lang="en-US" sz="1200" dirty="0">
                         <a:latin typeface="Calibri" charset="0"/>
                         <a:ea typeface="Calibri" charset="0"/>
                         <a:cs typeface="Calibri" charset="0"/>
@@ -16320,7 +16320,7 @@
                         <a:buNone/>
                       </a:pPr>
                       <a:r>
-                        <a:rPr lang="en-US" sz="1250" dirty="0">
+                        <a:rPr lang="en-US" sz="1200" dirty="0">
                           <a:solidFill>
                             <a:srgbClr val="1B2733"/>
                           </a:solidFill>
@@ -16330,7 +16330,7 @@
                         </a:rPr>
                         <a:t>CRF - Linear SVM</a:t>
                       </a:r>
-                      <a:endParaRPr lang="en-US" sz="1250" dirty="0">
+                      <a:endParaRPr lang="en-US" sz="1200" dirty="0">
                         <a:latin typeface="Calibri" charset="0"/>
                         <a:ea typeface="Calibri" charset="0"/>
                         <a:cs typeface="Calibri" charset="0"/>
@@ -16388,7 +16388,7 @@
                         <a:buNone/>
                       </a:pPr>
                       <a:r>
-                        <a:rPr lang="en-US" sz="1250" dirty="0">
+                        <a:rPr lang="en-US" sz="1200" dirty="0">
                           <a:solidFill>
                             <a:srgbClr val="1B2733"/>
                           </a:solidFill>
@@ -16398,7 +16398,7 @@
                         </a:rPr>
                         <a:t>+5,70</a:t>
                       </a:r>
-                      <a:endParaRPr lang="en-US" sz="1250" dirty="0">
+                      <a:endParaRPr lang="en-US" sz="1200" dirty="0">
                         <a:latin typeface="Calibri" charset="0"/>
                         <a:ea typeface="Calibri" charset="0"/>
                         <a:cs typeface="Calibri" charset="0"/>
@@ -16456,7 +16456,7 @@
                         <a:buNone/>
                       </a:pPr>
                       <a:r>
-                        <a:rPr lang="en-US" sz="1250" dirty="0">
+                        <a:rPr lang="en-US" sz="1200" dirty="0">
                           <a:solidFill>
                             <a:srgbClr val="1B2733"/>
                           </a:solidFill>
@@ -16466,7 +16466,7 @@
                         </a:rPr>
                         <a:t>[+4,90; +6,50]</a:t>
                       </a:r>
-                      <a:endParaRPr lang="en-US" sz="1250" dirty="0">
+                      <a:endParaRPr lang="en-US" sz="1200" dirty="0">
                         <a:latin typeface="Calibri" charset="0"/>
                         <a:ea typeface="Calibri" charset="0"/>
                         <a:cs typeface="Calibri" charset="0"/>
@@ -16524,7 +16524,7 @@
                         <a:buNone/>
                       </a:pPr>
                       <a:r>
-                        <a:rPr lang="en-US" sz="1250" dirty="0">
+                        <a:rPr lang="en-US" sz="1200" dirty="0">
                           <a:solidFill>
                             <a:srgbClr val="1B2733"/>
                           </a:solidFill>
@@ -16532,9 +16532,9 @@
                           <a:ea typeface="Calibri" pitchFamily="34" charset="-122"/>
                           <a:cs typeface="Calibri" pitchFamily="34" charset="-120"/>
                         </a:rPr>
-                        <a:t>Khác biệt thật</a:t>
+                        <a:t>CI không chứa 0</a:t>
                       </a:r>
-                      <a:endParaRPr lang="en-US" sz="1250" dirty="0">
+                      <a:endParaRPr lang="en-US" sz="1200" dirty="0">
                         <a:latin typeface="Calibri" charset="0"/>
                         <a:ea typeface="Calibri" charset="0"/>
                         <a:cs typeface="Calibri" charset="0"/>
@@ -16594,7 +16594,7 @@
                         <a:buNone/>
                       </a:pPr>
                       <a:r>
-                        <a:rPr lang="en-US" sz="1250" dirty="0">
+                        <a:rPr lang="en-US" sz="1200" dirty="0">
                           <a:solidFill>
                             <a:srgbClr val="1B2733"/>
                           </a:solidFill>
@@ -16604,7 +16604,7 @@
                         </a:rPr>
                         <a:t>Linear SVM - LogReg</a:t>
                       </a:r>
-                      <a:endParaRPr lang="en-US" sz="1250" dirty="0">
+                      <a:endParaRPr lang="en-US" sz="1200" dirty="0">
                         <a:latin typeface="Calibri" charset="0"/>
                         <a:ea typeface="Calibri" charset="0"/>
                         <a:cs typeface="Calibri" charset="0"/>
@@ -16662,7 +16662,7 @@
                         <a:buNone/>
                       </a:pPr>
                       <a:r>
-                        <a:rPr lang="en-US" sz="1250" dirty="0">
+                        <a:rPr lang="en-US" sz="1200" dirty="0">
                           <a:solidFill>
                             <a:srgbClr val="1B2733"/>
                           </a:solidFill>
@@ -16672,7 +16672,7 @@
                         </a:rPr>
                         <a:t>+1,87</a:t>
                       </a:r>
-                      <a:endParaRPr lang="en-US" sz="1250" dirty="0">
+                      <a:endParaRPr lang="en-US" sz="1200" dirty="0">
                         <a:latin typeface="Calibri" charset="0"/>
                         <a:ea typeface="Calibri" charset="0"/>
                         <a:cs typeface="Calibri" charset="0"/>
@@ -16730,7 +16730,7 @@
                         <a:buNone/>
                       </a:pPr>
                       <a:r>
-                        <a:rPr lang="en-US" sz="1250" dirty="0">
+                        <a:rPr lang="en-US" sz="1200" dirty="0">
                           <a:solidFill>
                             <a:srgbClr val="1B2733"/>
                           </a:solidFill>
@@ -16740,7 +16740,7 @@
                         </a:rPr>
                         <a:t>[+1,35; +2,42]</a:t>
                       </a:r>
-                      <a:endParaRPr lang="en-US" sz="1250" dirty="0">
+                      <a:endParaRPr lang="en-US" sz="1200" dirty="0">
                         <a:latin typeface="Calibri" charset="0"/>
                         <a:ea typeface="Calibri" charset="0"/>
                         <a:cs typeface="Calibri" charset="0"/>
@@ -16798,7 +16798,7 @@
                         <a:buNone/>
                       </a:pPr>
                       <a:r>
-                        <a:rPr lang="en-US" sz="1250" dirty="0">
+                        <a:rPr lang="en-US" sz="1200" dirty="0">
                           <a:solidFill>
                             <a:srgbClr val="1B2733"/>
                           </a:solidFill>
@@ -16806,9 +16806,9 @@
                           <a:ea typeface="Calibri" pitchFamily="34" charset="-122"/>
                           <a:cs typeface="Calibri" pitchFamily="34" charset="-120"/>
                         </a:rPr>
-                        <a:t>Khác biệt thật</a:t>
+                        <a:t>CI không chứa 0</a:t>
                       </a:r>
-                      <a:endParaRPr lang="en-US" sz="1250" dirty="0">
+                      <a:endParaRPr lang="en-US" sz="1200" dirty="0">
                         <a:latin typeface="Calibri" charset="0"/>
                         <a:ea typeface="Calibri" charset="0"/>
                         <a:cs typeface="Calibri" charset="0"/>
@@ -19872,33 +19872,5611 @@
           </a:p>
         </p:txBody>
       </p:sp>
-      <p:pic>
-        <p:nvPicPr>
-          <p:cNvPr id="14" name="Image 0" descr="fig_confusion_vihealthbert.png">    </p:cNvPr>
-          <p:cNvPicPr>
-            <a:picLocks noChangeAspect="1"/>
-          </p:cNvPicPr>
-          <p:nvPr/>
-        </p:nvPicPr>
-        <p:blipFill>
-          <a:blip r:embed="rId1"/>
-          <a:stretch>
-            <a:fillRect/>
-          </a:stretch>
-        </p:blipFill>
-        <p:spPr>
-          <a:xfrm>
-            <a:off x="457200" y="1097280"/>
-            <a:ext cx="5394960" cy="4414058"/>
-          </a:xfrm>
-          <a:prstGeom prst="rect">
-            <a:avLst/>
-          </a:prstGeom>
-        </p:spPr>
-      </p:pic>
       <p:graphicFrame>
         <p:nvGraphicFramePr>
           <p:cNvPr id="17" name="Table 0"/>
+          <p:cNvGraphicFramePr>
+            <a:graphicFrameLocks noGrp="1"/>
+          </p:cNvGraphicFramePr>
+          <p:nvPr>
+            <p:extLst>
+              <p:ext uri="{D42A27DB-BD31-4B8C-83A1-F6EECF244321}">
+                <p14:modId xmlns:p14="http://schemas.microsoft.com/office/powerpoint/2010/main" val="1579011935"/>
+              </p:ext>
+            </p:extLst>
+          </p:nvPr>
+        </p:nvGraphicFramePr>
+        <p:xfrm>
+          <a:off x="548640" y="1234440"/>
+          <a:ext cx="5394960" cy="914400"/>
+        </p:xfrm>
+        <a:graphic>
+          <a:graphicData uri="http://schemas.openxmlformats.org/drawingml/2006/table">
+            <a:tbl>
+              <a:tblPr/>
+              <a:tblGrid>
+                <a:gridCol w="1005840"/>
+                <a:gridCol w="548640"/>
+                <a:gridCol w="548640"/>
+                <a:gridCol w="548640"/>
+                <a:gridCol w="548640"/>
+                <a:gridCol w="548640"/>
+                <a:gridCol w="548640"/>
+                <a:gridCol w="548640"/>
+                <a:gridCol w="548640"/>
+              </a:tblGrid>
+              <a:tr h="457200">
+                <a:tc>
+                  <a:txBody>
+                    <a:bodyPr/>
+                    <a:lstStyle/>
+                    <a:p>
+                      <a:pPr indent="0" marL="0">
+                        <a:buNone/>
+                      </a:pPr>
+                      <a:r>
+                        <a:rPr lang="en-US" sz="900" b="1" dirty="0">
+                          <a:solidFill>
+                            <a:srgbClr val="FFFFFF"/>
+                          </a:solidFill>
+                          <a:latin typeface="Calibri" pitchFamily="34" charset="0"/>
+                          <a:ea typeface="Calibri" pitchFamily="34" charset="-122"/>
+                          <a:cs typeface="Calibri" pitchFamily="34" charset="-120"/>
+                        </a:rPr>
+                        <a:t>Vàng ↓ / Dự đoán →</a:t>
+                      </a:r>
+                      <a:endParaRPr lang="en-US" sz="900" dirty="0">
+                        <a:latin typeface="Calibri" charset="0"/>
+                        <a:ea typeface="Calibri" charset="0"/>
+                        <a:cs typeface="Calibri" charset="0"/>
+                      </a:endParaRPr>
+                    </a:p>
+                  </a:txBody>
+                  <a:tcPr marL="25400" marR="25400" marT="12700" marB="12700">
+                    <a:lnL w="6350" cap="flat" cmpd="sng" algn="ctr">
+                      <a:solidFill>
+                        <a:srgbClr val="D5DEE5"/>
+                      </a:solidFill>
+                      <a:prstDash val="solid"/>
+                      <a:round/>
+                      <a:headEnd type="none" w="med" len="med"/>
+                      <a:tailEnd type="none" w="med" len="med"/>
+                    </a:lnL>
+                    <a:lnR w="6350" cap="flat" cmpd="sng" algn="ctr">
+                      <a:solidFill>
+                        <a:srgbClr val="D5DEE5"/>
+                      </a:solidFill>
+                      <a:prstDash val="solid"/>
+                      <a:round/>
+                      <a:headEnd type="none" w="med" len="med"/>
+                      <a:tailEnd type="none" w="med" len="med"/>
+                    </a:lnR>
+                    <a:lnT w="6350" cap="flat" cmpd="sng" algn="ctr">
+                      <a:solidFill>
+                        <a:srgbClr val="D5DEE5"/>
+                      </a:solidFill>
+                      <a:prstDash val="solid"/>
+                      <a:round/>
+                      <a:headEnd type="none" w="med" len="med"/>
+                      <a:tailEnd type="none" w="med" len="med"/>
+                    </a:lnT>
+                    <a:lnB w="6350" cap="flat" cmpd="sng" algn="ctr">
+                      <a:solidFill>
+                        <a:srgbClr val="D5DEE5"/>
+                      </a:solidFill>
+                      <a:prstDash val="solid"/>
+                      <a:round/>
+                      <a:headEnd type="none" w="med" len="med"/>
+                      <a:tailEnd type="none" w="med" len="med"/>
+                    </a:lnB>
+                    <a:solidFill>
+                      <a:srgbClr val="0F2A3D"/>
+                    </a:solidFill>
+                  </a:tcPr>
+                </a:tc>
+                <a:tc>
+                  <a:txBody>
+                    <a:bodyPr/>
+                    <a:lstStyle/>
+                    <a:p>
+                      <a:pPr algn="ctr" indent="0" marL="0">
+                        <a:buNone/>
+                      </a:pPr>
+                      <a:r>
+                        <a:rPr lang="en-US" sz="900" b="1" dirty="0">
+                          <a:solidFill>
+                            <a:srgbClr val="FFFFFF"/>
+                          </a:solidFill>
+                          <a:latin typeface="Calibri" pitchFamily="34" charset="0"/>
+                          <a:ea typeface="Calibri" pitchFamily="34" charset="-122"/>
+                          <a:cs typeface="Calibri" pitchFamily="34" charset="-120"/>
+                        </a:rPr>
+                        <a:t>O</a:t>
+                      </a:r>
+                      <a:endParaRPr lang="en-US" sz="900" dirty="0">
+                        <a:latin typeface="Calibri" charset="0"/>
+                        <a:ea typeface="Calibri" charset="0"/>
+                        <a:cs typeface="Calibri" charset="0"/>
+                      </a:endParaRPr>
+                    </a:p>
+                  </a:txBody>
+                  <a:tcPr marL="25400" marR="25400" marT="12700" marB="12700">
+                    <a:lnL w="6350" cap="flat" cmpd="sng" algn="ctr">
+                      <a:solidFill>
+                        <a:srgbClr val="D5DEE5"/>
+                      </a:solidFill>
+                      <a:prstDash val="solid"/>
+                      <a:round/>
+                      <a:headEnd type="none" w="med" len="med"/>
+                      <a:tailEnd type="none" w="med" len="med"/>
+                    </a:lnL>
+                    <a:lnR w="6350" cap="flat" cmpd="sng" algn="ctr">
+                      <a:solidFill>
+                        <a:srgbClr val="D5DEE5"/>
+                      </a:solidFill>
+                      <a:prstDash val="solid"/>
+                      <a:round/>
+                      <a:headEnd type="none" w="med" len="med"/>
+                      <a:tailEnd type="none" w="med" len="med"/>
+                    </a:lnR>
+                    <a:lnT w="6350" cap="flat" cmpd="sng" algn="ctr">
+                      <a:solidFill>
+                        <a:srgbClr val="D5DEE5"/>
+                      </a:solidFill>
+                      <a:prstDash val="solid"/>
+                      <a:round/>
+                      <a:headEnd type="none" w="med" len="med"/>
+                      <a:tailEnd type="none" w="med" len="med"/>
+                    </a:lnT>
+                    <a:lnB w="6350" cap="flat" cmpd="sng" algn="ctr">
+                      <a:solidFill>
+                        <a:srgbClr val="D5DEE5"/>
+                      </a:solidFill>
+                      <a:prstDash val="solid"/>
+                      <a:round/>
+                      <a:headEnd type="none" w="med" len="med"/>
+                      <a:tailEnd type="none" w="med" len="med"/>
+                    </a:lnB>
+                    <a:solidFill>
+                      <a:srgbClr val="0F2A3D"/>
+                    </a:solidFill>
+                  </a:tcPr>
+                </a:tc>
+                <a:tc>
+                  <a:txBody>
+                    <a:bodyPr/>
+                    <a:lstStyle/>
+                    <a:p>
+                      <a:pPr algn="ctr" indent="0" marL="0">
+                        <a:buNone/>
+                      </a:pPr>
+                      <a:r>
+                        <a:rPr lang="en-US" sz="900" b="1" dirty="0">
+                          <a:solidFill>
+                            <a:srgbClr val="FFFFFF"/>
+                          </a:solidFill>
+                          <a:latin typeface="Calibri" pitchFamily="34" charset="0"/>
+                          <a:ea typeface="Calibri" pitchFamily="34" charset="-122"/>
+                          <a:cs typeface="Calibri" pitchFamily="34" charset="-120"/>
+                        </a:rPr>
+                        <a:t>DISEASE</a:t>
+                      </a:r>
+                      <a:endParaRPr lang="en-US" sz="900" dirty="0">
+                        <a:latin typeface="Calibri" charset="0"/>
+                        <a:ea typeface="Calibri" charset="0"/>
+                        <a:cs typeface="Calibri" charset="0"/>
+                      </a:endParaRPr>
+                    </a:p>
+                  </a:txBody>
+                  <a:tcPr marL="25400" marR="25400" marT="12700" marB="12700">
+                    <a:lnL w="6350" cap="flat" cmpd="sng" algn="ctr">
+                      <a:solidFill>
+                        <a:srgbClr val="D5DEE5"/>
+                      </a:solidFill>
+                      <a:prstDash val="solid"/>
+                      <a:round/>
+                      <a:headEnd type="none" w="med" len="med"/>
+                      <a:tailEnd type="none" w="med" len="med"/>
+                    </a:lnL>
+                    <a:lnR w="6350" cap="flat" cmpd="sng" algn="ctr">
+                      <a:solidFill>
+                        <a:srgbClr val="D5DEE5"/>
+                      </a:solidFill>
+                      <a:prstDash val="solid"/>
+                      <a:round/>
+                      <a:headEnd type="none" w="med" len="med"/>
+                      <a:tailEnd type="none" w="med" len="med"/>
+                    </a:lnR>
+                    <a:lnT w="6350" cap="flat" cmpd="sng" algn="ctr">
+                      <a:solidFill>
+                        <a:srgbClr val="D5DEE5"/>
+                      </a:solidFill>
+                      <a:prstDash val="solid"/>
+                      <a:round/>
+                      <a:headEnd type="none" w="med" len="med"/>
+                      <a:tailEnd type="none" w="med" len="med"/>
+                    </a:lnT>
+                    <a:lnB w="6350" cap="flat" cmpd="sng" algn="ctr">
+                      <a:solidFill>
+                        <a:srgbClr val="D5DEE5"/>
+                      </a:solidFill>
+                      <a:prstDash val="solid"/>
+                      <a:round/>
+                      <a:headEnd type="none" w="med" len="med"/>
+                      <a:tailEnd type="none" w="med" len="med"/>
+                    </a:lnB>
+                    <a:solidFill>
+                      <a:srgbClr val="0F2A3D"/>
+                    </a:solidFill>
+                  </a:tcPr>
+                </a:tc>
+                <a:tc>
+                  <a:txBody>
+                    <a:bodyPr/>
+                    <a:lstStyle/>
+                    <a:p>
+                      <a:pPr algn="ctr" indent="0" marL="0">
+                        <a:buNone/>
+                      </a:pPr>
+                      <a:r>
+                        <a:rPr lang="en-US" sz="900" b="1" dirty="0">
+                          <a:solidFill>
+                            <a:srgbClr val="FFFFFF"/>
+                          </a:solidFill>
+                          <a:latin typeface="Calibri" pitchFamily="34" charset="0"/>
+                          <a:ea typeface="Calibri" pitchFamily="34" charset="-122"/>
+                          <a:cs typeface="Calibri" pitchFamily="34" charset="-120"/>
+                        </a:rPr>
+                        <a:t>ORGAN</a:t>
+                      </a:r>
+                      <a:endParaRPr lang="en-US" sz="900" dirty="0">
+                        <a:latin typeface="Calibri" charset="0"/>
+                        <a:ea typeface="Calibri" charset="0"/>
+                        <a:cs typeface="Calibri" charset="0"/>
+                      </a:endParaRPr>
+                    </a:p>
+                  </a:txBody>
+                  <a:tcPr marL="25400" marR="25400" marT="12700" marB="12700">
+                    <a:lnL w="6350" cap="flat" cmpd="sng" algn="ctr">
+                      <a:solidFill>
+                        <a:srgbClr val="D5DEE5"/>
+                      </a:solidFill>
+                      <a:prstDash val="solid"/>
+                      <a:round/>
+                      <a:headEnd type="none" w="med" len="med"/>
+                      <a:tailEnd type="none" w="med" len="med"/>
+                    </a:lnL>
+                    <a:lnR w="6350" cap="flat" cmpd="sng" algn="ctr">
+                      <a:solidFill>
+                        <a:srgbClr val="D5DEE5"/>
+                      </a:solidFill>
+                      <a:prstDash val="solid"/>
+                      <a:round/>
+                      <a:headEnd type="none" w="med" len="med"/>
+                      <a:tailEnd type="none" w="med" len="med"/>
+                    </a:lnR>
+                    <a:lnT w="6350" cap="flat" cmpd="sng" algn="ctr">
+                      <a:solidFill>
+                        <a:srgbClr val="D5DEE5"/>
+                      </a:solidFill>
+                      <a:prstDash val="solid"/>
+                      <a:round/>
+                      <a:headEnd type="none" w="med" len="med"/>
+                      <a:tailEnd type="none" w="med" len="med"/>
+                    </a:lnT>
+                    <a:lnB w="6350" cap="flat" cmpd="sng" algn="ctr">
+                      <a:solidFill>
+                        <a:srgbClr val="D5DEE5"/>
+                      </a:solidFill>
+                      <a:prstDash val="solid"/>
+                      <a:round/>
+                      <a:headEnd type="none" w="med" len="med"/>
+                      <a:tailEnd type="none" w="med" len="med"/>
+                    </a:lnB>
+                    <a:solidFill>
+                      <a:srgbClr val="0F2A3D"/>
+                    </a:solidFill>
+                  </a:tcPr>
+                </a:tc>
+                <a:tc>
+                  <a:txBody>
+                    <a:bodyPr/>
+                    <a:lstStyle/>
+                    <a:p>
+                      <a:pPr algn="ctr" indent="0" marL="0">
+                        <a:buNone/>
+                      </a:pPr>
+                      <a:r>
+                        <a:rPr lang="en-US" sz="900" b="1" dirty="0">
+                          <a:solidFill>
+                            <a:srgbClr val="FFFFFF"/>
+                          </a:solidFill>
+                          <a:latin typeface="Calibri" pitchFamily="34" charset="0"/>
+                          <a:ea typeface="Calibri" pitchFamily="34" charset="-122"/>
+                          <a:cs typeface="Calibri" pitchFamily="34" charset="-120"/>
+                        </a:rPr>
+                        <a:t>DRUGCHE</a:t>
+                      </a:r>
+                      <a:endParaRPr lang="en-US" sz="900" dirty="0">
+                        <a:latin typeface="Calibri" charset="0"/>
+                        <a:ea typeface="Calibri" charset="0"/>
+                        <a:cs typeface="Calibri" charset="0"/>
+                      </a:endParaRPr>
+                    </a:p>
+                  </a:txBody>
+                  <a:tcPr marL="25400" marR="25400" marT="12700" marB="12700">
+                    <a:lnL w="6350" cap="flat" cmpd="sng" algn="ctr">
+                      <a:solidFill>
+                        <a:srgbClr val="D5DEE5"/>
+                      </a:solidFill>
+                      <a:prstDash val="solid"/>
+                      <a:round/>
+                      <a:headEnd type="none" w="med" len="med"/>
+                      <a:tailEnd type="none" w="med" len="med"/>
+                    </a:lnL>
+                    <a:lnR w="6350" cap="flat" cmpd="sng" algn="ctr">
+                      <a:solidFill>
+                        <a:srgbClr val="D5DEE5"/>
+                      </a:solidFill>
+                      <a:prstDash val="solid"/>
+                      <a:round/>
+                      <a:headEnd type="none" w="med" len="med"/>
+                      <a:tailEnd type="none" w="med" len="med"/>
+                    </a:lnR>
+                    <a:lnT w="6350" cap="flat" cmpd="sng" algn="ctr">
+                      <a:solidFill>
+                        <a:srgbClr val="D5DEE5"/>
+                      </a:solidFill>
+                      <a:prstDash val="solid"/>
+                      <a:round/>
+                      <a:headEnd type="none" w="med" len="med"/>
+                      <a:tailEnd type="none" w="med" len="med"/>
+                    </a:lnT>
+                    <a:lnB w="6350" cap="flat" cmpd="sng" algn="ctr">
+                      <a:solidFill>
+                        <a:srgbClr val="D5DEE5"/>
+                      </a:solidFill>
+                      <a:prstDash val="solid"/>
+                      <a:round/>
+                      <a:headEnd type="none" w="med" len="med"/>
+                      <a:tailEnd type="none" w="med" len="med"/>
+                    </a:lnB>
+                    <a:solidFill>
+                      <a:srgbClr val="0F2A3D"/>
+                    </a:solidFill>
+                  </a:tcPr>
+                </a:tc>
+                <a:tc>
+                  <a:txBody>
+                    <a:bodyPr/>
+                    <a:lstStyle/>
+                    <a:p>
+                      <a:pPr algn="ctr" indent="0" marL="0">
+                        <a:buNone/>
+                      </a:pPr>
+                      <a:r>
+                        <a:rPr lang="en-US" sz="900" b="1" dirty="0">
+                          <a:solidFill>
+                            <a:srgbClr val="FFFFFF"/>
+                          </a:solidFill>
+                          <a:latin typeface="Calibri" pitchFamily="34" charset="0"/>
+                          <a:ea typeface="Calibri" pitchFamily="34" charset="-122"/>
+                          <a:cs typeface="Calibri" pitchFamily="34" charset="-120"/>
+                        </a:rPr>
+                        <a:t>DATETIM</a:t>
+                      </a:r>
+                      <a:endParaRPr lang="en-US" sz="900" dirty="0">
+                        <a:latin typeface="Calibri" charset="0"/>
+                        <a:ea typeface="Calibri" charset="0"/>
+                        <a:cs typeface="Calibri" charset="0"/>
+                      </a:endParaRPr>
+                    </a:p>
+                  </a:txBody>
+                  <a:tcPr marL="25400" marR="25400" marT="12700" marB="12700">
+                    <a:lnL w="6350" cap="flat" cmpd="sng" algn="ctr">
+                      <a:solidFill>
+                        <a:srgbClr val="D5DEE5"/>
+                      </a:solidFill>
+                      <a:prstDash val="solid"/>
+                      <a:round/>
+                      <a:headEnd type="none" w="med" len="med"/>
+                      <a:tailEnd type="none" w="med" len="med"/>
+                    </a:lnL>
+                    <a:lnR w="6350" cap="flat" cmpd="sng" algn="ctr">
+                      <a:solidFill>
+                        <a:srgbClr val="D5DEE5"/>
+                      </a:solidFill>
+                      <a:prstDash val="solid"/>
+                      <a:round/>
+                      <a:headEnd type="none" w="med" len="med"/>
+                      <a:tailEnd type="none" w="med" len="med"/>
+                    </a:lnR>
+                    <a:lnT w="6350" cap="flat" cmpd="sng" algn="ctr">
+                      <a:solidFill>
+                        <a:srgbClr val="D5DEE5"/>
+                      </a:solidFill>
+                      <a:prstDash val="solid"/>
+                      <a:round/>
+                      <a:headEnd type="none" w="med" len="med"/>
+                      <a:tailEnd type="none" w="med" len="med"/>
+                    </a:lnT>
+                    <a:lnB w="6350" cap="flat" cmpd="sng" algn="ctr">
+                      <a:solidFill>
+                        <a:srgbClr val="D5DEE5"/>
+                      </a:solidFill>
+                      <a:prstDash val="solid"/>
+                      <a:round/>
+                      <a:headEnd type="none" w="med" len="med"/>
+                      <a:tailEnd type="none" w="med" len="med"/>
+                    </a:lnB>
+                    <a:solidFill>
+                      <a:srgbClr val="0F2A3D"/>
+                    </a:solidFill>
+                  </a:tcPr>
+                </a:tc>
+                <a:tc>
+                  <a:txBody>
+                    <a:bodyPr/>
+                    <a:lstStyle/>
+                    <a:p>
+                      <a:pPr algn="ctr" indent="0" marL="0">
+                        <a:buNone/>
+                      </a:pPr>
+                      <a:r>
+                        <a:rPr lang="en-US" sz="900" b="1" dirty="0">
+                          <a:solidFill>
+                            <a:srgbClr val="FFFFFF"/>
+                          </a:solidFill>
+                          <a:latin typeface="Calibri" pitchFamily="34" charset="0"/>
+                          <a:ea typeface="Calibri" pitchFamily="34" charset="-122"/>
+                          <a:cs typeface="Calibri" pitchFamily="34" charset="-120"/>
+                        </a:rPr>
+                        <a:t>MEDDEVI</a:t>
+                      </a:r>
+                      <a:endParaRPr lang="en-US" sz="900" dirty="0">
+                        <a:latin typeface="Calibri" charset="0"/>
+                        <a:ea typeface="Calibri" charset="0"/>
+                        <a:cs typeface="Calibri" charset="0"/>
+                      </a:endParaRPr>
+                    </a:p>
+                  </a:txBody>
+                  <a:tcPr marL="25400" marR="25400" marT="12700" marB="12700">
+                    <a:lnL w="6350" cap="flat" cmpd="sng" algn="ctr">
+                      <a:solidFill>
+                        <a:srgbClr val="D5DEE5"/>
+                      </a:solidFill>
+                      <a:prstDash val="solid"/>
+                      <a:round/>
+                      <a:headEnd type="none" w="med" len="med"/>
+                      <a:tailEnd type="none" w="med" len="med"/>
+                    </a:lnL>
+                    <a:lnR w="6350" cap="flat" cmpd="sng" algn="ctr">
+                      <a:solidFill>
+                        <a:srgbClr val="D5DEE5"/>
+                      </a:solidFill>
+                      <a:prstDash val="solid"/>
+                      <a:round/>
+                      <a:headEnd type="none" w="med" len="med"/>
+                      <a:tailEnd type="none" w="med" len="med"/>
+                    </a:lnR>
+                    <a:lnT w="6350" cap="flat" cmpd="sng" algn="ctr">
+                      <a:solidFill>
+                        <a:srgbClr val="D5DEE5"/>
+                      </a:solidFill>
+                      <a:prstDash val="solid"/>
+                      <a:round/>
+                      <a:headEnd type="none" w="med" len="med"/>
+                      <a:tailEnd type="none" w="med" len="med"/>
+                    </a:lnT>
+                    <a:lnB w="6350" cap="flat" cmpd="sng" algn="ctr">
+                      <a:solidFill>
+                        <a:srgbClr val="D5DEE5"/>
+                      </a:solidFill>
+                      <a:prstDash val="solid"/>
+                      <a:round/>
+                      <a:headEnd type="none" w="med" len="med"/>
+                      <a:tailEnd type="none" w="med" len="med"/>
+                    </a:lnB>
+                    <a:solidFill>
+                      <a:srgbClr val="0F2A3D"/>
+                    </a:solidFill>
+                  </a:tcPr>
+                </a:tc>
+                <a:tc>
+                  <a:txBody>
+                    <a:bodyPr/>
+                    <a:lstStyle/>
+                    <a:p>
+                      <a:pPr algn="ctr" indent="0" marL="0">
+                        <a:buNone/>
+                      </a:pPr>
+                      <a:r>
+                        <a:rPr lang="en-US" sz="900" b="1" dirty="0">
+                          <a:solidFill>
+                            <a:srgbClr val="FFFFFF"/>
+                          </a:solidFill>
+                          <a:latin typeface="Calibri" pitchFamily="34" charset="0"/>
+                          <a:ea typeface="Calibri" pitchFamily="34" charset="-122"/>
+                          <a:cs typeface="Calibri" pitchFamily="34" charset="-120"/>
+                        </a:rPr>
+                        <a:t>AGE</a:t>
+                      </a:r>
+                      <a:endParaRPr lang="en-US" sz="900" dirty="0">
+                        <a:latin typeface="Calibri" charset="0"/>
+                        <a:ea typeface="Calibri" charset="0"/>
+                        <a:cs typeface="Calibri" charset="0"/>
+                      </a:endParaRPr>
+                    </a:p>
+                  </a:txBody>
+                  <a:tcPr marL="25400" marR="25400" marT="12700" marB="12700">
+                    <a:lnL w="6350" cap="flat" cmpd="sng" algn="ctr">
+                      <a:solidFill>
+                        <a:srgbClr val="D5DEE5"/>
+                      </a:solidFill>
+                      <a:prstDash val="solid"/>
+                      <a:round/>
+                      <a:headEnd type="none" w="med" len="med"/>
+                      <a:tailEnd type="none" w="med" len="med"/>
+                    </a:lnL>
+                    <a:lnR w="6350" cap="flat" cmpd="sng" algn="ctr">
+                      <a:solidFill>
+                        <a:srgbClr val="D5DEE5"/>
+                      </a:solidFill>
+                      <a:prstDash val="solid"/>
+                      <a:round/>
+                      <a:headEnd type="none" w="med" len="med"/>
+                      <a:tailEnd type="none" w="med" len="med"/>
+                    </a:lnR>
+                    <a:lnT w="6350" cap="flat" cmpd="sng" algn="ctr">
+                      <a:solidFill>
+                        <a:srgbClr val="D5DEE5"/>
+                      </a:solidFill>
+                      <a:prstDash val="solid"/>
+                      <a:round/>
+                      <a:headEnd type="none" w="med" len="med"/>
+                      <a:tailEnd type="none" w="med" len="med"/>
+                    </a:lnT>
+                    <a:lnB w="6350" cap="flat" cmpd="sng" algn="ctr">
+                      <a:solidFill>
+                        <a:srgbClr val="D5DEE5"/>
+                      </a:solidFill>
+                      <a:prstDash val="solid"/>
+                      <a:round/>
+                      <a:headEnd type="none" w="med" len="med"/>
+                      <a:tailEnd type="none" w="med" len="med"/>
+                    </a:lnB>
+                    <a:solidFill>
+                      <a:srgbClr val="0F2A3D"/>
+                    </a:solidFill>
+                  </a:tcPr>
+                </a:tc>
+                <a:tc>
+                  <a:txBody>
+                    <a:bodyPr/>
+                    <a:lstStyle/>
+                    <a:p>
+                      <a:pPr algn="ctr" indent="0" marL="0">
+                        <a:buNone/>
+                      </a:pPr>
+                      <a:r>
+                        <a:rPr lang="en-US" sz="900" b="1" dirty="0">
+                          <a:solidFill>
+                            <a:srgbClr val="FFFFFF"/>
+                          </a:solidFill>
+                          <a:latin typeface="Calibri" pitchFamily="34" charset="0"/>
+                          <a:ea typeface="Calibri" pitchFamily="34" charset="-122"/>
+                          <a:cs typeface="Calibri" pitchFamily="34" charset="-120"/>
+                        </a:rPr>
+                        <a:t>OCCUPAT</a:t>
+                      </a:r>
+                      <a:endParaRPr lang="en-US" sz="900" dirty="0">
+                        <a:latin typeface="Calibri" charset="0"/>
+                        <a:ea typeface="Calibri" charset="0"/>
+                        <a:cs typeface="Calibri" charset="0"/>
+                      </a:endParaRPr>
+                    </a:p>
+                  </a:txBody>
+                  <a:tcPr marL="25400" marR="25400" marT="12700" marB="12700">
+                    <a:lnL w="6350" cap="flat" cmpd="sng" algn="ctr">
+                      <a:solidFill>
+                        <a:srgbClr val="D5DEE5"/>
+                      </a:solidFill>
+                      <a:prstDash val="solid"/>
+                      <a:round/>
+                      <a:headEnd type="none" w="med" len="med"/>
+                      <a:tailEnd type="none" w="med" len="med"/>
+                    </a:lnL>
+                    <a:lnR w="6350" cap="flat" cmpd="sng" algn="ctr">
+                      <a:solidFill>
+                        <a:srgbClr val="D5DEE5"/>
+                      </a:solidFill>
+                      <a:prstDash val="solid"/>
+                      <a:round/>
+                      <a:headEnd type="none" w="med" len="med"/>
+                      <a:tailEnd type="none" w="med" len="med"/>
+                    </a:lnR>
+                    <a:lnT w="6350" cap="flat" cmpd="sng" algn="ctr">
+                      <a:solidFill>
+                        <a:srgbClr val="D5DEE5"/>
+                      </a:solidFill>
+                      <a:prstDash val="solid"/>
+                      <a:round/>
+                      <a:headEnd type="none" w="med" len="med"/>
+                      <a:tailEnd type="none" w="med" len="med"/>
+                    </a:lnT>
+                    <a:lnB w="6350" cap="flat" cmpd="sng" algn="ctr">
+                      <a:solidFill>
+                        <a:srgbClr val="D5DEE5"/>
+                      </a:solidFill>
+                      <a:prstDash val="solid"/>
+                      <a:round/>
+                      <a:headEnd type="none" w="med" len="med"/>
+                      <a:tailEnd type="none" w="med" len="med"/>
+                    </a:lnB>
+                    <a:solidFill>
+                      <a:srgbClr val="0F2A3D"/>
+                    </a:solidFill>
+                  </a:tcPr>
+                </a:tc>
+              </a:tr>
+              <a:tr h="457200">
+                <a:tc>
+                  <a:txBody>
+                    <a:bodyPr/>
+                    <a:lstStyle/>
+                    <a:p>
+                      <a:pPr indent="0" marL="0">
+                        <a:buNone/>
+                      </a:pPr>
+                      <a:r>
+                        <a:rPr lang="en-US" sz="1000" b="1" dirty="0">
+                          <a:solidFill>
+                            <a:srgbClr val="1B2733"/>
+                          </a:solidFill>
+                          <a:latin typeface="Calibri" pitchFamily="34" charset="0"/>
+                          <a:ea typeface="Calibri" pitchFamily="34" charset="-122"/>
+                          <a:cs typeface="Calibri" pitchFamily="34" charset="-120"/>
+                        </a:rPr>
+                        <a:t>O</a:t>
+                      </a:r>
+                      <a:endParaRPr lang="en-US" sz="1000" dirty="0">
+                        <a:latin typeface="Calibri" charset="0"/>
+                        <a:ea typeface="Calibri" charset="0"/>
+                        <a:cs typeface="Calibri" charset="0"/>
+                      </a:endParaRPr>
+                    </a:p>
+                  </a:txBody>
+                  <a:tcPr marL="25400" marR="25400" marT="12700" marB="12700">
+                    <a:lnL w="6350" cap="flat" cmpd="sng" algn="ctr">
+                      <a:solidFill>
+                        <a:srgbClr val="D5DEE5"/>
+                      </a:solidFill>
+                      <a:prstDash val="solid"/>
+                      <a:round/>
+                      <a:headEnd type="none" w="med" len="med"/>
+                      <a:tailEnd type="none" w="med" len="med"/>
+                    </a:lnL>
+                    <a:lnR w="6350" cap="flat" cmpd="sng" algn="ctr">
+                      <a:solidFill>
+                        <a:srgbClr val="D5DEE5"/>
+                      </a:solidFill>
+                      <a:prstDash val="solid"/>
+                      <a:round/>
+                      <a:headEnd type="none" w="med" len="med"/>
+                      <a:tailEnd type="none" w="med" len="med"/>
+                    </a:lnR>
+                    <a:lnT w="6350" cap="flat" cmpd="sng" algn="ctr">
+                      <a:solidFill>
+                        <a:srgbClr val="D5DEE5"/>
+                      </a:solidFill>
+                      <a:prstDash val="solid"/>
+                      <a:round/>
+                      <a:headEnd type="none" w="med" len="med"/>
+                      <a:tailEnd type="none" w="med" len="med"/>
+                    </a:lnT>
+                    <a:lnB w="6350" cap="flat" cmpd="sng" algn="ctr">
+                      <a:solidFill>
+                        <a:srgbClr val="D5DEE5"/>
+                      </a:solidFill>
+                      <a:prstDash val="solid"/>
+                      <a:round/>
+                      <a:headEnd type="none" w="med" len="med"/>
+                      <a:tailEnd type="none" w="med" len="med"/>
+                    </a:lnB>
+                    <a:solidFill>
+                      <a:srgbClr val="F7FAFB"/>
+                    </a:solidFill>
+                  </a:tcPr>
+                </a:tc>
+                <a:tc>
+                  <a:txBody>
+                    <a:bodyPr/>
+                    <a:lstStyle/>
+                    <a:p>
+                      <a:pPr algn="ctr" indent="0" marL="0">
+                        <a:buNone/>
+                      </a:pPr>
+                      <a:r>
+                        <a:rPr lang="en-US" sz="1200" b="1" dirty="0">
+                          <a:solidFill>
+                            <a:srgbClr val="FFFFFF"/>
+                          </a:solidFill>
+                          <a:latin typeface="Calibri" pitchFamily="34" charset="0"/>
+                          <a:ea typeface="Calibri" pitchFamily="34" charset="-122"/>
+                          <a:cs typeface="Calibri" pitchFamily="34" charset="-120"/>
+                        </a:rPr>
+                        <a:t>93</a:t>
+                      </a:r>
+                      <a:endParaRPr lang="en-US" sz="1200" dirty="0">
+                        <a:latin typeface="Calibri" charset="0"/>
+                        <a:ea typeface="Calibri" charset="0"/>
+                        <a:cs typeface="Calibri" charset="0"/>
+                      </a:endParaRPr>
+                    </a:p>
+                  </a:txBody>
+                  <a:tcPr marL="25400" marR="25400" marT="12700" marB="12700">
+                    <a:lnL w="6350" cap="flat" cmpd="sng" algn="ctr">
+                      <a:solidFill>
+                        <a:srgbClr val="D5DEE5"/>
+                      </a:solidFill>
+                      <a:prstDash val="solid"/>
+                      <a:round/>
+                      <a:headEnd type="none" w="med" len="med"/>
+                      <a:tailEnd type="none" w="med" len="med"/>
+                    </a:lnL>
+                    <a:lnR w="6350" cap="flat" cmpd="sng" algn="ctr">
+                      <a:solidFill>
+                        <a:srgbClr val="D5DEE5"/>
+                      </a:solidFill>
+                      <a:prstDash val="solid"/>
+                      <a:round/>
+                      <a:headEnd type="none" w="med" len="med"/>
+                      <a:tailEnd type="none" w="med" len="med"/>
+                    </a:lnR>
+                    <a:lnT w="6350" cap="flat" cmpd="sng" algn="ctr">
+                      <a:solidFill>
+                        <a:srgbClr val="D5DEE5"/>
+                      </a:solidFill>
+                      <a:prstDash val="solid"/>
+                      <a:round/>
+                      <a:headEnd type="none" w="med" len="med"/>
+                      <a:tailEnd type="none" w="med" len="med"/>
+                    </a:lnT>
+                    <a:lnB w="6350" cap="flat" cmpd="sng" algn="ctr">
+                      <a:solidFill>
+                        <a:srgbClr val="D5DEE5"/>
+                      </a:solidFill>
+                      <a:prstDash val="solid"/>
+                      <a:round/>
+                      <a:headEnd type="none" w="med" len="med"/>
+                      <a:tailEnd type="none" w="med" len="med"/>
+                    </a:lnB>
+                    <a:solidFill>
+                      <a:srgbClr val="1F394A"/>
+                    </a:solidFill>
+                  </a:tcPr>
+                </a:tc>
+                <a:tc>
+                  <a:txBody>
+                    <a:bodyPr/>
+                    <a:lstStyle/>
+                    <a:p>
+                      <a:pPr algn="ctr" indent="0" marL="0">
+                        <a:buNone/>
+                      </a:pPr>
+                      <a:r>
+                        <a:rPr lang="en-US" sz="1200" dirty="0">
+                          <a:solidFill>
+                            <a:srgbClr val="1B2733"/>
+                          </a:solidFill>
+                          <a:latin typeface="Calibri" pitchFamily="34" charset="0"/>
+                          <a:ea typeface="Calibri" pitchFamily="34" charset="-122"/>
+                          <a:cs typeface="Calibri" pitchFamily="34" charset="-120"/>
+                        </a:rPr>
+                        <a:t>1</a:t>
+                      </a:r>
+                      <a:endParaRPr lang="en-US" sz="1200" dirty="0">
+                        <a:latin typeface="Calibri" charset="0"/>
+                        <a:ea typeface="Calibri" charset="0"/>
+                        <a:cs typeface="Calibri" charset="0"/>
+                      </a:endParaRPr>
+                    </a:p>
+                  </a:txBody>
+                  <a:tcPr marL="25400" marR="25400" marT="12700" marB="12700">
+                    <a:lnL w="6350" cap="flat" cmpd="sng" algn="ctr">
+                      <a:solidFill>
+                        <a:srgbClr val="D5DEE5"/>
+                      </a:solidFill>
+                      <a:prstDash val="solid"/>
+                      <a:round/>
+                      <a:headEnd type="none" w="med" len="med"/>
+                      <a:tailEnd type="none" w="med" len="med"/>
+                    </a:lnL>
+                    <a:lnR w="6350" cap="flat" cmpd="sng" algn="ctr">
+                      <a:solidFill>
+                        <a:srgbClr val="D5DEE5"/>
+                      </a:solidFill>
+                      <a:prstDash val="solid"/>
+                      <a:round/>
+                      <a:headEnd type="none" w="med" len="med"/>
+                      <a:tailEnd type="none" w="med" len="med"/>
+                    </a:lnR>
+                    <a:lnT w="6350" cap="flat" cmpd="sng" algn="ctr">
+                      <a:solidFill>
+                        <a:srgbClr val="D5DEE5"/>
+                      </a:solidFill>
+                      <a:prstDash val="solid"/>
+                      <a:round/>
+                      <a:headEnd type="none" w="med" len="med"/>
+                      <a:tailEnd type="none" w="med" len="med"/>
+                    </a:lnT>
+                    <a:lnB w="6350" cap="flat" cmpd="sng" algn="ctr">
+                      <a:solidFill>
+                        <a:srgbClr val="D5DEE5"/>
+                      </a:solidFill>
+                      <a:prstDash val="solid"/>
+                      <a:round/>
+                      <a:headEnd type="none" w="med" len="med"/>
+                      <a:tailEnd type="none" w="med" len="med"/>
+                    </a:lnB>
+                    <a:solidFill>
+                      <a:srgbClr val="FDFDFD"/>
+                    </a:solidFill>
+                  </a:tcPr>
+                </a:tc>
+                <a:tc>
+                  <a:txBody>
+                    <a:bodyPr/>
+                    <a:lstStyle/>
+                    <a:p>
+                      <a:pPr algn="ctr" indent="0" marL="0">
+                        <a:buNone/>
+                      </a:pPr>
+                      <a:r>
+                        <a:rPr lang="en-US" sz="1200" dirty="0">
+                          <a:solidFill>
+                            <a:srgbClr val="1B2733"/>
+                          </a:solidFill>
+                          <a:latin typeface="Calibri" pitchFamily="34" charset="0"/>
+                          <a:ea typeface="Calibri" pitchFamily="34" charset="-122"/>
+                          <a:cs typeface="Calibri" pitchFamily="34" charset="-120"/>
+                        </a:rPr>
+                        <a:t>0</a:t>
+                      </a:r>
+                      <a:endParaRPr lang="en-US" sz="1200" dirty="0">
+                        <a:latin typeface="Calibri" charset="0"/>
+                        <a:ea typeface="Calibri" charset="0"/>
+                        <a:cs typeface="Calibri" charset="0"/>
+                      </a:endParaRPr>
+                    </a:p>
+                  </a:txBody>
+                  <a:tcPr marL="25400" marR="25400" marT="12700" marB="12700">
+                    <a:lnL w="6350" cap="flat" cmpd="sng" algn="ctr">
+                      <a:solidFill>
+                        <a:srgbClr val="D5DEE5"/>
+                      </a:solidFill>
+                      <a:prstDash val="solid"/>
+                      <a:round/>
+                      <a:headEnd type="none" w="med" len="med"/>
+                      <a:tailEnd type="none" w="med" len="med"/>
+                    </a:lnL>
+                    <a:lnR w="6350" cap="flat" cmpd="sng" algn="ctr">
+                      <a:solidFill>
+                        <a:srgbClr val="D5DEE5"/>
+                      </a:solidFill>
+                      <a:prstDash val="solid"/>
+                      <a:round/>
+                      <a:headEnd type="none" w="med" len="med"/>
+                      <a:tailEnd type="none" w="med" len="med"/>
+                    </a:lnR>
+                    <a:lnT w="6350" cap="flat" cmpd="sng" algn="ctr">
+                      <a:solidFill>
+                        <a:srgbClr val="D5DEE5"/>
+                      </a:solidFill>
+                      <a:prstDash val="solid"/>
+                      <a:round/>
+                      <a:headEnd type="none" w="med" len="med"/>
+                      <a:tailEnd type="none" w="med" len="med"/>
+                    </a:lnT>
+                    <a:lnB w="6350" cap="flat" cmpd="sng" algn="ctr">
+                      <a:solidFill>
+                        <a:srgbClr val="D5DEE5"/>
+                      </a:solidFill>
+                      <a:prstDash val="solid"/>
+                      <a:round/>
+                      <a:headEnd type="none" w="med" len="med"/>
+                      <a:tailEnd type="none" w="med" len="med"/>
+                    </a:lnB>
+                    <a:solidFill>
+                      <a:srgbClr val="FEFEFE"/>
+                    </a:solidFill>
+                  </a:tcPr>
+                </a:tc>
+                <a:tc>
+                  <a:txBody>
+                    <a:bodyPr/>
+                    <a:lstStyle/>
+                    <a:p>
+                      <a:pPr algn="ctr" indent="0" marL="0">
+                        <a:buNone/>
+                      </a:pPr>
+                      <a:r>
+                        <a:rPr lang="en-US" sz="1200" dirty="0">
+                          <a:solidFill>
+                            <a:srgbClr val="1B2733"/>
+                          </a:solidFill>
+                          <a:latin typeface="Calibri" pitchFamily="34" charset="0"/>
+                          <a:ea typeface="Calibri" pitchFamily="34" charset="-122"/>
+                          <a:cs typeface="Calibri" pitchFamily="34" charset="-120"/>
+                        </a:rPr>
+                        <a:t>0</a:t>
+                      </a:r>
+                      <a:endParaRPr lang="en-US" sz="1200" dirty="0">
+                        <a:latin typeface="Calibri" charset="0"/>
+                        <a:ea typeface="Calibri" charset="0"/>
+                        <a:cs typeface="Calibri" charset="0"/>
+                      </a:endParaRPr>
+                    </a:p>
+                  </a:txBody>
+                  <a:tcPr marL="25400" marR="25400" marT="12700" marB="12700">
+                    <a:lnL w="6350" cap="flat" cmpd="sng" algn="ctr">
+                      <a:solidFill>
+                        <a:srgbClr val="D5DEE5"/>
+                      </a:solidFill>
+                      <a:prstDash val="solid"/>
+                      <a:round/>
+                      <a:headEnd type="none" w="med" len="med"/>
+                      <a:tailEnd type="none" w="med" len="med"/>
+                    </a:lnL>
+                    <a:lnR w="6350" cap="flat" cmpd="sng" algn="ctr">
+                      <a:solidFill>
+                        <a:srgbClr val="D5DEE5"/>
+                      </a:solidFill>
+                      <a:prstDash val="solid"/>
+                      <a:round/>
+                      <a:headEnd type="none" w="med" len="med"/>
+                      <a:tailEnd type="none" w="med" len="med"/>
+                    </a:lnR>
+                    <a:lnT w="6350" cap="flat" cmpd="sng" algn="ctr">
+                      <a:solidFill>
+                        <a:srgbClr val="D5DEE5"/>
+                      </a:solidFill>
+                      <a:prstDash val="solid"/>
+                      <a:round/>
+                      <a:headEnd type="none" w="med" len="med"/>
+                      <a:tailEnd type="none" w="med" len="med"/>
+                    </a:lnT>
+                    <a:lnB w="6350" cap="flat" cmpd="sng" algn="ctr">
+                      <a:solidFill>
+                        <a:srgbClr val="D5DEE5"/>
+                      </a:solidFill>
+                      <a:prstDash val="solid"/>
+                      <a:round/>
+                      <a:headEnd type="none" w="med" len="med"/>
+                      <a:tailEnd type="none" w="med" len="med"/>
+                    </a:lnB>
+                    <a:solidFill>
+                      <a:srgbClr val="FFFFFF"/>
+                    </a:solidFill>
+                  </a:tcPr>
+                </a:tc>
+                <a:tc>
+                  <a:txBody>
+                    <a:bodyPr/>
+                    <a:lstStyle/>
+                    <a:p>
+                      <a:pPr algn="ctr" indent="0" marL="0">
+                        <a:buNone/>
+                      </a:pPr>
+                      <a:r>
+                        <a:rPr lang="en-US" sz="1200" dirty="0">
+                          <a:solidFill>
+                            <a:srgbClr val="1B2733"/>
+                          </a:solidFill>
+                          <a:latin typeface="Calibri" pitchFamily="34" charset="0"/>
+                          <a:ea typeface="Calibri" pitchFamily="34" charset="-122"/>
+                          <a:cs typeface="Calibri" pitchFamily="34" charset="-120"/>
+                        </a:rPr>
+                        <a:t>0</a:t>
+                      </a:r>
+                      <a:endParaRPr lang="en-US" sz="1200" dirty="0">
+                        <a:latin typeface="Calibri" charset="0"/>
+                        <a:ea typeface="Calibri" charset="0"/>
+                        <a:cs typeface="Calibri" charset="0"/>
+                      </a:endParaRPr>
+                    </a:p>
+                  </a:txBody>
+                  <a:tcPr marL="25400" marR="25400" marT="12700" marB="12700">
+                    <a:lnL w="6350" cap="flat" cmpd="sng" algn="ctr">
+                      <a:solidFill>
+                        <a:srgbClr val="D5DEE5"/>
+                      </a:solidFill>
+                      <a:prstDash val="solid"/>
+                      <a:round/>
+                      <a:headEnd type="none" w="med" len="med"/>
+                      <a:tailEnd type="none" w="med" len="med"/>
+                    </a:lnL>
+                    <a:lnR w="6350" cap="flat" cmpd="sng" algn="ctr">
+                      <a:solidFill>
+                        <a:srgbClr val="D5DEE5"/>
+                      </a:solidFill>
+                      <a:prstDash val="solid"/>
+                      <a:round/>
+                      <a:headEnd type="none" w="med" len="med"/>
+                      <a:tailEnd type="none" w="med" len="med"/>
+                    </a:lnR>
+                    <a:lnT w="6350" cap="flat" cmpd="sng" algn="ctr">
+                      <a:solidFill>
+                        <a:srgbClr val="D5DEE5"/>
+                      </a:solidFill>
+                      <a:prstDash val="solid"/>
+                      <a:round/>
+                      <a:headEnd type="none" w="med" len="med"/>
+                      <a:tailEnd type="none" w="med" len="med"/>
+                    </a:lnT>
+                    <a:lnB w="6350" cap="flat" cmpd="sng" algn="ctr">
+                      <a:solidFill>
+                        <a:srgbClr val="D5DEE5"/>
+                      </a:solidFill>
+                      <a:prstDash val="solid"/>
+                      <a:round/>
+                      <a:headEnd type="none" w="med" len="med"/>
+                      <a:tailEnd type="none" w="med" len="med"/>
+                    </a:lnB>
+                    <a:solidFill>
+                      <a:srgbClr val="FEFEFE"/>
+                    </a:solidFill>
+                  </a:tcPr>
+                </a:tc>
+                <a:tc>
+                  <a:txBody>
+                    <a:bodyPr/>
+                    <a:lstStyle/>
+                    <a:p>
+                      <a:pPr algn="ctr" indent="0" marL="0">
+                        <a:buNone/>
+                      </a:pPr>
+                      <a:r>
+                        <a:rPr lang="en-US" sz="1200" dirty="0">
+                          <a:solidFill>
+                            <a:srgbClr val="1B2733"/>
+                          </a:solidFill>
+                          <a:latin typeface="Calibri" pitchFamily="34" charset="0"/>
+                          <a:ea typeface="Calibri" pitchFamily="34" charset="-122"/>
+                          <a:cs typeface="Calibri" pitchFamily="34" charset="-120"/>
+                        </a:rPr>
+                        <a:t>1</a:t>
+                      </a:r>
+                      <a:endParaRPr lang="en-US" sz="1200" dirty="0">
+                        <a:latin typeface="Calibri" charset="0"/>
+                        <a:ea typeface="Calibri" charset="0"/>
+                        <a:cs typeface="Calibri" charset="0"/>
+                      </a:endParaRPr>
+                    </a:p>
+                  </a:txBody>
+                  <a:tcPr marL="25400" marR="25400" marT="12700" marB="12700">
+                    <a:lnL w="6350" cap="flat" cmpd="sng" algn="ctr">
+                      <a:solidFill>
+                        <a:srgbClr val="D5DEE5"/>
+                      </a:solidFill>
+                      <a:prstDash val="solid"/>
+                      <a:round/>
+                      <a:headEnd type="none" w="med" len="med"/>
+                      <a:tailEnd type="none" w="med" len="med"/>
+                    </a:lnL>
+                    <a:lnR w="6350" cap="flat" cmpd="sng" algn="ctr">
+                      <a:solidFill>
+                        <a:srgbClr val="D5DEE5"/>
+                      </a:solidFill>
+                      <a:prstDash val="solid"/>
+                      <a:round/>
+                      <a:headEnd type="none" w="med" len="med"/>
+                      <a:tailEnd type="none" w="med" len="med"/>
+                    </a:lnR>
+                    <a:lnT w="6350" cap="flat" cmpd="sng" algn="ctr">
+                      <a:solidFill>
+                        <a:srgbClr val="D5DEE5"/>
+                      </a:solidFill>
+                      <a:prstDash val="solid"/>
+                      <a:round/>
+                      <a:headEnd type="none" w="med" len="med"/>
+                      <a:tailEnd type="none" w="med" len="med"/>
+                    </a:lnT>
+                    <a:lnB w="6350" cap="flat" cmpd="sng" algn="ctr">
+                      <a:solidFill>
+                        <a:srgbClr val="D5DEE5"/>
+                      </a:solidFill>
+                      <a:prstDash val="solid"/>
+                      <a:round/>
+                      <a:headEnd type="none" w="med" len="med"/>
+                      <a:tailEnd type="none" w="med" len="med"/>
+                    </a:lnB>
+                    <a:solidFill>
+                      <a:srgbClr val="FEFEFE"/>
+                    </a:solidFill>
+                  </a:tcPr>
+                </a:tc>
+                <a:tc>
+                  <a:txBody>
+                    <a:bodyPr/>
+                    <a:lstStyle/>
+                    <a:p>
+                      <a:pPr algn="ctr" indent="0" marL="0">
+                        <a:buNone/>
+                      </a:pPr>
+                      <a:r>
+                        <a:rPr lang="en-US" sz="1200" dirty="0">
+                          <a:solidFill>
+                            <a:srgbClr val="1B2733"/>
+                          </a:solidFill>
+                          <a:latin typeface="Calibri" pitchFamily="34" charset="0"/>
+                          <a:ea typeface="Calibri" pitchFamily="34" charset="-122"/>
+                          <a:cs typeface="Calibri" pitchFamily="34" charset="-120"/>
+                        </a:rPr>
+                        <a:t>0</a:t>
+                      </a:r>
+                      <a:endParaRPr lang="en-US" sz="1200" dirty="0">
+                        <a:latin typeface="Calibri" charset="0"/>
+                        <a:ea typeface="Calibri" charset="0"/>
+                        <a:cs typeface="Calibri" charset="0"/>
+                      </a:endParaRPr>
+                    </a:p>
+                  </a:txBody>
+                  <a:tcPr marL="25400" marR="25400" marT="12700" marB="12700">
+                    <a:lnL w="6350" cap="flat" cmpd="sng" algn="ctr">
+                      <a:solidFill>
+                        <a:srgbClr val="D5DEE5"/>
+                      </a:solidFill>
+                      <a:prstDash val="solid"/>
+                      <a:round/>
+                      <a:headEnd type="none" w="med" len="med"/>
+                      <a:tailEnd type="none" w="med" len="med"/>
+                    </a:lnL>
+                    <a:lnR w="6350" cap="flat" cmpd="sng" algn="ctr">
+                      <a:solidFill>
+                        <a:srgbClr val="D5DEE5"/>
+                      </a:solidFill>
+                      <a:prstDash val="solid"/>
+                      <a:round/>
+                      <a:headEnd type="none" w="med" len="med"/>
+                      <a:tailEnd type="none" w="med" len="med"/>
+                    </a:lnR>
+                    <a:lnT w="6350" cap="flat" cmpd="sng" algn="ctr">
+                      <a:solidFill>
+                        <a:srgbClr val="D5DEE5"/>
+                      </a:solidFill>
+                      <a:prstDash val="solid"/>
+                      <a:round/>
+                      <a:headEnd type="none" w="med" len="med"/>
+                      <a:tailEnd type="none" w="med" len="med"/>
+                    </a:lnT>
+                    <a:lnB w="6350" cap="flat" cmpd="sng" algn="ctr">
+                      <a:solidFill>
+                        <a:srgbClr val="D5DEE5"/>
+                      </a:solidFill>
+                      <a:prstDash val="solid"/>
+                      <a:round/>
+                      <a:headEnd type="none" w="med" len="med"/>
+                      <a:tailEnd type="none" w="med" len="med"/>
+                    </a:lnB>
+                    <a:solidFill>
+                      <a:srgbClr val="FEFEFE"/>
+                    </a:solidFill>
+                  </a:tcPr>
+                </a:tc>
+                <a:tc>
+                  <a:txBody>
+                    <a:bodyPr/>
+                    <a:lstStyle/>
+                    <a:p>
+                      <a:pPr algn="ctr" indent="0" marL="0">
+                        <a:buNone/>
+                      </a:pPr>
+                      <a:r>
+                        <a:rPr lang="en-US" sz="1200" dirty="0">
+                          <a:solidFill>
+                            <a:srgbClr val="1B2733"/>
+                          </a:solidFill>
+                          <a:latin typeface="Calibri" pitchFamily="34" charset="0"/>
+                          <a:ea typeface="Calibri" pitchFamily="34" charset="-122"/>
+                          <a:cs typeface="Calibri" pitchFamily="34" charset="-120"/>
+                        </a:rPr>
+                        <a:t>0</a:t>
+                      </a:r>
+                      <a:endParaRPr lang="en-US" sz="1200" dirty="0">
+                        <a:latin typeface="Calibri" charset="0"/>
+                        <a:ea typeface="Calibri" charset="0"/>
+                        <a:cs typeface="Calibri" charset="0"/>
+                      </a:endParaRPr>
+                    </a:p>
+                  </a:txBody>
+                  <a:tcPr marL="25400" marR="25400" marT="12700" marB="12700">
+                    <a:lnL w="6350" cap="flat" cmpd="sng" algn="ctr">
+                      <a:solidFill>
+                        <a:srgbClr val="D5DEE5"/>
+                      </a:solidFill>
+                      <a:prstDash val="solid"/>
+                      <a:round/>
+                      <a:headEnd type="none" w="med" len="med"/>
+                      <a:tailEnd type="none" w="med" len="med"/>
+                    </a:lnL>
+                    <a:lnR w="6350" cap="flat" cmpd="sng" algn="ctr">
+                      <a:solidFill>
+                        <a:srgbClr val="D5DEE5"/>
+                      </a:solidFill>
+                      <a:prstDash val="solid"/>
+                      <a:round/>
+                      <a:headEnd type="none" w="med" len="med"/>
+                      <a:tailEnd type="none" w="med" len="med"/>
+                    </a:lnR>
+                    <a:lnT w="6350" cap="flat" cmpd="sng" algn="ctr">
+                      <a:solidFill>
+                        <a:srgbClr val="D5DEE5"/>
+                      </a:solidFill>
+                      <a:prstDash val="solid"/>
+                      <a:round/>
+                      <a:headEnd type="none" w="med" len="med"/>
+                      <a:tailEnd type="none" w="med" len="med"/>
+                    </a:lnT>
+                    <a:lnB w="6350" cap="flat" cmpd="sng" algn="ctr">
+                      <a:solidFill>
+                        <a:srgbClr val="D5DEE5"/>
+                      </a:solidFill>
+                      <a:prstDash val="solid"/>
+                      <a:round/>
+                      <a:headEnd type="none" w="med" len="med"/>
+                      <a:tailEnd type="none" w="med" len="med"/>
+                    </a:lnB>
+                    <a:solidFill>
+                      <a:srgbClr val="FFFFFF"/>
+                    </a:solidFill>
+                  </a:tcPr>
+                </a:tc>
+              </a:tr>
+              <a:tr h="457200">
+                <a:tc>
+                  <a:txBody>
+                    <a:bodyPr/>
+                    <a:lstStyle/>
+                    <a:p>
+                      <a:pPr indent="0" marL="0">
+                        <a:buNone/>
+                      </a:pPr>
+                      <a:r>
+                        <a:rPr lang="en-US" sz="1000" b="1" dirty="0">
+                          <a:solidFill>
+                            <a:srgbClr val="1B2733"/>
+                          </a:solidFill>
+                          <a:latin typeface="Calibri" pitchFamily="34" charset="0"/>
+                          <a:ea typeface="Calibri" pitchFamily="34" charset="-122"/>
+                          <a:cs typeface="Calibri" pitchFamily="34" charset="-120"/>
+                        </a:rPr>
+                        <a:t>DISEASE</a:t>
+                      </a:r>
+                      <a:endParaRPr lang="en-US" sz="1000" dirty="0">
+                        <a:latin typeface="Calibri" charset="0"/>
+                        <a:ea typeface="Calibri" charset="0"/>
+                        <a:cs typeface="Calibri" charset="0"/>
+                      </a:endParaRPr>
+                    </a:p>
+                  </a:txBody>
+                  <a:tcPr marL="25400" marR="25400" marT="12700" marB="12700">
+                    <a:lnL w="6350" cap="flat" cmpd="sng" algn="ctr">
+                      <a:solidFill>
+                        <a:srgbClr val="D5DEE5"/>
+                      </a:solidFill>
+                      <a:prstDash val="solid"/>
+                      <a:round/>
+                      <a:headEnd type="none" w="med" len="med"/>
+                      <a:tailEnd type="none" w="med" len="med"/>
+                    </a:lnL>
+                    <a:lnR w="6350" cap="flat" cmpd="sng" algn="ctr">
+                      <a:solidFill>
+                        <a:srgbClr val="D5DEE5"/>
+                      </a:solidFill>
+                      <a:prstDash val="solid"/>
+                      <a:round/>
+                      <a:headEnd type="none" w="med" len="med"/>
+                      <a:tailEnd type="none" w="med" len="med"/>
+                    </a:lnR>
+                    <a:lnT w="6350" cap="flat" cmpd="sng" algn="ctr">
+                      <a:solidFill>
+                        <a:srgbClr val="D5DEE5"/>
+                      </a:solidFill>
+                      <a:prstDash val="solid"/>
+                      <a:round/>
+                      <a:headEnd type="none" w="med" len="med"/>
+                      <a:tailEnd type="none" w="med" len="med"/>
+                    </a:lnT>
+                    <a:lnB w="6350" cap="flat" cmpd="sng" algn="ctr">
+                      <a:solidFill>
+                        <a:srgbClr val="D5DEE5"/>
+                      </a:solidFill>
+                      <a:prstDash val="solid"/>
+                      <a:round/>
+                      <a:headEnd type="none" w="med" len="med"/>
+                      <a:tailEnd type="none" w="med" len="med"/>
+                    </a:lnB>
+                    <a:solidFill>
+                      <a:srgbClr val="F7FAFB"/>
+                    </a:solidFill>
+                  </a:tcPr>
+                </a:tc>
+                <a:tc>
+                  <a:txBody>
+                    <a:bodyPr/>
+                    <a:lstStyle/>
+                    <a:p>
+                      <a:pPr algn="ctr" indent="0" marL="0">
+                        <a:buNone/>
+                      </a:pPr>
+                      <a:r>
+                        <a:rPr lang="en-US" sz="1200" dirty="0">
+                          <a:solidFill>
+                            <a:srgbClr val="1B2733"/>
+                          </a:solidFill>
+                          <a:latin typeface="Calibri" pitchFamily="34" charset="0"/>
+                          <a:ea typeface="Calibri" pitchFamily="34" charset="-122"/>
+                          <a:cs typeface="Calibri" pitchFamily="34" charset="-120"/>
+                        </a:rPr>
+                        <a:t>10</a:t>
+                      </a:r>
+                      <a:endParaRPr lang="en-US" sz="1200" dirty="0">
+                        <a:latin typeface="Calibri" charset="0"/>
+                        <a:ea typeface="Calibri" charset="0"/>
+                        <a:cs typeface="Calibri" charset="0"/>
+                      </a:endParaRPr>
+                    </a:p>
+                  </a:txBody>
+                  <a:tcPr marL="25400" marR="25400" marT="12700" marB="12700">
+                    <a:lnL w="6350" cap="flat" cmpd="sng" algn="ctr">
+                      <a:solidFill>
+                        <a:srgbClr val="D5DEE5"/>
+                      </a:solidFill>
+                      <a:prstDash val="solid"/>
+                      <a:round/>
+                      <a:headEnd type="none" w="med" len="med"/>
+                      <a:tailEnd type="none" w="med" len="med"/>
+                    </a:lnL>
+                    <a:lnR w="6350" cap="flat" cmpd="sng" algn="ctr">
+                      <a:solidFill>
+                        <a:srgbClr val="D5DEE5"/>
+                      </a:solidFill>
+                      <a:prstDash val="solid"/>
+                      <a:round/>
+                      <a:headEnd type="none" w="med" len="med"/>
+                      <a:tailEnd type="none" w="med" len="med"/>
+                    </a:lnR>
+                    <a:lnT w="6350" cap="flat" cmpd="sng" algn="ctr">
+                      <a:solidFill>
+                        <a:srgbClr val="D5DEE5"/>
+                      </a:solidFill>
+                      <a:prstDash val="solid"/>
+                      <a:round/>
+                      <a:headEnd type="none" w="med" len="med"/>
+                      <a:tailEnd type="none" w="med" len="med"/>
+                    </a:lnT>
+                    <a:lnB w="6350" cap="flat" cmpd="sng" algn="ctr">
+                      <a:solidFill>
+                        <a:srgbClr val="D5DEE5"/>
+                      </a:solidFill>
+                      <a:prstDash val="solid"/>
+                      <a:round/>
+                      <a:headEnd type="none" w="med" len="med"/>
+                      <a:tailEnd type="none" w="med" len="med"/>
+                    </a:lnB>
+                    <a:solidFill>
+                      <a:srgbClr val="E6E9EB"/>
+                    </a:solidFill>
+                  </a:tcPr>
+                </a:tc>
+                <a:tc>
+                  <a:txBody>
+                    <a:bodyPr/>
+                    <a:lstStyle/>
+                    <a:p>
+                      <a:pPr algn="ctr" indent="0" marL="0">
+                        <a:buNone/>
+                      </a:pPr>
+                      <a:r>
+                        <a:rPr lang="en-US" sz="1200" b="1" dirty="0">
+                          <a:solidFill>
+                            <a:srgbClr val="FFFFFF"/>
+                          </a:solidFill>
+                          <a:latin typeface="Calibri" pitchFamily="34" charset="0"/>
+                          <a:ea typeface="Calibri" pitchFamily="34" charset="-122"/>
+                          <a:cs typeface="Calibri" pitchFamily="34" charset="-120"/>
+                        </a:rPr>
+                        <a:t>83</a:t>
+                      </a:r>
+                      <a:endParaRPr lang="en-US" sz="1200" dirty="0">
+                        <a:latin typeface="Calibri" charset="0"/>
+                        <a:ea typeface="Calibri" charset="0"/>
+                        <a:cs typeface="Calibri" charset="0"/>
+                      </a:endParaRPr>
+                    </a:p>
+                  </a:txBody>
+                  <a:tcPr marL="25400" marR="25400" marT="12700" marB="12700">
+                    <a:lnL w="6350" cap="flat" cmpd="sng" algn="ctr">
+                      <a:solidFill>
+                        <a:srgbClr val="D5DEE5"/>
+                      </a:solidFill>
+                      <a:prstDash val="solid"/>
+                      <a:round/>
+                      <a:headEnd type="none" w="med" len="med"/>
+                      <a:tailEnd type="none" w="med" len="med"/>
+                    </a:lnL>
+                    <a:lnR w="6350" cap="flat" cmpd="sng" algn="ctr">
+                      <a:solidFill>
+                        <a:srgbClr val="D5DEE5"/>
+                      </a:solidFill>
+                      <a:prstDash val="solid"/>
+                      <a:round/>
+                      <a:headEnd type="none" w="med" len="med"/>
+                      <a:tailEnd type="none" w="med" len="med"/>
+                    </a:lnR>
+                    <a:lnT w="6350" cap="flat" cmpd="sng" algn="ctr">
+                      <a:solidFill>
+                        <a:srgbClr val="D5DEE5"/>
+                      </a:solidFill>
+                      <a:prstDash val="solid"/>
+                      <a:round/>
+                      <a:headEnd type="none" w="med" len="med"/>
+                      <a:tailEnd type="none" w="med" len="med"/>
+                    </a:lnT>
+                    <a:lnB w="6350" cap="flat" cmpd="sng" algn="ctr">
+                      <a:solidFill>
+                        <a:srgbClr val="D5DEE5"/>
+                      </a:solidFill>
+                      <a:prstDash val="solid"/>
+                      <a:round/>
+                      <a:headEnd type="none" w="med" len="med"/>
+                      <a:tailEnd type="none" w="med" len="med"/>
+                    </a:lnB>
+                    <a:solidFill>
+                      <a:srgbClr val="394F5F"/>
+                    </a:solidFill>
+                  </a:tcPr>
+                </a:tc>
+                <a:tc>
+                  <a:txBody>
+                    <a:bodyPr/>
+                    <a:lstStyle/>
+                    <a:p>
+                      <a:pPr algn="ctr" indent="0" marL="0">
+                        <a:buNone/>
+                      </a:pPr>
+                      <a:r>
+                        <a:rPr lang="en-US" sz="1200" dirty="0">
+                          <a:solidFill>
+                            <a:srgbClr val="1B2733"/>
+                          </a:solidFill>
+                          <a:latin typeface="Calibri" pitchFamily="34" charset="0"/>
+                          <a:ea typeface="Calibri" pitchFamily="34" charset="-122"/>
+                          <a:cs typeface="Calibri" pitchFamily="34" charset="-120"/>
+                        </a:rPr>
+                        <a:t>6</a:t>
+                      </a:r>
+                      <a:endParaRPr lang="en-US" sz="1200" dirty="0">
+                        <a:latin typeface="Calibri" charset="0"/>
+                        <a:ea typeface="Calibri" charset="0"/>
+                        <a:cs typeface="Calibri" charset="0"/>
+                      </a:endParaRPr>
+                    </a:p>
+                  </a:txBody>
+                  <a:tcPr marL="25400" marR="25400" marT="12700" marB="12700">
+                    <a:lnL w="6350" cap="flat" cmpd="sng" algn="ctr">
+                      <a:solidFill>
+                        <a:srgbClr val="D5DEE5"/>
+                      </a:solidFill>
+                      <a:prstDash val="solid"/>
+                      <a:round/>
+                      <a:headEnd type="none" w="med" len="med"/>
+                      <a:tailEnd type="none" w="med" len="med"/>
+                    </a:lnL>
+                    <a:lnR w="6350" cap="flat" cmpd="sng" algn="ctr">
+                      <a:solidFill>
+                        <a:srgbClr val="D5DEE5"/>
+                      </a:solidFill>
+                      <a:prstDash val="solid"/>
+                      <a:round/>
+                      <a:headEnd type="none" w="med" len="med"/>
+                      <a:tailEnd type="none" w="med" len="med"/>
+                    </a:lnR>
+                    <a:lnT w="6350" cap="flat" cmpd="sng" algn="ctr">
+                      <a:solidFill>
+                        <a:srgbClr val="D5DEE5"/>
+                      </a:solidFill>
+                      <a:prstDash val="solid"/>
+                      <a:round/>
+                      <a:headEnd type="none" w="med" len="med"/>
+                      <a:tailEnd type="none" w="med" len="med"/>
+                    </a:lnT>
+                    <a:lnB w="6350" cap="flat" cmpd="sng" algn="ctr">
+                      <a:solidFill>
+                        <a:srgbClr val="D5DEE5"/>
+                      </a:solidFill>
+                      <a:prstDash val="solid"/>
+                      <a:round/>
+                      <a:headEnd type="none" w="med" len="med"/>
+                      <a:tailEnd type="none" w="med" len="med"/>
+                    </a:lnB>
+                    <a:solidFill>
+                      <a:srgbClr val="F1F3F4"/>
+                    </a:solidFill>
+                  </a:tcPr>
+                </a:tc>
+                <a:tc>
+                  <a:txBody>
+                    <a:bodyPr/>
+                    <a:lstStyle/>
+                    <a:p>
+                      <a:pPr algn="ctr" indent="0" marL="0">
+                        <a:buNone/>
+                      </a:pPr>
+                      <a:r>
+                        <a:rPr lang="en-US" sz="1200" dirty="0">
+                          <a:solidFill>
+                            <a:srgbClr val="1B2733"/>
+                          </a:solidFill>
+                          <a:latin typeface="Calibri" pitchFamily="34" charset="0"/>
+                          <a:ea typeface="Calibri" pitchFamily="34" charset="-122"/>
+                          <a:cs typeface="Calibri" pitchFamily="34" charset="-120"/>
+                        </a:rPr>
+                        <a:t>0</a:t>
+                      </a:r>
+                      <a:endParaRPr lang="en-US" sz="1200" dirty="0">
+                        <a:latin typeface="Calibri" charset="0"/>
+                        <a:ea typeface="Calibri" charset="0"/>
+                        <a:cs typeface="Calibri" charset="0"/>
+                      </a:endParaRPr>
+                    </a:p>
+                  </a:txBody>
+                  <a:tcPr marL="25400" marR="25400" marT="12700" marB="12700">
+                    <a:lnL w="6350" cap="flat" cmpd="sng" algn="ctr">
+                      <a:solidFill>
+                        <a:srgbClr val="D5DEE5"/>
+                      </a:solidFill>
+                      <a:prstDash val="solid"/>
+                      <a:round/>
+                      <a:headEnd type="none" w="med" len="med"/>
+                      <a:tailEnd type="none" w="med" len="med"/>
+                    </a:lnL>
+                    <a:lnR w="6350" cap="flat" cmpd="sng" algn="ctr">
+                      <a:solidFill>
+                        <a:srgbClr val="D5DEE5"/>
+                      </a:solidFill>
+                      <a:prstDash val="solid"/>
+                      <a:round/>
+                      <a:headEnd type="none" w="med" len="med"/>
+                      <a:tailEnd type="none" w="med" len="med"/>
+                    </a:lnR>
+                    <a:lnT w="6350" cap="flat" cmpd="sng" algn="ctr">
+                      <a:solidFill>
+                        <a:srgbClr val="D5DEE5"/>
+                      </a:solidFill>
+                      <a:prstDash val="solid"/>
+                      <a:round/>
+                      <a:headEnd type="none" w="med" len="med"/>
+                      <a:tailEnd type="none" w="med" len="med"/>
+                    </a:lnT>
+                    <a:lnB w="6350" cap="flat" cmpd="sng" algn="ctr">
+                      <a:solidFill>
+                        <a:srgbClr val="D5DEE5"/>
+                      </a:solidFill>
+                      <a:prstDash val="solid"/>
+                      <a:round/>
+                      <a:headEnd type="none" w="med" len="med"/>
+                      <a:tailEnd type="none" w="med" len="med"/>
+                    </a:lnB>
+                    <a:solidFill>
+                      <a:srgbClr val="FFFFFF"/>
+                    </a:solidFill>
+                  </a:tcPr>
+                </a:tc>
+                <a:tc>
+                  <a:txBody>
+                    <a:bodyPr/>
+                    <a:lstStyle/>
+                    <a:p>
+                      <a:pPr algn="ctr" indent="0" marL="0">
+                        <a:buNone/>
+                      </a:pPr>
+                      <a:r>
+                        <a:rPr lang="en-US" sz="1200" dirty="0">
+                          <a:solidFill>
+                            <a:srgbClr val="1B2733"/>
+                          </a:solidFill>
+                          <a:latin typeface="Calibri" pitchFamily="34" charset="0"/>
+                          <a:ea typeface="Calibri" pitchFamily="34" charset="-122"/>
+                          <a:cs typeface="Calibri" pitchFamily="34" charset="-120"/>
+                        </a:rPr>
+                        <a:t>0</a:t>
+                      </a:r>
+                      <a:endParaRPr lang="en-US" sz="1200" dirty="0">
+                        <a:latin typeface="Calibri" charset="0"/>
+                        <a:ea typeface="Calibri" charset="0"/>
+                        <a:cs typeface="Calibri" charset="0"/>
+                      </a:endParaRPr>
+                    </a:p>
+                  </a:txBody>
+                  <a:tcPr marL="25400" marR="25400" marT="12700" marB="12700">
+                    <a:lnL w="6350" cap="flat" cmpd="sng" algn="ctr">
+                      <a:solidFill>
+                        <a:srgbClr val="D5DEE5"/>
+                      </a:solidFill>
+                      <a:prstDash val="solid"/>
+                      <a:round/>
+                      <a:headEnd type="none" w="med" len="med"/>
+                      <a:tailEnd type="none" w="med" len="med"/>
+                    </a:lnL>
+                    <a:lnR w="6350" cap="flat" cmpd="sng" algn="ctr">
+                      <a:solidFill>
+                        <a:srgbClr val="D5DEE5"/>
+                      </a:solidFill>
+                      <a:prstDash val="solid"/>
+                      <a:round/>
+                      <a:headEnd type="none" w="med" len="med"/>
+                      <a:tailEnd type="none" w="med" len="med"/>
+                    </a:lnR>
+                    <a:lnT w="6350" cap="flat" cmpd="sng" algn="ctr">
+                      <a:solidFill>
+                        <a:srgbClr val="D5DEE5"/>
+                      </a:solidFill>
+                      <a:prstDash val="solid"/>
+                      <a:round/>
+                      <a:headEnd type="none" w="med" len="med"/>
+                      <a:tailEnd type="none" w="med" len="med"/>
+                    </a:lnT>
+                    <a:lnB w="6350" cap="flat" cmpd="sng" algn="ctr">
+                      <a:solidFill>
+                        <a:srgbClr val="D5DEE5"/>
+                      </a:solidFill>
+                      <a:prstDash val="solid"/>
+                      <a:round/>
+                      <a:headEnd type="none" w="med" len="med"/>
+                      <a:tailEnd type="none" w="med" len="med"/>
+                    </a:lnB>
+                    <a:solidFill>
+                      <a:srgbClr val="FFFFFF"/>
+                    </a:solidFill>
+                  </a:tcPr>
+                </a:tc>
+                <a:tc>
+                  <a:txBody>
+                    <a:bodyPr/>
+                    <a:lstStyle/>
+                    <a:p>
+                      <a:pPr algn="ctr" indent="0" marL="0">
+                        <a:buNone/>
+                      </a:pPr>
+                      <a:r>
+                        <a:rPr lang="en-US" sz="1200" dirty="0">
+                          <a:solidFill>
+                            <a:srgbClr val="1B2733"/>
+                          </a:solidFill>
+                          <a:latin typeface="Calibri" pitchFamily="34" charset="0"/>
+                          <a:ea typeface="Calibri" pitchFamily="34" charset="-122"/>
+                          <a:cs typeface="Calibri" pitchFamily="34" charset="-120"/>
+                        </a:rPr>
+                        <a:t>0</a:t>
+                      </a:r>
+                      <a:endParaRPr lang="en-US" sz="1200" dirty="0">
+                        <a:latin typeface="Calibri" charset="0"/>
+                        <a:ea typeface="Calibri" charset="0"/>
+                        <a:cs typeface="Calibri" charset="0"/>
+                      </a:endParaRPr>
+                    </a:p>
+                  </a:txBody>
+                  <a:tcPr marL="25400" marR="25400" marT="12700" marB="12700">
+                    <a:lnL w="6350" cap="flat" cmpd="sng" algn="ctr">
+                      <a:solidFill>
+                        <a:srgbClr val="D5DEE5"/>
+                      </a:solidFill>
+                      <a:prstDash val="solid"/>
+                      <a:round/>
+                      <a:headEnd type="none" w="med" len="med"/>
+                      <a:tailEnd type="none" w="med" len="med"/>
+                    </a:lnL>
+                    <a:lnR w="6350" cap="flat" cmpd="sng" algn="ctr">
+                      <a:solidFill>
+                        <a:srgbClr val="D5DEE5"/>
+                      </a:solidFill>
+                      <a:prstDash val="solid"/>
+                      <a:round/>
+                      <a:headEnd type="none" w="med" len="med"/>
+                      <a:tailEnd type="none" w="med" len="med"/>
+                    </a:lnR>
+                    <a:lnT w="6350" cap="flat" cmpd="sng" algn="ctr">
+                      <a:solidFill>
+                        <a:srgbClr val="D5DEE5"/>
+                      </a:solidFill>
+                      <a:prstDash val="solid"/>
+                      <a:round/>
+                      <a:headEnd type="none" w="med" len="med"/>
+                      <a:tailEnd type="none" w="med" len="med"/>
+                    </a:lnT>
+                    <a:lnB w="6350" cap="flat" cmpd="sng" algn="ctr">
+                      <a:solidFill>
+                        <a:srgbClr val="D5DEE5"/>
+                      </a:solidFill>
+                      <a:prstDash val="solid"/>
+                      <a:round/>
+                      <a:headEnd type="none" w="med" len="med"/>
+                      <a:tailEnd type="none" w="med" len="med"/>
+                    </a:lnB>
+                    <a:solidFill>
+                      <a:srgbClr val="FFFFFF"/>
+                    </a:solidFill>
+                  </a:tcPr>
+                </a:tc>
+                <a:tc>
+                  <a:txBody>
+                    <a:bodyPr/>
+                    <a:lstStyle/>
+                    <a:p>
+                      <a:pPr algn="ctr" indent="0" marL="0">
+                        <a:buNone/>
+                      </a:pPr>
+                      <a:r>
+                        <a:rPr lang="en-US" sz="1200" dirty="0">
+                          <a:solidFill>
+                            <a:srgbClr val="1B2733"/>
+                          </a:solidFill>
+                          <a:latin typeface="Calibri" pitchFamily="34" charset="0"/>
+                          <a:ea typeface="Calibri" pitchFamily="34" charset="-122"/>
+                          <a:cs typeface="Calibri" pitchFamily="34" charset="-120"/>
+                        </a:rPr>
+                        <a:t>1</a:t>
+                      </a:r>
+                      <a:endParaRPr lang="en-US" sz="1200" dirty="0">
+                        <a:latin typeface="Calibri" charset="0"/>
+                        <a:ea typeface="Calibri" charset="0"/>
+                        <a:cs typeface="Calibri" charset="0"/>
+                      </a:endParaRPr>
+                    </a:p>
+                  </a:txBody>
+                  <a:tcPr marL="25400" marR="25400" marT="12700" marB="12700">
+                    <a:lnL w="6350" cap="flat" cmpd="sng" algn="ctr">
+                      <a:solidFill>
+                        <a:srgbClr val="D5DEE5"/>
+                      </a:solidFill>
+                      <a:prstDash val="solid"/>
+                      <a:round/>
+                      <a:headEnd type="none" w="med" len="med"/>
+                      <a:tailEnd type="none" w="med" len="med"/>
+                    </a:lnL>
+                    <a:lnR w="6350" cap="flat" cmpd="sng" algn="ctr">
+                      <a:solidFill>
+                        <a:srgbClr val="D5DEE5"/>
+                      </a:solidFill>
+                      <a:prstDash val="solid"/>
+                      <a:round/>
+                      <a:headEnd type="none" w="med" len="med"/>
+                      <a:tailEnd type="none" w="med" len="med"/>
+                    </a:lnR>
+                    <a:lnT w="6350" cap="flat" cmpd="sng" algn="ctr">
+                      <a:solidFill>
+                        <a:srgbClr val="D5DEE5"/>
+                      </a:solidFill>
+                      <a:prstDash val="solid"/>
+                      <a:round/>
+                      <a:headEnd type="none" w="med" len="med"/>
+                      <a:tailEnd type="none" w="med" len="med"/>
+                    </a:lnT>
+                    <a:lnB w="6350" cap="flat" cmpd="sng" algn="ctr">
+                      <a:solidFill>
+                        <a:srgbClr val="D5DEE5"/>
+                      </a:solidFill>
+                      <a:prstDash val="solid"/>
+                      <a:round/>
+                      <a:headEnd type="none" w="med" len="med"/>
+                      <a:tailEnd type="none" w="med" len="med"/>
+                    </a:lnB>
+                    <a:solidFill>
+                      <a:srgbClr val="FEFEFE"/>
+                    </a:solidFill>
+                  </a:tcPr>
+                </a:tc>
+                <a:tc>
+                  <a:txBody>
+                    <a:bodyPr/>
+                    <a:lstStyle/>
+                    <a:p>
+                      <a:pPr algn="ctr" indent="0" marL="0">
+                        <a:buNone/>
+                      </a:pPr>
+                      <a:r>
+                        <a:rPr lang="en-US" sz="1200" dirty="0">
+                          <a:solidFill>
+                            <a:srgbClr val="1B2733"/>
+                          </a:solidFill>
+                          <a:latin typeface="Calibri" pitchFamily="34" charset="0"/>
+                          <a:ea typeface="Calibri" pitchFamily="34" charset="-122"/>
+                          <a:cs typeface="Calibri" pitchFamily="34" charset="-120"/>
+                        </a:rPr>
+                        <a:t>0</a:t>
+                      </a:r>
+                      <a:endParaRPr lang="en-US" sz="1200" dirty="0">
+                        <a:latin typeface="Calibri" charset="0"/>
+                        <a:ea typeface="Calibri" charset="0"/>
+                        <a:cs typeface="Calibri" charset="0"/>
+                      </a:endParaRPr>
+                    </a:p>
+                  </a:txBody>
+                  <a:tcPr marL="25400" marR="25400" marT="12700" marB="12700">
+                    <a:lnL w="6350" cap="flat" cmpd="sng" algn="ctr">
+                      <a:solidFill>
+                        <a:srgbClr val="D5DEE5"/>
+                      </a:solidFill>
+                      <a:prstDash val="solid"/>
+                      <a:round/>
+                      <a:headEnd type="none" w="med" len="med"/>
+                      <a:tailEnd type="none" w="med" len="med"/>
+                    </a:lnL>
+                    <a:lnR w="6350" cap="flat" cmpd="sng" algn="ctr">
+                      <a:solidFill>
+                        <a:srgbClr val="D5DEE5"/>
+                      </a:solidFill>
+                      <a:prstDash val="solid"/>
+                      <a:round/>
+                      <a:headEnd type="none" w="med" len="med"/>
+                      <a:tailEnd type="none" w="med" len="med"/>
+                    </a:lnR>
+                    <a:lnT w="6350" cap="flat" cmpd="sng" algn="ctr">
+                      <a:solidFill>
+                        <a:srgbClr val="D5DEE5"/>
+                      </a:solidFill>
+                      <a:prstDash val="solid"/>
+                      <a:round/>
+                      <a:headEnd type="none" w="med" len="med"/>
+                      <a:tailEnd type="none" w="med" len="med"/>
+                    </a:lnT>
+                    <a:lnB w="6350" cap="flat" cmpd="sng" algn="ctr">
+                      <a:solidFill>
+                        <a:srgbClr val="D5DEE5"/>
+                      </a:solidFill>
+                      <a:prstDash val="solid"/>
+                      <a:round/>
+                      <a:headEnd type="none" w="med" len="med"/>
+                      <a:tailEnd type="none" w="med" len="med"/>
+                    </a:lnB>
+                    <a:solidFill>
+                      <a:srgbClr val="FFFFFF"/>
+                    </a:solidFill>
+                  </a:tcPr>
+                </a:tc>
+              </a:tr>
+              <a:tr h="457200">
+                <a:tc>
+                  <a:txBody>
+                    <a:bodyPr/>
+                    <a:lstStyle/>
+                    <a:p>
+                      <a:pPr indent="0" marL="0">
+                        <a:buNone/>
+                      </a:pPr>
+                      <a:r>
+                        <a:rPr lang="en-US" sz="1000" b="1" dirty="0">
+                          <a:solidFill>
+                            <a:srgbClr val="1B2733"/>
+                          </a:solidFill>
+                          <a:latin typeface="Calibri" pitchFamily="34" charset="0"/>
+                          <a:ea typeface="Calibri" pitchFamily="34" charset="-122"/>
+                          <a:cs typeface="Calibri" pitchFamily="34" charset="-120"/>
+                        </a:rPr>
+                        <a:t>ORGAN</a:t>
+                      </a:r>
+                      <a:endParaRPr lang="en-US" sz="1000" dirty="0">
+                        <a:latin typeface="Calibri" charset="0"/>
+                        <a:ea typeface="Calibri" charset="0"/>
+                        <a:cs typeface="Calibri" charset="0"/>
+                      </a:endParaRPr>
+                    </a:p>
+                  </a:txBody>
+                  <a:tcPr marL="25400" marR="25400" marT="12700" marB="12700">
+                    <a:lnL w="6350" cap="flat" cmpd="sng" algn="ctr">
+                      <a:solidFill>
+                        <a:srgbClr val="D5DEE5"/>
+                      </a:solidFill>
+                      <a:prstDash val="solid"/>
+                      <a:round/>
+                      <a:headEnd type="none" w="med" len="med"/>
+                      <a:tailEnd type="none" w="med" len="med"/>
+                    </a:lnL>
+                    <a:lnR w="6350" cap="flat" cmpd="sng" algn="ctr">
+                      <a:solidFill>
+                        <a:srgbClr val="D5DEE5"/>
+                      </a:solidFill>
+                      <a:prstDash val="solid"/>
+                      <a:round/>
+                      <a:headEnd type="none" w="med" len="med"/>
+                      <a:tailEnd type="none" w="med" len="med"/>
+                    </a:lnR>
+                    <a:lnT w="6350" cap="flat" cmpd="sng" algn="ctr">
+                      <a:solidFill>
+                        <a:srgbClr val="D5DEE5"/>
+                      </a:solidFill>
+                      <a:prstDash val="solid"/>
+                      <a:round/>
+                      <a:headEnd type="none" w="med" len="med"/>
+                      <a:tailEnd type="none" w="med" len="med"/>
+                    </a:lnT>
+                    <a:lnB w="6350" cap="flat" cmpd="sng" algn="ctr">
+                      <a:solidFill>
+                        <a:srgbClr val="D5DEE5"/>
+                      </a:solidFill>
+                      <a:prstDash val="solid"/>
+                      <a:round/>
+                      <a:headEnd type="none" w="med" len="med"/>
+                      <a:tailEnd type="none" w="med" len="med"/>
+                    </a:lnB>
+                    <a:solidFill>
+                      <a:srgbClr val="F7FAFB"/>
+                    </a:solidFill>
+                  </a:tcPr>
+                </a:tc>
+                <a:tc>
+                  <a:txBody>
+                    <a:bodyPr/>
+                    <a:lstStyle/>
+                    <a:p>
+                      <a:pPr algn="ctr" indent="0" marL="0">
+                        <a:buNone/>
+                      </a:pPr>
+                      <a:r>
+                        <a:rPr lang="en-US" sz="1200" dirty="0">
+                          <a:solidFill>
+                            <a:srgbClr val="1B2733"/>
+                          </a:solidFill>
+                          <a:latin typeface="Calibri" pitchFamily="34" charset="0"/>
+                          <a:ea typeface="Calibri" pitchFamily="34" charset="-122"/>
+                          <a:cs typeface="Calibri" pitchFamily="34" charset="-120"/>
+                        </a:rPr>
+                        <a:t>6</a:t>
+                      </a:r>
+                      <a:endParaRPr lang="en-US" sz="1200" dirty="0">
+                        <a:latin typeface="Calibri" charset="0"/>
+                        <a:ea typeface="Calibri" charset="0"/>
+                        <a:cs typeface="Calibri" charset="0"/>
+                      </a:endParaRPr>
+                    </a:p>
+                  </a:txBody>
+                  <a:tcPr marL="25400" marR="25400" marT="12700" marB="12700">
+                    <a:lnL w="6350" cap="flat" cmpd="sng" algn="ctr">
+                      <a:solidFill>
+                        <a:srgbClr val="D5DEE5"/>
+                      </a:solidFill>
+                      <a:prstDash val="solid"/>
+                      <a:round/>
+                      <a:headEnd type="none" w="med" len="med"/>
+                      <a:tailEnd type="none" w="med" len="med"/>
+                    </a:lnL>
+                    <a:lnR w="6350" cap="flat" cmpd="sng" algn="ctr">
+                      <a:solidFill>
+                        <a:srgbClr val="D5DEE5"/>
+                      </a:solidFill>
+                      <a:prstDash val="solid"/>
+                      <a:round/>
+                      <a:headEnd type="none" w="med" len="med"/>
+                      <a:tailEnd type="none" w="med" len="med"/>
+                    </a:lnR>
+                    <a:lnT w="6350" cap="flat" cmpd="sng" algn="ctr">
+                      <a:solidFill>
+                        <a:srgbClr val="D5DEE5"/>
+                      </a:solidFill>
+                      <a:prstDash val="solid"/>
+                      <a:round/>
+                      <a:headEnd type="none" w="med" len="med"/>
+                      <a:tailEnd type="none" w="med" len="med"/>
+                    </a:lnT>
+                    <a:lnB w="6350" cap="flat" cmpd="sng" algn="ctr">
+                      <a:solidFill>
+                        <a:srgbClr val="D5DEE5"/>
+                      </a:solidFill>
+                      <a:prstDash val="solid"/>
+                      <a:round/>
+                      <a:headEnd type="none" w="med" len="med"/>
+                      <a:tailEnd type="none" w="med" len="med"/>
+                    </a:lnB>
+                    <a:solidFill>
+                      <a:srgbClr val="F0F2F3"/>
+                    </a:solidFill>
+                  </a:tcPr>
+                </a:tc>
+                <a:tc>
+                  <a:txBody>
+                    <a:bodyPr/>
+                    <a:lstStyle/>
+                    <a:p>
+                      <a:pPr algn="ctr" indent="0" marL="0">
+                        <a:buNone/>
+                      </a:pPr>
+                      <a:r>
+                        <a:rPr lang="en-US" sz="1200" dirty="0">
+                          <a:solidFill>
+                            <a:srgbClr val="1B2733"/>
+                          </a:solidFill>
+                          <a:latin typeface="Calibri" pitchFamily="34" charset="0"/>
+                          <a:ea typeface="Calibri" pitchFamily="34" charset="-122"/>
+                          <a:cs typeface="Calibri" pitchFamily="34" charset="-120"/>
+                        </a:rPr>
+                        <a:t>6</a:t>
+                      </a:r>
+                      <a:endParaRPr lang="en-US" sz="1200" dirty="0">
+                        <a:latin typeface="Calibri" charset="0"/>
+                        <a:ea typeface="Calibri" charset="0"/>
+                        <a:cs typeface="Calibri" charset="0"/>
+                      </a:endParaRPr>
+                    </a:p>
+                  </a:txBody>
+                  <a:tcPr marL="25400" marR="25400" marT="12700" marB="12700">
+                    <a:lnL w="6350" cap="flat" cmpd="sng" algn="ctr">
+                      <a:solidFill>
+                        <a:srgbClr val="D5DEE5"/>
+                      </a:solidFill>
+                      <a:prstDash val="solid"/>
+                      <a:round/>
+                      <a:headEnd type="none" w="med" len="med"/>
+                      <a:tailEnd type="none" w="med" len="med"/>
+                    </a:lnL>
+                    <a:lnR w="6350" cap="flat" cmpd="sng" algn="ctr">
+                      <a:solidFill>
+                        <a:srgbClr val="D5DEE5"/>
+                      </a:solidFill>
+                      <a:prstDash val="solid"/>
+                      <a:round/>
+                      <a:headEnd type="none" w="med" len="med"/>
+                      <a:tailEnd type="none" w="med" len="med"/>
+                    </a:lnR>
+                    <a:lnT w="6350" cap="flat" cmpd="sng" algn="ctr">
+                      <a:solidFill>
+                        <a:srgbClr val="D5DEE5"/>
+                      </a:solidFill>
+                      <a:prstDash val="solid"/>
+                      <a:round/>
+                      <a:headEnd type="none" w="med" len="med"/>
+                      <a:tailEnd type="none" w="med" len="med"/>
+                    </a:lnT>
+                    <a:lnB w="6350" cap="flat" cmpd="sng" algn="ctr">
+                      <a:solidFill>
+                        <a:srgbClr val="D5DEE5"/>
+                      </a:solidFill>
+                      <a:prstDash val="solid"/>
+                      <a:round/>
+                      <a:headEnd type="none" w="med" len="med"/>
+                      <a:tailEnd type="none" w="med" len="med"/>
+                    </a:lnB>
+                    <a:solidFill>
+                      <a:srgbClr val="F0F2F3"/>
+                    </a:solidFill>
+                  </a:tcPr>
+                </a:tc>
+                <a:tc>
+                  <a:txBody>
+                    <a:bodyPr/>
+                    <a:lstStyle/>
+                    <a:p>
+                      <a:pPr algn="ctr" indent="0" marL="0">
+                        <a:buNone/>
+                      </a:pPr>
+                      <a:r>
+                        <a:rPr lang="en-US" sz="1200" b="1" dirty="0">
+                          <a:solidFill>
+                            <a:srgbClr val="FFFFFF"/>
+                          </a:solidFill>
+                          <a:latin typeface="Calibri" pitchFamily="34" charset="0"/>
+                          <a:ea typeface="Calibri" pitchFamily="34" charset="-122"/>
+                          <a:cs typeface="Calibri" pitchFamily="34" charset="-120"/>
+                        </a:rPr>
+                        <a:t>86</a:t>
+                      </a:r>
+                      <a:endParaRPr lang="en-US" sz="1200" dirty="0">
+                        <a:latin typeface="Calibri" charset="0"/>
+                        <a:ea typeface="Calibri" charset="0"/>
+                        <a:cs typeface="Calibri" charset="0"/>
+                      </a:endParaRPr>
+                    </a:p>
+                  </a:txBody>
+                  <a:tcPr marL="25400" marR="25400" marT="12700" marB="12700">
+                    <a:lnL w="6350" cap="flat" cmpd="sng" algn="ctr">
+                      <a:solidFill>
+                        <a:srgbClr val="D5DEE5"/>
+                      </a:solidFill>
+                      <a:prstDash val="solid"/>
+                      <a:round/>
+                      <a:headEnd type="none" w="med" len="med"/>
+                      <a:tailEnd type="none" w="med" len="med"/>
+                    </a:lnL>
+                    <a:lnR w="6350" cap="flat" cmpd="sng" algn="ctr">
+                      <a:solidFill>
+                        <a:srgbClr val="D5DEE5"/>
+                      </a:solidFill>
+                      <a:prstDash val="solid"/>
+                      <a:round/>
+                      <a:headEnd type="none" w="med" len="med"/>
+                      <a:tailEnd type="none" w="med" len="med"/>
+                    </a:lnR>
+                    <a:lnT w="6350" cap="flat" cmpd="sng" algn="ctr">
+                      <a:solidFill>
+                        <a:srgbClr val="D5DEE5"/>
+                      </a:solidFill>
+                      <a:prstDash val="solid"/>
+                      <a:round/>
+                      <a:headEnd type="none" w="med" len="med"/>
+                      <a:tailEnd type="none" w="med" len="med"/>
+                    </a:lnT>
+                    <a:lnB w="6350" cap="flat" cmpd="sng" algn="ctr">
+                      <a:solidFill>
+                        <a:srgbClr val="D5DEE5"/>
+                      </a:solidFill>
+                      <a:prstDash val="solid"/>
+                      <a:round/>
+                      <a:headEnd type="none" w="med" len="med"/>
+                      <a:tailEnd type="none" w="med" len="med"/>
+                    </a:lnB>
+                    <a:solidFill>
+                      <a:srgbClr val="304758"/>
+                    </a:solidFill>
+                  </a:tcPr>
+                </a:tc>
+                <a:tc>
+                  <a:txBody>
+                    <a:bodyPr/>
+                    <a:lstStyle/>
+                    <a:p>
+                      <a:pPr algn="ctr" indent="0" marL="0">
+                        <a:buNone/>
+                      </a:pPr>
+                      <a:r>
+                        <a:rPr lang="en-US" sz="1200" dirty="0">
+                          <a:solidFill>
+                            <a:srgbClr val="1B2733"/>
+                          </a:solidFill>
+                          <a:latin typeface="Calibri" pitchFamily="34" charset="0"/>
+                          <a:ea typeface="Calibri" pitchFamily="34" charset="-122"/>
+                          <a:cs typeface="Calibri" pitchFamily="34" charset="-120"/>
+                        </a:rPr>
+                        <a:t>0</a:t>
+                      </a:r>
+                      <a:endParaRPr lang="en-US" sz="1200" dirty="0">
+                        <a:latin typeface="Calibri" charset="0"/>
+                        <a:ea typeface="Calibri" charset="0"/>
+                        <a:cs typeface="Calibri" charset="0"/>
+                      </a:endParaRPr>
+                    </a:p>
+                  </a:txBody>
+                  <a:tcPr marL="25400" marR="25400" marT="12700" marB="12700">
+                    <a:lnL w="6350" cap="flat" cmpd="sng" algn="ctr">
+                      <a:solidFill>
+                        <a:srgbClr val="D5DEE5"/>
+                      </a:solidFill>
+                      <a:prstDash val="solid"/>
+                      <a:round/>
+                      <a:headEnd type="none" w="med" len="med"/>
+                      <a:tailEnd type="none" w="med" len="med"/>
+                    </a:lnL>
+                    <a:lnR w="6350" cap="flat" cmpd="sng" algn="ctr">
+                      <a:solidFill>
+                        <a:srgbClr val="D5DEE5"/>
+                      </a:solidFill>
+                      <a:prstDash val="solid"/>
+                      <a:round/>
+                      <a:headEnd type="none" w="med" len="med"/>
+                      <a:tailEnd type="none" w="med" len="med"/>
+                    </a:lnR>
+                    <a:lnT w="6350" cap="flat" cmpd="sng" algn="ctr">
+                      <a:solidFill>
+                        <a:srgbClr val="D5DEE5"/>
+                      </a:solidFill>
+                      <a:prstDash val="solid"/>
+                      <a:round/>
+                      <a:headEnd type="none" w="med" len="med"/>
+                      <a:tailEnd type="none" w="med" len="med"/>
+                    </a:lnT>
+                    <a:lnB w="6350" cap="flat" cmpd="sng" algn="ctr">
+                      <a:solidFill>
+                        <a:srgbClr val="D5DEE5"/>
+                      </a:solidFill>
+                      <a:prstDash val="solid"/>
+                      <a:round/>
+                      <a:headEnd type="none" w="med" len="med"/>
+                      <a:tailEnd type="none" w="med" len="med"/>
+                    </a:lnB>
+                    <a:solidFill>
+                      <a:srgbClr val="FEFEFE"/>
+                    </a:solidFill>
+                  </a:tcPr>
+                </a:tc>
+                <a:tc>
+                  <a:txBody>
+                    <a:bodyPr/>
+                    <a:lstStyle/>
+                    <a:p>
+                      <a:pPr algn="ctr" indent="0" marL="0">
+                        <a:buNone/>
+                      </a:pPr>
+                      <a:r>
+                        <a:rPr lang="en-US" sz="1200" dirty="0">
+                          <a:solidFill>
+                            <a:srgbClr val="1B2733"/>
+                          </a:solidFill>
+                          <a:latin typeface="Calibri" pitchFamily="34" charset="0"/>
+                          <a:ea typeface="Calibri" pitchFamily="34" charset="-122"/>
+                          <a:cs typeface="Calibri" pitchFamily="34" charset="-120"/>
+                        </a:rPr>
+                        <a:t>0</a:t>
+                      </a:r>
+                      <a:endParaRPr lang="en-US" sz="1200" dirty="0">
+                        <a:latin typeface="Calibri" charset="0"/>
+                        <a:ea typeface="Calibri" charset="0"/>
+                        <a:cs typeface="Calibri" charset="0"/>
+                      </a:endParaRPr>
+                    </a:p>
+                  </a:txBody>
+                  <a:tcPr marL="25400" marR="25400" marT="12700" marB="12700">
+                    <a:lnL w="6350" cap="flat" cmpd="sng" algn="ctr">
+                      <a:solidFill>
+                        <a:srgbClr val="D5DEE5"/>
+                      </a:solidFill>
+                      <a:prstDash val="solid"/>
+                      <a:round/>
+                      <a:headEnd type="none" w="med" len="med"/>
+                      <a:tailEnd type="none" w="med" len="med"/>
+                    </a:lnL>
+                    <a:lnR w="6350" cap="flat" cmpd="sng" algn="ctr">
+                      <a:solidFill>
+                        <a:srgbClr val="D5DEE5"/>
+                      </a:solidFill>
+                      <a:prstDash val="solid"/>
+                      <a:round/>
+                      <a:headEnd type="none" w="med" len="med"/>
+                      <a:tailEnd type="none" w="med" len="med"/>
+                    </a:lnR>
+                    <a:lnT w="6350" cap="flat" cmpd="sng" algn="ctr">
+                      <a:solidFill>
+                        <a:srgbClr val="D5DEE5"/>
+                      </a:solidFill>
+                      <a:prstDash val="solid"/>
+                      <a:round/>
+                      <a:headEnd type="none" w="med" len="med"/>
+                      <a:tailEnd type="none" w="med" len="med"/>
+                    </a:lnT>
+                    <a:lnB w="6350" cap="flat" cmpd="sng" algn="ctr">
+                      <a:solidFill>
+                        <a:srgbClr val="D5DEE5"/>
+                      </a:solidFill>
+                      <a:prstDash val="solid"/>
+                      <a:round/>
+                      <a:headEnd type="none" w="med" len="med"/>
+                      <a:tailEnd type="none" w="med" len="med"/>
+                    </a:lnB>
+                    <a:solidFill>
+                      <a:srgbClr val="FFFFFF"/>
+                    </a:solidFill>
+                  </a:tcPr>
+                </a:tc>
+                <a:tc>
+                  <a:txBody>
+                    <a:bodyPr/>
+                    <a:lstStyle/>
+                    <a:p>
+                      <a:pPr algn="ctr" indent="0" marL="0">
+                        <a:buNone/>
+                      </a:pPr>
+                      <a:r>
+                        <a:rPr lang="en-US" sz="1200" dirty="0">
+                          <a:solidFill>
+                            <a:srgbClr val="1B2733"/>
+                          </a:solidFill>
+                          <a:latin typeface="Calibri" pitchFamily="34" charset="0"/>
+                          <a:ea typeface="Calibri" pitchFamily="34" charset="-122"/>
+                          <a:cs typeface="Calibri" pitchFamily="34" charset="-120"/>
+                        </a:rPr>
+                        <a:t>0</a:t>
+                      </a:r>
+                      <a:endParaRPr lang="en-US" sz="1200" dirty="0">
+                        <a:latin typeface="Calibri" charset="0"/>
+                        <a:ea typeface="Calibri" charset="0"/>
+                        <a:cs typeface="Calibri" charset="0"/>
+                      </a:endParaRPr>
+                    </a:p>
+                  </a:txBody>
+                  <a:tcPr marL="25400" marR="25400" marT="12700" marB="12700">
+                    <a:lnL w="6350" cap="flat" cmpd="sng" algn="ctr">
+                      <a:solidFill>
+                        <a:srgbClr val="D5DEE5"/>
+                      </a:solidFill>
+                      <a:prstDash val="solid"/>
+                      <a:round/>
+                      <a:headEnd type="none" w="med" len="med"/>
+                      <a:tailEnd type="none" w="med" len="med"/>
+                    </a:lnL>
+                    <a:lnR w="6350" cap="flat" cmpd="sng" algn="ctr">
+                      <a:solidFill>
+                        <a:srgbClr val="D5DEE5"/>
+                      </a:solidFill>
+                      <a:prstDash val="solid"/>
+                      <a:round/>
+                      <a:headEnd type="none" w="med" len="med"/>
+                      <a:tailEnd type="none" w="med" len="med"/>
+                    </a:lnR>
+                    <a:lnT w="6350" cap="flat" cmpd="sng" algn="ctr">
+                      <a:solidFill>
+                        <a:srgbClr val="D5DEE5"/>
+                      </a:solidFill>
+                      <a:prstDash val="solid"/>
+                      <a:round/>
+                      <a:headEnd type="none" w="med" len="med"/>
+                      <a:tailEnd type="none" w="med" len="med"/>
+                    </a:lnT>
+                    <a:lnB w="6350" cap="flat" cmpd="sng" algn="ctr">
+                      <a:solidFill>
+                        <a:srgbClr val="D5DEE5"/>
+                      </a:solidFill>
+                      <a:prstDash val="solid"/>
+                      <a:round/>
+                      <a:headEnd type="none" w="med" len="med"/>
+                      <a:tailEnd type="none" w="med" len="med"/>
+                    </a:lnB>
+                    <a:solidFill>
+                      <a:srgbClr val="FFFFFF"/>
+                    </a:solidFill>
+                  </a:tcPr>
+                </a:tc>
+                <a:tc>
+                  <a:txBody>
+                    <a:bodyPr/>
+                    <a:lstStyle/>
+                    <a:p>
+                      <a:pPr algn="ctr" indent="0" marL="0">
+                        <a:buNone/>
+                      </a:pPr>
+                      <a:r>
+                        <a:rPr lang="en-US" sz="1200" dirty="0">
+                          <a:solidFill>
+                            <a:srgbClr val="1B2733"/>
+                          </a:solidFill>
+                          <a:latin typeface="Calibri" pitchFamily="34" charset="0"/>
+                          <a:ea typeface="Calibri" pitchFamily="34" charset="-122"/>
+                          <a:cs typeface="Calibri" pitchFamily="34" charset="-120"/>
+                        </a:rPr>
+                        <a:t>0</a:t>
+                      </a:r>
+                      <a:endParaRPr lang="en-US" sz="1200" dirty="0">
+                        <a:latin typeface="Calibri" charset="0"/>
+                        <a:ea typeface="Calibri" charset="0"/>
+                        <a:cs typeface="Calibri" charset="0"/>
+                      </a:endParaRPr>
+                    </a:p>
+                  </a:txBody>
+                  <a:tcPr marL="25400" marR="25400" marT="12700" marB="12700">
+                    <a:lnL w="6350" cap="flat" cmpd="sng" algn="ctr">
+                      <a:solidFill>
+                        <a:srgbClr val="D5DEE5"/>
+                      </a:solidFill>
+                      <a:prstDash val="solid"/>
+                      <a:round/>
+                      <a:headEnd type="none" w="med" len="med"/>
+                      <a:tailEnd type="none" w="med" len="med"/>
+                    </a:lnL>
+                    <a:lnR w="6350" cap="flat" cmpd="sng" algn="ctr">
+                      <a:solidFill>
+                        <a:srgbClr val="D5DEE5"/>
+                      </a:solidFill>
+                      <a:prstDash val="solid"/>
+                      <a:round/>
+                      <a:headEnd type="none" w="med" len="med"/>
+                      <a:tailEnd type="none" w="med" len="med"/>
+                    </a:lnR>
+                    <a:lnT w="6350" cap="flat" cmpd="sng" algn="ctr">
+                      <a:solidFill>
+                        <a:srgbClr val="D5DEE5"/>
+                      </a:solidFill>
+                      <a:prstDash val="solid"/>
+                      <a:round/>
+                      <a:headEnd type="none" w="med" len="med"/>
+                      <a:tailEnd type="none" w="med" len="med"/>
+                    </a:lnT>
+                    <a:lnB w="6350" cap="flat" cmpd="sng" algn="ctr">
+                      <a:solidFill>
+                        <a:srgbClr val="D5DEE5"/>
+                      </a:solidFill>
+                      <a:prstDash val="solid"/>
+                      <a:round/>
+                      <a:headEnd type="none" w="med" len="med"/>
+                      <a:tailEnd type="none" w="med" len="med"/>
+                    </a:lnB>
+                    <a:solidFill>
+                      <a:srgbClr val="FFFFFF"/>
+                    </a:solidFill>
+                  </a:tcPr>
+                </a:tc>
+                <a:tc>
+                  <a:txBody>
+                    <a:bodyPr/>
+                    <a:lstStyle/>
+                    <a:p>
+                      <a:pPr algn="ctr" indent="0" marL="0">
+                        <a:buNone/>
+                      </a:pPr>
+                      <a:r>
+                        <a:rPr lang="en-US" sz="1200" dirty="0">
+                          <a:solidFill>
+                            <a:srgbClr val="1B2733"/>
+                          </a:solidFill>
+                          <a:latin typeface="Calibri" pitchFamily="34" charset="0"/>
+                          <a:ea typeface="Calibri" pitchFamily="34" charset="-122"/>
+                          <a:cs typeface="Calibri" pitchFamily="34" charset="-120"/>
+                        </a:rPr>
+                        <a:t>0</a:t>
+                      </a:r>
+                      <a:endParaRPr lang="en-US" sz="1200" dirty="0">
+                        <a:latin typeface="Calibri" charset="0"/>
+                        <a:ea typeface="Calibri" charset="0"/>
+                        <a:cs typeface="Calibri" charset="0"/>
+                      </a:endParaRPr>
+                    </a:p>
+                  </a:txBody>
+                  <a:tcPr marL="25400" marR="25400" marT="12700" marB="12700">
+                    <a:lnL w="6350" cap="flat" cmpd="sng" algn="ctr">
+                      <a:solidFill>
+                        <a:srgbClr val="D5DEE5"/>
+                      </a:solidFill>
+                      <a:prstDash val="solid"/>
+                      <a:round/>
+                      <a:headEnd type="none" w="med" len="med"/>
+                      <a:tailEnd type="none" w="med" len="med"/>
+                    </a:lnL>
+                    <a:lnR w="6350" cap="flat" cmpd="sng" algn="ctr">
+                      <a:solidFill>
+                        <a:srgbClr val="D5DEE5"/>
+                      </a:solidFill>
+                      <a:prstDash val="solid"/>
+                      <a:round/>
+                      <a:headEnd type="none" w="med" len="med"/>
+                      <a:tailEnd type="none" w="med" len="med"/>
+                    </a:lnR>
+                    <a:lnT w="6350" cap="flat" cmpd="sng" algn="ctr">
+                      <a:solidFill>
+                        <a:srgbClr val="D5DEE5"/>
+                      </a:solidFill>
+                      <a:prstDash val="solid"/>
+                      <a:round/>
+                      <a:headEnd type="none" w="med" len="med"/>
+                      <a:tailEnd type="none" w="med" len="med"/>
+                    </a:lnT>
+                    <a:lnB w="6350" cap="flat" cmpd="sng" algn="ctr">
+                      <a:solidFill>
+                        <a:srgbClr val="D5DEE5"/>
+                      </a:solidFill>
+                      <a:prstDash val="solid"/>
+                      <a:round/>
+                      <a:headEnd type="none" w="med" len="med"/>
+                      <a:tailEnd type="none" w="med" len="med"/>
+                    </a:lnB>
+                    <a:solidFill>
+                      <a:srgbClr val="FFFFFF"/>
+                    </a:solidFill>
+                  </a:tcPr>
+                </a:tc>
+              </a:tr>
+              <a:tr h="457200">
+                <a:tc>
+                  <a:txBody>
+                    <a:bodyPr/>
+                    <a:lstStyle/>
+                    <a:p>
+                      <a:pPr indent="0" marL="0">
+                        <a:buNone/>
+                      </a:pPr>
+                      <a:r>
+                        <a:rPr lang="en-US" sz="1000" b="1" dirty="0">
+                          <a:solidFill>
+                            <a:srgbClr val="1B2733"/>
+                          </a:solidFill>
+                          <a:latin typeface="Calibri" pitchFamily="34" charset="0"/>
+                          <a:ea typeface="Calibri" pitchFamily="34" charset="-122"/>
+                          <a:cs typeface="Calibri" pitchFamily="34" charset="-120"/>
+                        </a:rPr>
+                        <a:t>DRUGCHE</a:t>
+                      </a:r>
+                      <a:endParaRPr lang="en-US" sz="1000" dirty="0">
+                        <a:latin typeface="Calibri" charset="0"/>
+                        <a:ea typeface="Calibri" charset="0"/>
+                        <a:cs typeface="Calibri" charset="0"/>
+                      </a:endParaRPr>
+                    </a:p>
+                  </a:txBody>
+                  <a:tcPr marL="25400" marR="25400" marT="12700" marB="12700">
+                    <a:lnL w="6350" cap="flat" cmpd="sng" algn="ctr">
+                      <a:solidFill>
+                        <a:srgbClr val="D5DEE5"/>
+                      </a:solidFill>
+                      <a:prstDash val="solid"/>
+                      <a:round/>
+                      <a:headEnd type="none" w="med" len="med"/>
+                      <a:tailEnd type="none" w="med" len="med"/>
+                    </a:lnL>
+                    <a:lnR w="6350" cap="flat" cmpd="sng" algn="ctr">
+                      <a:solidFill>
+                        <a:srgbClr val="D5DEE5"/>
+                      </a:solidFill>
+                      <a:prstDash val="solid"/>
+                      <a:round/>
+                      <a:headEnd type="none" w="med" len="med"/>
+                      <a:tailEnd type="none" w="med" len="med"/>
+                    </a:lnR>
+                    <a:lnT w="6350" cap="flat" cmpd="sng" algn="ctr">
+                      <a:solidFill>
+                        <a:srgbClr val="D5DEE5"/>
+                      </a:solidFill>
+                      <a:prstDash val="solid"/>
+                      <a:round/>
+                      <a:headEnd type="none" w="med" len="med"/>
+                      <a:tailEnd type="none" w="med" len="med"/>
+                    </a:lnT>
+                    <a:lnB w="6350" cap="flat" cmpd="sng" algn="ctr">
+                      <a:solidFill>
+                        <a:srgbClr val="D5DEE5"/>
+                      </a:solidFill>
+                      <a:prstDash val="solid"/>
+                      <a:round/>
+                      <a:headEnd type="none" w="med" len="med"/>
+                      <a:tailEnd type="none" w="med" len="med"/>
+                    </a:lnB>
+                    <a:solidFill>
+                      <a:srgbClr val="F7FAFB"/>
+                    </a:solidFill>
+                  </a:tcPr>
+                </a:tc>
+                <a:tc>
+                  <a:txBody>
+                    <a:bodyPr/>
+                    <a:lstStyle/>
+                    <a:p>
+                      <a:pPr algn="ctr" indent="0" marL="0">
+                        <a:buNone/>
+                      </a:pPr>
+                      <a:r>
+                        <a:rPr lang="en-US" sz="1200" dirty="0">
+                          <a:solidFill>
+                            <a:srgbClr val="1B2733"/>
+                          </a:solidFill>
+                          <a:latin typeface="Calibri" pitchFamily="34" charset="0"/>
+                          <a:ea typeface="Calibri" pitchFamily="34" charset="-122"/>
+                          <a:cs typeface="Calibri" pitchFamily="34" charset="-120"/>
+                        </a:rPr>
+                        <a:t>2</a:t>
+                      </a:r>
+                      <a:endParaRPr lang="en-US" sz="1200" dirty="0">
+                        <a:latin typeface="Calibri" charset="0"/>
+                        <a:ea typeface="Calibri" charset="0"/>
+                        <a:cs typeface="Calibri" charset="0"/>
+                      </a:endParaRPr>
+                    </a:p>
+                  </a:txBody>
+                  <a:tcPr marL="25400" marR="25400" marT="12700" marB="12700">
+                    <a:lnL w="6350" cap="flat" cmpd="sng" algn="ctr">
+                      <a:solidFill>
+                        <a:srgbClr val="D5DEE5"/>
+                      </a:solidFill>
+                      <a:prstDash val="solid"/>
+                      <a:round/>
+                      <a:headEnd type="none" w="med" len="med"/>
+                      <a:tailEnd type="none" w="med" len="med"/>
+                    </a:lnL>
+                    <a:lnR w="6350" cap="flat" cmpd="sng" algn="ctr">
+                      <a:solidFill>
+                        <a:srgbClr val="D5DEE5"/>
+                      </a:solidFill>
+                      <a:prstDash val="solid"/>
+                      <a:round/>
+                      <a:headEnd type="none" w="med" len="med"/>
+                      <a:tailEnd type="none" w="med" len="med"/>
+                    </a:lnR>
+                    <a:lnT w="6350" cap="flat" cmpd="sng" algn="ctr">
+                      <a:solidFill>
+                        <a:srgbClr val="D5DEE5"/>
+                      </a:solidFill>
+                      <a:prstDash val="solid"/>
+                      <a:round/>
+                      <a:headEnd type="none" w="med" len="med"/>
+                      <a:tailEnd type="none" w="med" len="med"/>
+                    </a:lnT>
+                    <a:lnB w="6350" cap="flat" cmpd="sng" algn="ctr">
+                      <a:solidFill>
+                        <a:srgbClr val="D5DEE5"/>
+                      </a:solidFill>
+                      <a:prstDash val="solid"/>
+                      <a:round/>
+                      <a:headEnd type="none" w="med" len="med"/>
+                      <a:tailEnd type="none" w="med" len="med"/>
+                    </a:lnB>
+                    <a:solidFill>
+                      <a:srgbClr val="FAFAFB"/>
+                    </a:solidFill>
+                  </a:tcPr>
+                </a:tc>
+                <a:tc>
+                  <a:txBody>
+                    <a:bodyPr/>
+                    <a:lstStyle/>
+                    <a:p>
+                      <a:pPr algn="ctr" indent="0" marL="0">
+                        <a:buNone/>
+                      </a:pPr>
+                      <a:r>
+                        <a:rPr lang="en-US" sz="1200" dirty="0">
+                          <a:solidFill>
+                            <a:srgbClr val="1B2733"/>
+                          </a:solidFill>
+                          <a:latin typeface="Calibri" pitchFamily="34" charset="0"/>
+                          <a:ea typeface="Calibri" pitchFamily="34" charset="-122"/>
+                          <a:cs typeface="Calibri" pitchFamily="34" charset="-120"/>
+                        </a:rPr>
+                        <a:t>1</a:t>
+                      </a:r>
+                      <a:endParaRPr lang="en-US" sz="1200" dirty="0">
+                        <a:latin typeface="Calibri" charset="0"/>
+                        <a:ea typeface="Calibri" charset="0"/>
+                        <a:cs typeface="Calibri" charset="0"/>
+                      </a:endParaRPr>
+                    </a:p>
+                  </a:txBody>
+                  <a:tcPr marL="25400" marR="25400" marT="12700" marB="12700">
+                    <a:lnL w="6350" cap="flat" cmpd="sng" algn="ctr">
+                      <a:solidFill>
+                        <a:srgbClr val="D5DEE5"/>
+                      </a:solidFill>
+                      <a:prstDash val="solid"/>
+                      <a:round/>
+                      <a:headEnd type="none" w="med" len="med"/>
+                      <a:tailEnd type="none" w="med" len="med"/>
+                    </a:lnL>
+                    <a:lnR w="6350" cap="flat" cmpd="sng" algn="ctr">
+                      <a:solidFill>
+                        <a:srgbClr val="D5DEE5"/>
+                      </a:solidFill>
+                      <a:prstDash val="solid"/>
+                      <a:round/>
+                      <a:headEnd type="none" w="med" len="med"/>
+                      <a:tailEnd type="none" w="med" len="med"/>
+                    </a:lnR>
+                    <a:lnT w="6350" cap="flat" cmpd="sng" algn="ctr">
+                      <a:solidFill>
+                        <a:srgbClr val="D5DEE5"/>
+                      </a:solidFill>
+                      <a:prstDash val="solid"/>
+                      <a:round/>
+                      <a:headEnd type="none" w="med" len="med"/>
+                      <a:tailEnd type="none" w="med" len="med"/>
+                    </a:lnT>
+                    <a:lnB w="6350" cap="flat" cmpd="sng" algn="ctr">
+                      <a:solidFill>
+                        <a:srgbClr val="D5DEE5"/>
+                      </a:solidFill>
+                      <a:prstDash val="solid"/>
+                      <a:round/>
+                      <a:headEnd type="none" w="med" len="med"/>
+                      <a:tailEnd type="none" w="med" len="med"/>
+                    </a:lnB>
+                    <a:solidFill>
+                      <a:srgbClr val="FCFCFC"/>
+                    </a:solidFill>
+                  </a:tcPr>
+                </a:tc>
+                <a:tc>
+                  <a:txBody>
+                    <a:bodyPr/>
+                    <a:lstStyle/>
+                    <a:p>
+                      <a:pPr algn="ctr" indent="0" marL="0">
+                        <a:buNone/>
+                      </a:pPr>
+                      <a:r>
+                        <a:rPr lang="en-US" sz="1200" dirty="0">
+                          <a:solidFill>
+                            <a:srgbClr val="1B2733"/>
+                          </a:solidFill>
+                          <a:latin typeface="Calibri" pitchFamily="34" charset="0"/>
+                          <a:ea typeface="Calibri" pitchFamily="34" charset="-122"/>
+                          <a:cs typeface="Calibri" pitchFamily="34" charset="-120"/>
+                        </a:rPr>
+                        <a:t>0</a:t>
+                      </a:r>
+                      <a:endParaRPr lang="en-US" sz="1200" dirty="0">
+                        <a:latin typeface="Calibri" charset="0"/>
+                        <a:ea typeface="Calibri" charset="0"/>
+                        <a:cs typeface="Calibri" charset="0"/>
+                      </a:endParaRPr>
+                    </a:p>
+                  </a:txBody>
+                  <a:tcPr marL="25400" marR="25400" marT="12700" marB="12700">
+                    <a:lnL w="6350" cap="flat" cmpd="sng" algn="ctr">
+                      <a:solidFill>
+                        <a:srgbClr val="D5DEE5"/>
+                      </a:solidFill>
+                      <a:prstDash val="solid"/>
+                      <a:round/>
+                      <a:headEnd type="none" w="med" len="med"/>
+                      <a:tailEnd type="none" w="med" len="med"/>
+                    </a:lnL>
+                    <a:lnR w="6350" cap="flat" cmpd="sng" algn="ctr">
+                      <a:solidFill>
+                        <a:srgbClr val="D5DEE5"/>
+                      </a:solidFill>
+                      <a:prstDash val="solid"/>
+                      <a:round/>
+                      <a:headEnd type="none" w="med" len="med"/>
+                      <a:tailEnd type="none" w="med" len="med"/>
+                    </a:lnR>
+                    <a:lnT w="6350" cap="flat" cmpd="sng" algn="ctr">
+                      <a:solidFill>
+                        <a:srgbClr val="D5DEE5"/>
+                      </a:solidFill>
+                      <a:prstDash val="solid"/>
+                      <a:round/>
+                      <a:headEnd type="none" w="med" len="med"/>
+                      <a:tailEnd type="none" w="med" len="med"/>
+                    </a:lnT>
+                    <a:lnB w="6350" cap="flat" cmpd="sng" algn="ctr">
+                      <a:solidFill>
+                        <a:srgbClr val="D5DEE5"/>
+                      </a:solidFill>
+                      <a:prstDash val="solid"/>
+                      <a:round/>
+                      <a:headEnd type="none" w="med" len="med"/>
+                      <a:tailEnd type="none" w="med" len="med"/>
+                    </a:lnB>
+                    <a:solidFill>
+                      <a:srgbClr val="FEFEFE"/>
+                    </a:solidFill>
+                  </a:tcPr>
+                </a:tc>
+                <a:tc>
+                  <a:txBody>
+                    <a:bodyPr/>
+                    <a:lstStyle/>
+                    <a:p>
+                      <a:pPr algn="ctr" indent="0" marL="0">
+                        <a:buNone/>
+                      </a:pPr>
+                      <a:r>
+                        <a:rPr lang="en-US" sz="1200" b="1" dirty="0">
+                          <a:solidFill>
+                            <a:srgbClr val="FFFFFF"/>
+                          </a:solidFill>
+                          <a:latin typeface="Calibri" pitchFamily="34" charset="0"/>
+                          <a:ea typeface="Calibri" pitchFamily="34" charset="-122"/>
+                          <a:cs typeface="Calibri" pitchFamily="34" charset="-120"/>
+                        </a:rPr>
+                        <a:t>91</a:t>
+                      </a:r>
+                      <a:endParaRPr lang="en-US" sz="1200" dirty="0">
+                        <a:latin typeface="Calibri" charset="0"/>
+                        <a:ea typeface="Calibri" charset="0"/>
+                        <a:cs typeface="Calibri" charset="0"/>
+                      </a:endParaRPr>
+                    </a:p>
+                  </a:txBody>
+                  <a:tcPr marL="25400" marR="25400" marT="12700" marB="12700">
+                    <a:lnL w="6350" cap="flat" cmpd="sng" algn="ctr">
+                      <a:solidFill>
+                        <a:srgbClr val="D5DEE5"/>
+                      </a:solidFill>
+                      <a:prstDash val="solid"/>
+                      <a:round/>
+                      <a:headEnd type="none" w="med" len="med"/>
+                      <a:tailEnd type="none" w="med" len="med"/>
+                    </a:lnL>
+                    <a:lnR w="6350" cap="flat" cmpd="sng" algn="ctr">
+                      <a:solidFill>
+                        <a:srgbClr val="D5DEE5"/>
+                      </a:solidFill>
+                      <a:prstDash val="solid"/>
+                      <a:round/>
+                      <a:headEnd type="none" w="med" len="med"/>
+                      <a:tailEnd type="none" w="med" len="med"/>
+                    </a:lnR>
+                    <a:lnT w="6350" cap="flat" cmpd="sng" algn="ctr">
+                      <a:solidFill>
+                        <a:srgbClr val="D5DEE5"/>
+                      </a:solidFill>
+                      <a:prstDash val="solid"/>
+                      <a:round/>
+                      <a:headEnd type="none" w="med" len="med"/>
+                      <a:tailEnd type="none" w="med" len="med"/>
+                    </a:lnT>
+                    <a:lnB w="6350" cap="flat" cmpd="sng" algn="ctr">
+                      <a:solidFill>
+                        <a:srgbClr val="D5DEE5"/>
+                      </a:solidFill>
+                      <a:prstDash val="solid"/>
+                      <a:round/>
+                      <a:headEnd type="none" w="med" len="med"/>
+                      <a:tailEnd type="none" w="med" len="med"/>
+                    </a:lnB>
+                    <a:solidFill>
+                      <a:srgbClr val="243C4E"/>
+                    </a:solidFill>
+                  </a:tcPr>
+                </a:tc>
+                <a:tc>
+                  <a:txBody>
+                    <a:bodyPr/>
+                    <a:lstStyle/>
+                    <a:p>
+                      <a:pPr algn="ctr" indent="0" marL="0">
+                        <a:buNone/>
+                      </a:pPr>
+                      <a:r>
+                        <a:rPr lang="en-US" sz="1200" dirty="0">
+                          <a:solidFill>
+                            <a:srgbClr val="1B2733"/>
+                          </a:solidFill>
+                          <a:latin typeface="Calibri" pitchFamily="34" charset="0"/>
+                          <a:ea typeface="Calibri" pitchFamily="34" charset="-122"/>
+                          <a:cs typeface="Calibri" pitchFamily="34" charset="-120"/>
+                        </a:rPr>
+                        <a:t>0</a:t>
+                      </a:r>
+                      <a:endParaRPr lang="en-US" sz="1200" dirty="0">
+                        <a:latin typeface="Calibri" charset="0"/>
+                        <a:ea typeface="Calibri" charset="0"/>
+                        <a:cs typeface="Calibri" charset="0"/>
+                      </a:endParaRPr>
+                    </a:p>
+                  </a:txBody>
+                  <a:tcPr marL="25400" marR="25400" marT="12700" marB="12700">
+                    <a:lnL w="6350" cap="flat" cmpd="sng" algn="ctr">
+                      <a:solidFill>
+                        <a:srgbClr val="D5DEE5"/>
+                      </a:solidFill>
+                      <a:prstDash val="solid"/>
+                      <a:round/>
+                      <a:headEnd type="none" w="med" len="med"/>
+                      <a:tailEnd type="none" w="med" len="med"/>
+                    </a:lnL>
+                    <a:lnR w="6350" cap="flat" cmpd="sng" algn="ctr">
+                      <a:solidFill>
+                        <a:srgbClr val="D5DEE5"/>
+                      </a:solidFill>
+                      <a:prstDash val="solid"/>
+                      <a:round/>
+                      <a:headEnd type="none" w="med" len="med"/>
+                      <a:tailEnd type="none" w="med" len="med"/>
+                    </a:lnR>
+                    <a:lnT w="6350" cap="flat" cmpd="sng" algn="ctr">
+                      <a:solidFill>
+                        <a:srgbClr val="D5DEE5"/>
+                      </a:solidFill>
+                      <a:prstDash val="solid"/>
+                      <a:round/>
+                      <a:headEnd type="none" w="med" len="med"/>
+                      <a:tailEnd type="none" w="med" len="med"/>
+                    </a:lnT>
+                    <a:lnB w="6350" cap="flat" cmpd="sng" algn="ctr">
+                      <a:solidFill>
+                        <a:srgbClr val="D5DEE5"/>
+                      </a:solidFill>
+                      <a:prstDash val="solid"/>
+                      <a:round/>
+                      <a:headEnd type="none" w="med" len="med"/>
+                      <a:tailEnd type="none" w="med" len="med"/>
+                    </a:lnB>
+                    <a:solidFill>
+                      <a:srgbClr val="FFFFFF"/>
+                    </a:solidFill>
+                  </a:tcPr>
+                </a:tc>
+                <a:tc>
+                  <a:txBody>
+                    <a:bodyPr/>
+                    <a:lstStyle/>
+                    <a:p>
+                      <a:pPr algn="ctr" indent="0" marL="0">
+                        <a:buNone/>
+                      </a:pPr>
+                      <a:r>
+                        <a:rPr lang="en-US" sz="1200" dirty="0">
+                          <a:solidFill>
+                            <a:srgbClr val="1B2733"/>
+                          </a:solidFill>
+                          <a:latin typeface="Calibri" pitchFamily="34" charset="0"/>
+                          <a:ea typeface="Calibri" pitchFamily="34" charset="-122"/>
+                          <a:cs typeface="Calibri" pitchFamily="34" charset="-120"/>
+                        </a:rPr>
+                        <a:t>1</a:t>
+                      </a:r>
+                      <a:endParaRPr lang="en-US" sz="1200" dirty="0">
+                        <a:latin typeface="Calibri" charset="0"/>
+                        <a:ea typeface="Calibri" charset="0"/>
+                        <a:cs typeface="Calibri" charset="0"/>
+                      </a:endParaRPr>
+                    </a:p>
+                  </a:txBody>
+                  <a:tcPr marL="25400" marR="25400" marT="12700" marB="12700">
+                    <a:lnL w="6350" cap="flat" cmpd="sng" algn="ctr">
+                      <a:solidFill>
+                        <a:srgbClr val="D5DEE5"/>
+                      </a:solidFill>
+                      <a:prstDash val="solid"/>
+                      <a:round/>
+                      <a:headEnd type="none" w="med" len="med"/>
+                      <a:tailEnd type="none" w="med" len="med"/>
+                    </a:lnL>
+                    <a:lnR w="6350" cap="flat" cmpd="sng" algn="ctr">
+                      <a:solidFill>
+                        <a:srgbClr val="D5DEE5"/>
+                      </a:solidFill>
+                      <a:prstDash val="solid"/>
+                      <a:round/>
+                      <a:headEnd type="none" w="med" len="med"/>
+                      <a:tailEnd type="none" w="med" len="med"/>
+                    </a:lnR>
+                    <a:lnT w="6350" cap="flat" cmpd="sng" algn="ctr">
+                      <a:solidFill>
+                        <a:srgbClr val="D5DEE5"/>
+                      </a:solidFill>
+                      <a:prstDash val="solid"/>
+                      <a:round/>
+                      <a:headEnd type="none" w="med" len="med"/>
+                      <a:tailEnd type="none" w="med" len="med"/>
+                    </a:lnT>
+                    <a:lnB w="6350" cap="flat" cmpd="sng" algn="ctr">
+                      <a:solidFill>
+                        <a:srgbClr val="D5DEE5"/>
+                      </a:solidFill>
+                      <a:prstDash val="solid"/>
+                      <a:round/>
+                      <a:headEnd type="none" w="med" len="med"/>
+                      <a:tailEnd type="none" w="med" len="med"/>
+                    </a:lnB>
+                    <a:solidFill>
+                      <a:srgbClr val="FDFDFE"/>
+                    </a:solidFill>
+                  </a:tcPr>
+                </a:tc>
+                <a:tc>
+                  <a:txBody>
+                    <a:bodyPr/>
+                    <a:lstStyle/>
+                    <a:p>
+                      <a:pPr algn="ctr" indent="0" marL="0">
+                        <a:buNone/>
+                      </a:pPr>
+                      <a:r>
+                        <a:rPr lang="en-US" sz="1200" dirty="0">
+                          <a:solidFill>
+                            <a:srgbClr val="1B2733"/>
+                          </a:solidFill>
+                          <a:latin typeface="Calibri" pitchFamily="34" charset="0"/>
+                          <a:ea typeface="Calibri" pitchFamily="34" charset="-122"/>
+                          <a:cs typeface="Calibri" pitchFamily="34" charset="-120"/>
+                        </a:rPr>
+                        <a:t>0</a:t>
+                      </a:r>
+                      <a:endParaRPr lang="en-US" sz="1200" dirty="0">
+                        <a:latin typeface="Calibri" charset="0"/>
+                        <a:ea typeface="Calibri" charset="0"/>
+                        <a:cs typeface="Calibri" charset="0"/>
+                      </a:endParaRPr>
+                    </a:p>
+                  </a:txBody>
+                  <a:tcPr marL="25400" marR="25400" marT="12700" marB="12700">
+                    <a:lnL w="6350" cap="flat" cmpd="sng" algn="ctr">
+                      <a:solidFill>
+                        <a:srgbClr val="D5DEE5"/>
+                      </a:solidFill>
+                      <a:prstDash val="solid"/>
+                      <a:round/>
+                      <a:headEnd type="none" w="med" len="med"/>
+                      <a:tailEnd type="none" w="med" len="med"/>
+                    </a:lnL>
+                    <a:lnR w="6350" cap="flat" cmpd="sng" algn="ctr">
+                      <a:solidFill>
+                        <a:srgbClr val="D5DEE5"/>
+                      </a:solidFill>
+                      <a:prstDash val="solid"/>
+                      <a:round/>
+                      <a:headEnd type="none" w="med" len="med"/>
+                      <a:tailEnd type="none" w="med" len="med"/>
+                    </a:lnR>
+                    <a:lnT w="6350" cap="flat" cmpd="sng" algn="ctr">
+                      <a:solidFill>
+                        <a:srgbClr val="D5DEE5"/>
+                      </a:solidFill>
+                      <a:prstDash val="solid"/>
+                      <a:round/>
+                      <a:headEnd type="none" w="med" len="med"/>
+                      <a:tailEnd type="none" w="med" len="med"/>
+                    </a:lnT>
+                    <a:lnB w="6350" cap="flat" cmpd="sng" algn="ctr">
+                      <a:solidFill>
+                        <a:srgbClr val="D5DEE5"/>
+                      </a:solidFill>
+                      <a:prstDash val="solid"/>
+                      <a:round/>
+                      <a:headEnd type="none" w="med" len="med"/>
+                      <a:tailEnd type="none" w="med" len="med"/>
+                    </a:lnB>
+                    <a:solidFill>
+                      <a:srgbClr val="FFFFFF"/>
+                    </a:solidFill>
+                  </a:tcPr>
+                </a:tc>
+                <a:tc>
+                  <a:txBody>
+                    <a:bodyPr/>
+                    <a:lstStyle/>
+                    <a:p>
+                      <a:pPr algn="ctr" indent="0" marL="0">
+                        <a:buNone/>
+                      </a:pPr>
+                      <a:r>
+                        <a:rPr lang="en-US" sz="1200" dirty="0">
+                          <a:solidFill>
+                            <a:srgbClr val="1B2733"/>
+                          </a:solidFill>
+                          <a:latin typeface="Calibri" pitchFamily="34" charset="0"/>
+                          <a:ea typeface="Calibri" pitchFamily="34" charset="-122"/>
+                          <a:cs typeface="Calibri" pitchFamily="34" charset="-120"/>
+                        </a:rPr>
+                        <a:t>0</a:t>
+                      </a:r>
+                      <a:endParaRPr lang="en-US" sz="1200" dirty="0">
+                        <a:latin typeface="Calibri" charset="0"/>
+                        <a:ea typeface="Calibri" charset="0"/>
+                        <a:cs typeface="Calibri" charset="0"/>
+                      </a:endParaRPr>
+                    </a:p>
+                  </a:txBody>
+                  <a:tcPr marL="25400" marR="25400" marT="12700" marB="12700">
+                    <a:lnL w="6350" cap="flat" cmpd="sng" algn="ctr">
+                      <a:solidFill>
+                        <a:srgbClr val="D5DEE5"/>
+                      </a:solidFill>
+                      <a:prstDash val="solid"/>
+                      <a:round/>
+                      <a:headEnd type="none" w="med" len="med"/>
+                      <a:tailEnd type="none" w="med" len="med"/>
+                    </a:lnL>
+                    <a:lnR w="6350" cap="flat" cmpd="sng" algn="ctr">
+                      <a:solidFill>
+                        <a:srgbClr val="D5DEE5"/>
+                      </a:solidFill>
+                      <a:prstDash val="solid"/>
+                      <a:round/>
+                      <a:headEnd type="none" w="med" len="med"/>
+                      <a:tailEnd type="none" w="med" len="med"/>
+                    </a:lnR>
+                    <a:lnT w="6350" cap="flat" cmpd="sng" algn="ctr">
+                      <a:solidFill>
+                        <a:srgbClr val="D5DEE5"/>
+                      </a:solidFill>
+                      <a:prstDash val="solid"/>
+                      <a:round/>
+                      <a:headEnd type="none" w="med" len="med"/>
+                      <a:tailEnd type="none" w="med" len="med"/>
+                    </a:lnT>
+                    <a:lnB w="6350" cap="flat" cmpd="sng" algn="ctr">
+                      <a:solidFill>
+                        <a:srgbClr val="D5DEE5"/>
+                      </a:solidFill>
+                      <a:prstDash val="solid"/>
+                      <a:round/>
+                      <a:headEnd type="none" w="med" len="med"/>
+                      <a:tailEnd type="none" w="med" len="med"/>
+                    </a:lnB>
+                    <a:solidFill>
+                      <a:srgbClr val="FFFFFF"/>
+                    </a:solidFill>
+                  </a:tcPr>
+                </a:tc>
+              </a:tr>
+              <a:tr h="457200">
+                <a:tc>
+                  <a:txBody>
+                    <a:bodyPr/>
+                    <a:lstStyle/>
+                    <a:p>
+                      <a:pPr indent="0" marL="0">
+                        <a:buNone/>
+                      </a:pPr>
+                      <a:r>
+                        <a:rPr lang="en-US" sz="1000" b="1" dirty="0">
+                          <a:solidFill>
+                            <a:srgbClr val="1B2733"/>
+                          </a:solidFill>
+                          <a:latin typeface="Calibri" pitchFamily="34" charset="0"/>
+                          <a:ea typeface="Calibri" pitchFamily="34" charset="-122"/>
+                          <a:cs typeface="Calibri" pitchFamily="34" charset="-120"/>
+                        </a:rPr>
+                        <a:t>DATETIM</a:t>
+                      </a:r>
+                      <a:endParaRPr lang="en-US" sz="1000" dirty="0">
+                        <a:latin typeface="Calibri" charset="0"/>
+                        <a:ea typeface="Calibri" charset="0"/>
+                        <a:cs typeface="Calibri" charset="0"/>
+                      </a:endParaRPr>
+                    </a:p>
+                  </a:txBody>
+                  <a:tcPr marL="25400" marR="25400" marT="12700" marB="12700">
+                    <a:lnL w="6350" cap="flat" cmpd="sng" algn="ctr">
+                      <a:solidFill>
+                        <a:srgbClr val="D5DEE5"/>
+                      </a:solidFill>
+                      <a:prstDash val="solid"/>
+                      <a:round/>
+                      <a:headEnd type="none" w="med" len="med"/>
+                      <a:tailEnd type="none" w="med" len="med"/>
+                    </a:lnL>
+                    <a:lnR w="6350" cap="flat" cmpd="sng" algn="ctr">
+                      <a:solidFill>
+                        <a:srgbClr val="D5DEE5"/>
+                      </a:solidFill>
+                      <a:prstDash val="solid"/>
+                      <a:round/>
+                      <a:headEnd type="none" w="med" len="med"/>
+                      <a:tailEnd type="none" w="med" len="med"/>
+                    </a:lnR>
+                    <a:lnT w="6350" cap="flat" cmpd="sng" algn="ctr">
+                      <a:solidFill>
+                        <a:srgbClr val="D5DEE5"/>
+                      </a:solidFill>
+                      <a:prstDash val="solid"/>
+                      <a:round/>
+                      <a:headEnd type="none" w="med" len="med"/>
+                      <a:tailEnd type="none" w="med" len="med"/>
+                    </a:lnT>
+                    <a:lnB w="6350" cap="flat" cmpd="sng" algn="ctr">
+                      <a:solidFill>
+                        <a:srgbClr val="D5DEE5"/>
+                      </a:solidFill>
+                      <a:prstDash val="solid"/>
+                      <a:round/>
+                      <a:headEnd type="none" w="med" len="med"/>
+                      <a:tailEnd type="none" w="med" len="med"/>
+                    </a:lnB>
+                    <a:solidFill>
+                      <a:srgbClr val="F7FAFB"/>
+                    </a:solidFill>
+                  </a:tcPr>
+                </a:tc>
+                <a:tc>
+                  <a:txBody>
+                    <a:bodyPr/>
+                    <a:lstStyle/>
+                    <a:p>
+                      <a:pPr algn="ctr" indent="0" marL="0">
+                        <a:buNone/>
+                      </a:pPr>
+                      <a:r>
+                        <a:rPr lang="en-US" sz="1200" dirty="0">
+                          <a:solidFill>
+                            <a:srgbClr val="1B2733"/>
+                          </a:solidFill>
+                          <a:latin typeface="Calibri" pitchFamily="34" charset="0"/>
+                          <a:ea typeface="Calibri" pitchFamily="34" charset="-122"/>
+                          <a:cs typeface="Calibri" pitchFamily="34" charset="-120"/>
+                        </a:rPr>
+                        <a:t>14</a:t>
+                      </a:r>
+                      <a:endParaRPr lang="en-US" sz="1200" dirty="0">
+                        <a:latin typeface="Calibri" charset="0"/>
+                        <a:ea typeface="Calibri" charset="0"/>
+                        <a:cs typeface="Calibri" charset="0"/>
+                      </a:endParaRPr>
+                    </a:p>
+                  </a:txBody>
+                  <a:tcPr marL="25400" marR="25400" marT="12700" marB="12700">
+                    <a:lnL w="6350" cap="flat" cmpd="sng" algn="ctr">
+                      <a:solidFill>
+                        <a:srgbClr val="D5DEE5"/>
+                      </a:solidFill>
+                      <a:prstDash val="solid"/>
+                      <a:round/>
+                      <a:headEnd type="none" w="med" len="med"/>
+                      <a:tailEnd type="none" w="med" len="med"/>
+                    </a:lnL>
+                    <a:lnR w="6350" cap="flat" cmpd="sng" algn="ctr">
+                      <a:solidFill>
+                        <a:srgbClr val="D5DEE5"/>
+                      </a:solidFill>
+                      <a:prstDash val="solid"/>
+                      <a:round/>
+                      <a:headEnd type="none" w="med" len="med"/>
+                      <a:tailEnd type="none" w="med" len="med"/>
+                    </a:lnR>
+                    <a:lnT w="6350" cap="flat" cmpd="sng" algn="ctr">
+                      <a:solidFill>
+                        <a:srgbClr val="D5DEE5"/>
+                      </a:solidFill>
+                      <a:prstDash val="solid"/>
+                      <a:round/>
+                      <a:headEnd type="none" w="med" len="med"/>
+                      <a:tailEnd type="none" w="med" len="med"/>
+                    </a:lnT>
+                    <a:lnB w="6350" cap="flat" cmpd="sng" algn="ctr">
+                      <a:solidFill>
+                        <a:srgbClr val="D5DEE5"/>
+                      </a:solidFill>
+                      <a:prstDash val="solid"/>
+                      <a:round/>
+                      <a:headEnd type="none" w="med" len="med"/>
+                      <a:tailEnd type="none" w="med" len="med"/>
+                    </a:lnB>
+                    <a:solidFill>
+                      <a:srgbClr val="DCE0E3"/>
+                    </a:solidFill>
+                  </a:tcPr>
+                </a:tc>
+                <a:tc>
+                  <a:txBody>
+                    <a:bodyPr/>
+                    <a:lstStyle/>
+                    <a:p>
+                      <a:pPr algn="ctr" indent="0" marL="0">
+                        <a:buNone/>
+                      </a:pPr>
+                      <a:r>
+                        <a:rPr lang="en-US" sz="1200" dirty="0">
+                          <a:solidFill>
+                            <a:srgbClr val="1B2733"/>
+                          </a:solidFill>
+                          <a:latin typeface="Calibri" pitchFamily="34" charset="0"/>
+                          <a:ea typeface="Calibri" pitchFamily="34" charset="-122"/>
+                          <a:cs typeface="Calibri" pitchFamily="34" charset="-120"/>
+                        </a:rPr>
+                        <a:t>0</a:t>
+                      </a:r>
+                      <a:endParaRPr lang="en-US" sz="1200" dirty="0">
+                        <a:latin typeface="Calibri" charset="0"/>
+                        <a:ea typeface="Calibri" charset="0"/>
+                        <a:cs typeface="Calibri" charset="0"/>
+                      </a:endParaRPr>
+                    </a:p>
+                  </a:txBody>
+                  <a:tcPr marL="25400" marR="25400" marT="12700" marB="12700">
+                    <a:lnL w="6350" cap="flat" cmpd="sng" algn="ctr">
+                      <a:solidFill>
+                        <a:srgbClr val="D5DEE5"/>
+                      </a:solidFill>
+                      <a:prstDash val="solid"/>
+                      <a:round/>
+                      <a:headEnd type="none" w="med" len="med"/>
+                      <a:tailEnd type="none" w="med" len="med"/>
+                    </a:lnL>
+                    <a:lnR w="6350" cap="flat" cmpd="sng" algn="ctr">
+                      <a:solidFill>
+                        <a:srgbClr val="D5DEE5"/>
+                      </a:solidFill>
+                      <a:prstDash val="solid"/>
+                      <a:round/>
+                      <a:headEnd type="none" w="med" len="med"/>
+                      <a:tailEnd type="none" w="med" len="med"/>
+                    </a:lnR>
+                    <a:lnT w="6350" cap="flat" cmpd="sng" algn="ctr">
+                      <a:solidFill>
+                        <a:srgbClr val="D5DEE5"/>
+                      </a:solidFill>
+                      <a:prstDash val="solid"/>
+                      <a:round/>
+                      <a:headEnd type="none" w="med" len="med"/>
+                      <a:tailEnd type="none" w="med" len="med"/>
+                    </a:lnT>
+                    <a:lnB w="6350" cap="flat" cmpd="sng" algn="ctr">
+                      <a:solidFill>
+                        <a:srgbClr val="D5DEE5"/>
+                      </a:solidFill>
+                      <a:prstDash val="solid"/>
+                      <a:round/>
+                      <a:headEnd type="none" w="med" len="med"/>
+                      <a:tailEnd type="none" w="med" len="med"/>
+                    </a:lnB>
+                    <a:solidFill>
+                      <a:srgbClr val="FFFFFF"/>
+                    </a:solidFill>
+                  </a:tcPr>
+                </a:tc>
+                <a:tc>
+                  <a:txBody>
+                    <a:bodyPr/>
+                    <a:lstStyle/>
+                    <a:p>
+                      <a:pPr algn="ctr" indent="0" marL="0">
+                        <a:buNone/>
+                      </a:pPr>
+                      <a:r>
+                        <a:rPr lang="en-US" sz="1200" dirty="0">
+                          <a:solidFill>
+                            <a:srgbClr val="1B2733"/>
+                          </a:solidFill>
+                          <a:latin typeface="Calibri" pitchFamily="34" charset="0"/>
+                          <a:ea typeface="Calibri" pitchFamily="34" charset="-122"/>
+                          <a:cs typeface="Calibri" pitchFamily="34" charset="-120"/>
+                        </a:rPr>
+                        <a:t>0</a:t>
+                      </a:r>
+                      <a:endParaRPr lang="en-US" sz="1200" dirty="0">
+                        <a:latin typeface="Calibri" charset="0"/>
+                        <a:ea typeface="Calibri" charset="0"/>
+                        <a:cs typeface="Calibri" charset="0"/>
+                      </a:endParaRPr>
+                    </a:p>
+                  </a:txBody>
+                  <a:tcPr marL="25400" marR="25400" marT="12700" marB="12700">
+                    <a:lnL w="6350" cap="flat" cmpd="sng" algn="ctr">
+                      <a:solidFill>
+                        <a:srgbClr val="D5DEE5"/>
+                      </a:solidFill>
+                      <a:prstDash val="solid"/>
+                      <a:round/>
+                      <a:headEnd type="none" w="med" len="med"/>
+                      <a:tailEnd type="none" w="med" len="med"/>
+                    </a:lnL>
+                    <a:lnR w="6350" cap="flat" cmpd="sng" algn="ctr">
+                      <a:solidFill>
+                        <a:srgbClr val="D5DEE5"/>
+                      </a:solidFill>
+                      <a:prstDash val="solid"/>
+                      <a:round/>
+                      <a:headEnd type="none" w="med" len="med"/>
+                      <a:tailEnd type="none" w="med" len="med"/>
+                    </a:lnR>
+                    <a:lnT w="6350" cap="flat" cmpd="sng" algn="ctr">
+                      <a:solidFill>
+                        <a:srgbClr val="D5DEE5"/>
+                      </a:solidFill>
+                      <a:prstDash val="solid"/>
+                      <a:round/>
+                      <a:headEnd type="none" w="med" len="med"/>
+                      <a:tailEnd type="none" w="med" len="med"/>
+                    </a:lnT>
+                    <a:lnB w="6350" cap="flat" cmpd="sng" algn="ctr">
+                      <a:solidFill>
+                        <a:srgbClr val="D5DEE5"/>
+                      </a:solidFill>
+                      <a:prstDash val="solid"/>
+                      <a:round/>
+                      <a:headEnd type="none" w="med" len="med"/>
+                      <a:tailEnd type="none" w="med" len="med"/>
+                    </a:lnB>
+                    <a:solidFill>
+                      <a:srgbClr val="FEFEFE"/>
+                    </a:solidFill>
+                  </a:tcPr>
+                </a:tc>
+                <a:tc>
+                  <a:txBody>
+                    <a:bodyPr/>
+                    <a:lstStyle/>
+                    <a:p>
+                      <a:pPr algn="ctr" indent="0" marL="0">
+                        <a:buNone/>
+                      </a:pPr>
+                      <a:r>
+                        <a:rPr lang="en-US" sz="1200" dirty="0">
+                          <a:solidFill>
+                            <a:srgbClr val="1B2733"/>
+                          </a:solidFill>
+                          <a:latin typeface="Calibri" pitchFamily="34" charset="0"/>
+                          <a:ea typeface="Calibri" pitchFamily="34" charset="-122"/>
+                          <a:cs typeface="Calibri" pitchFamily="34" charset="-120"/>
+                        </a:rPr>
+                        <a:t>0</a:t>
+                      </a:r>
+                      <a:endParaRPr lang="en-US" sz="1200" dirty="0">
+                        <a:latin typeface="Calibri" charset="0"/>
+                        <a:ea typeface="Calibri" charset="0"/>
+                        <a:cs typeface="Calibri" charset="0"/>
+                      </a:endParaRPr>
+                    </a:p>
+                  </a:txBody>
+                  <a:tcPr marL="25400" marR="25400" marT="12700" marB="12700">
+                    <a:lnL w="6350" cap="flat" cmpd="sng" algn="ctr">
+                      <a:solidFill>
+                        <a:srgbClr val="D5DEE5"/>
+                      </a:solidFill>
+                      <a:prstDash val="solid"/>
+                      <a:round/>
+                      <a:headEnd type="none" w="med" len="med"/>
+                      <a:tailEnd type="none" w="med" len="med"/>
+                    </a:lnL>
+                    <a:lnR w="6350" cap="flat" cmpd="sng" algn="ctr">
+                      <a:solidFill>
+                        <a:srgbClr val="D5DEE5"/>
+                      </a:solidFill>
+                      <a:prstDash val="solid"/>
+                      <a:round/>
+                      <a:headEnd type="none" w="med" len="med"/>
+                      <a:tailEnd type="none" w="med" len="med"/>
+                    </a:lnR>
+                    <a:lnT w="6350" cap="flat" cmpd="sng" algn="ctr">
+                      <a:solidFill>
+                        <a:srgbClr val="D5DEE5"/>
+                      </a:solidFill>
+                      <a:prstDash val="solid"/>
+                      <a:round/>
+                      <a:headEnd type="none" w="med" len="med"/>
+                      <a:tailEnd type="none" w="med" len="med"/>
+                    </a:lnT>
+                    <a:lnB w="6350" cap="flat" cmpd="sng" algn="ctr">
+                      <a:solidFill>
+                        <a:srgbClr val="D5DEE5"/>
+                      </a:solidFill>
+                      <a:prstDash val="solid"/>
+                      <a:round/>
+                      <a:headEnd type="none" w="med" len="med"/>
+                      <a:tailEnd type="none" w="med" len="med"/>
+                    </a:lnB>
+                    <a:solidFill>
+                      <a:srgbClr val="FFFFFF"/>
+                    </a:solidFill>
+                  </a:tcPr>
+                </a:tc>
+                <a:tc>
+                  <a:txBody>
+                    <a:bodyPr/>
+                    <a:lstStyle/>
+                    <a:p>
+                      <a:pPr algn="ctr" indent="0" marL="0">
+                        <a:buNone/>
+                      </a:pPr>
+                      <a:r>
+                        <a:rPr lang="en-US" sz="1200" b="1" dirty="0">
+                          <a:solidFill>
+                            <a:srgbClr val="FFFFFF"/>
+                          </a:solidFill>
+                          <a:latin typeface="Calibri" pitchFamily="34" charset="0"/>
+                          <a:ea typeface="Calibri" pitchFamily="34" charset="-122"/>
+                          <a:cs typeface="Calibri" pitchFamily="34" charset="-120"/>
+                        </a:rPr>
+                        <a:t>82</a:t>
+                      </a:r>
+                      <a:endParaRPr lang="en-US" sz="1200" dirty="0">
+                        <a:latin typeface="Calibri" charset="0"/>
+                        <a:ea typeface="Calibri" charset="0"/>
+                        <a:cs typeface="Calibri" charset="0"/>
+                      </a:endParaRPr>
+                    </a:p>
+                  </a:txBody>
+                  <a:tcPr marL="25400" marR="25400" marT="12700" marB="12700">
+                    <a:lnL w="6350" cap="flat" cmpd="sng" algn="ctr">
+                      <a:solidFill>
+                        <a:srgbClr val="D5DEE5"/>
+                      </a:solidFill>
+                      <a:prstDash val="solid"/>
+                      <a:round/>
+                      <a:headEnd type="none" w="med" len="med"/>
+                      <a:tailEnd type="none" w="med" len="med"/>
+                    </a:lnL>
+                    <a:lnR w="6350" cap="flat" cmpd="sng" algn="ctr">
+                      <a:solidFill>
+                        <a:srgbClr val="D5DEE5"/>
+                      </a:solidFill>
+                      <a:prstDash val="solid"/>
+                      <a:round/>
+                      <a:headEnd type="none" w="med" len="med"/>
+                      <a:tailEnd type="none" w="med" len="med"/>
+                    </a:lnR>
+                    <a:lnT w="6350" cap="flat" cmpd="sng" algn="ctr">
+                      <a:solidFill>
+                        <a:srgbClr val="D5DEE5"/>
+                      </a:solidFill>
+                      <a:prstDash val="solid"/>
+                      <a:round/>
+                      <a:headEnd type="none" w="med" len="med"/>
+                      <a:tailEnd type="none" w="med" len="med"/>
+                    </a:lnT>
+                    <a:lnB w="6350" cap="flat" cmpd="sng" algn="ctr">
+                      <a:solidFill>
+                        <a:srgbClr val="D5DEE5"/>
+                      </a:solidFill>
+                      <a:prstDash val="solid"/>
+                      <a:round/>
+                      <a:headEnd type="none" w="med" len="med"/>
+                      <a:tailEnd type="none" w="med" len="med"/>
+                    </a:lnB>
+                    <a:solidFill>
+                      <a:srgbClr val="394F5F"/>
+                    </a:solidFill>
+                  </a:tcPr>
+                </a:tc>
+                <a:tc>
+                  <a:txBody>
+                    <a:bodyPr/>
+                    <a:lstStyle/>
+                    <a:p>
+                      <a:pPr algn="ctr" indent="0" marL="0">
+                        <a:buNone/>
+                      </a:pPr>
+                      <a:r>
+                        <a:rPr lang="en-US" sz="1200" dirty="0">
+                          <a:solidFill>
+                            <a:srgbClr val="1B2733"/>
+                          </a:solidFill>
+                          <a:latin typeface="Calibri" pitchFamily="34" charset="0"/>
+                          <a:ea typeface="Calibri" pitchFamily="34" charset="-122"/>
+                          <a:cs typeface="Calibri" pitchFamily="34" charset="-120"/>
+                        </a:rPr>
+                        <a:t>0</a:t>
+                      </a:r>
+                      <a:endParaRPr lang="en-US" sz="1200" dirty="0">
+                        <a:latin typeface="Calibri" charset="0"/>
+                        <a:ea typeface="Calibri" charset="0"/>
+                        <a:cs typeface="Calibri" charset="0"/>
+                      </a:endParaRPr>
+                    </a:p>
+                  </a:txBody>
+                  <a:tcPr marL="25400" marR="25400" marT="12700" marB="12700">
+                    <a:lnL w="6350" cap="flat" cmpd="sng" algn="ctr">
+                      <a:solidFill>
+                        <a:srgbClr val="D5DEE5"/>
+                      </a:solidFill>
+                      <a:prstDash val="solid"/>
+                      <a:round/>
+                      <a:headEnd type="none" w="med" len="med"/>
+                      <a:tailEnd type="none" w="med" len="med"/>
+                    </a:lnL>
+                    <a:lnR w="6350" cap="flat" cmpd="sng" algn="ctr">
+                      <a:solidFill>
+                        <a:srgbClr val="D5DEE5"/>
+                      </a:solidFill>
+                      <a:prstDash val="solid"/>
+                      <a:round/>
+                      <a:headEnd type="none" w="med" len="med"/>
+                      <a:tailEnd type="none" w="med" len="med"/>
+                    </a:lnR>
+                    <a:lnT w="6350" cap="flat" cmpd="sng" algn="ctr">
+                      <a:solidFill>
+                        <a:srgbClr val="D5DEE5"/>
+                      </a:solidFill>
+                      <a:prstDash val="solid"/>
+                      <a:round/>
+                      <a:headEnd type="none" w="med" len="med"/>
+                      <a:tailEnd type="none" w="med" len="med"/>
+                    </a:lnT>
+                    <a:lnB w="6350" cap="flat" cmpd="sng" algn="ctr">
+                      <a:solidFill>
+                        <a:srgbClr val="D5DEE5"/>
+                      </a:solidFill>
+                      <a:prstDash val="solid"/>
+                      <a:round/>
+                      <a:headEnd type="none" w="med" len="med"/>
+                      <a:tailEnd type="none" w="med" len="med"/>
+                    </a:lnB>
+                    <a:solidFill>
+                      <a:srgbClr val="FFFFFF"/>
+                    </a:solidFill>
+                  </a:tcPr>
+                </a:tc>
+                <a:tc>
+                  <a:txBody>
+                    <a:bodyPr/>
+                    <a:lstStyle/>
+                    <a:p>
+                      <a:pPr algn="ctr" indent="0" marL="0">
+                        <a:buNone/>
+                      </a:pPr>
+                      <a:r>
+                        <a:rPr lang="en-US" sz="1200" dirty="0">
+                          <a:solidFill>
+                            <a:srgbClr val="1B2733"/>
+                          </a:solidFill>
+                          <a:latin typeface="Calibri" pitchFamily="34" charset="0"/>
+                          <a:ea typeface="Calibri" pitchFamily="34" charset="-122"/>
+                          <a:cs typeface="Calibri" pitchFamily="34" charset="-120"/>
+                        </a:rPr>
+                        <a:t>1</a:t>
+                      </a:r>
+                      <a:endParaRPr lang="en-US" sz="1200" dirty="0">
+                        <a:latin typeface="Calibri" charset="0"/>
+                        <a:ea typeface="Calibri" charset="0"/>
+                        <a:cs typeface="Calibri" charset="0"/>
+                      </a:endParaRPr>
+                    </a:p>
+                  </a:txBody>
+                  <a:tcPr marL="25400" marR="25400" marT="12700" marB="12700">
+                    <a:lnL w="6350" cap="flat" cmpd="sng" algn="ctr">
+                      <a:solidFill>
+                        <a:srgbClr val="D5DEE5"/>
+                      </a:solidFill>
+                      <a:prstDash val="solid"/>
+                      <a:round/>
+                      <a:headEnd type="none" w="med" len="med"/>
+                      <a:tailEnd type="none" w="med" len="med"/>
+                    </a:lnL>
+                    <a:lnR w="6350" cap="flat" cmpd="sng" algn="ctr">
+                      <a:solidFill>
+                        <a:srgbClr val="D5DEE5"/>
+                      </a:solidFill>
+                      <a:prstDash val="solid"/>
+                      <a:round/>
+                      <a:headEnd type="none" w="med" len="med"/>
+                      <a:tailEnd type="none" w="med" len="med"/>
+                    </a:lnR>
+                    <a:lnT w="6350" cap="flat" cmpd="sng" algn="ctr">
+                      <a:solidFill>
+                        <a:srgbClr val="D5DEE5"/>
+                      </a:solidFill>
+                      <a:prstDash val="solid"/>
+                      <a:round/>
+                      <a:headEnd type="none" w="med" len="med"/>
+                      <a:tailEnd type="none" w="med" len="med"/>
+                    </a:lnT>
+                    <a:lnB w="6350" cap="flat" cmpd="sng" algn="ctr">
+                      <a:solidFill>
+                        <a:srgbClr val="D5DEE5"/>
+                      </a:solidFill>
+                      <a:prstDash val="solid"/>
+                      <a:round/>
+                      <a:headEnd type="none" w="med" len="med"/>
+                      <a:tailEnd type="none" w="med" len="med"/>
+                    </a:lnB>
+                    <a:solidFill>
+                      <a:srgbClr val="FDFDFE"/>
+                    </a:solidFill>
+                  </a:tcPr>
+                </a:tc>
+                <a:tc>
+                  <a:txBody>
+                    <a:bodyPr/>
+                    <a:lstStyle/>
+                    <a:p>
+                      <a:pPr algn="ctr" indent="0" marL="0">
+                        <a:buNone/>
+                      </a:pPr>
+                      <a:r>
+                        <a:rPr lang="en-US" sz="1200" dirty="0">
+                          <a:solidFill>
+                            <a:srgbClr val="1B2733"/>
+                          </a:solidFill>
+                          <a:latin typeface="Calibri" pitchFamily="34" charset="0"/>
+                          <a:ea typeface="Calibri" pitchFamily="34" charset="-122"/>
+                          <a:cs typeface="Calibri" pitchFamily="34" charset="-120"/>
+                        </a:rPr>
+                        <a:t>0</a:t>
+                      </a:r>
+                      <a:endParaRPr lang="en-US" sz="1200" dirty="0">
+                        <a:latin typeface="Calibri" charset="0"/>
+                        <a:ea typeface="Calibri" charset="0"/>
+                        <a:cs typeface="Calibri" charset="0"/>
+                      </a:endParaRPr>
+                    </a:p>
+                  </a:txBody>
+                  <a:tcPr marL="25400" marR="25400" marT="12700" marB="12700">
+                    <a:lnL w="6350" cap="flat" cmpd="sng" algn="ctr">
+                      <a:solidFill>
+                        <a:srgbClr val="D5DEE5"/>
+                      </a:solidFill>
+                      <a:prstDash val="solid"/>
+                      <a:round/>
+                      <a:headEnd type="none" w="med" len="med"/>
+                      <a:tailEnd type="none" w="med" len="med"/>
+                    </a:lnL>
+                    <a:lnR w="6350" cap="flat" cmpd="sng" algn="ctr">
+                      <a:solidFill>
+                        <a:srgbClr val="D5DEE5"/>
+                      </a:solidFill>
+                      <a:prstDash val="solid"/>
+                      <a:round/>
+                      <a:headEnd type="none" w="med" len="med"/>
+                      <a:tailEnd type="none" w="med" len="med"/>
+                    </a:lnR>
+                    <a:lnT w="6350" cap="flat" cmpd="sng" algn="ctr">
+                      <a:solidFill>
+                        <a:srgbClr val="D5DEE5"/>
+                      </a:solidFill>
+                      <a:prstDash val="solid"/>
+                      <a:round/>
+                      <a:headEnd type="none" w="med" len="med"/>
+                      <a:tailEnd type="none" w="med" len="med"/>
+                    </a:lnT>
+                    <a:lnB w="6350" cap="flat" cmpd="sng" algn="ctr">
+                      <a:solidFill>
+                        <a:srgbClr val="D5DEE5"/>
+                      </a:solidFill>
+                      <a:prstDash val="solid"/>
+                      <a:round/>
+                      <a:headEnd type="none" w="med" len="med"/>
+                      <a:tailEnd type="none" w="med" len="med"/>
+                    </a:lnB>
+                    <a:solidFill>
+                      <a:srgbClr val="FFFFFF"/>
+                    </a:solidFill>
+                  </a:tcPr>
+                </a:tc>
+              </a:tr>
+              <a:tr h="457200">
+                <a:tc>
+                  <a:txBody>
+                    <a:bodyPr/>
+                    <a:lstStyle/>
+                    <a:p>
+                      <a:pPr indent="0" marL="0">
+                        <a:buNone/>
+                      </a:pPr>
+                      <a:r>
+                        <a:rPr lang="en-US" sz="1000" b="1" dirty="0">
+                          <a:solidFill>
+                            <a:srgbClr val="1B2733"/>
+                          </a:solidFill>
+                          <a:latin typeface="Calibri" pitchFamily="34" charset="0"/>
+                          <a:ea typeface="Calibri" pitchFamily="34" charset="-122"/>
+                          <a:cs typeface="Calibri" pitchFamily="34" charset="-120"/>
+                        </a:rPr>
+                        <a:t>MEDDEVI</a:t>
+                      </a:r>
+                      <a:endParaRPr lang="en-US" sz="1000" dirty="0">
+                        <a:latin typeface="Calibri" charset="0"/>
+                        <a:ea typeface="Calibri" charset="0"/>
+                        <a:cs typeface="Calibri" charset="0"/>
+                      </a:endParaRPr>
+                    </a:p>
+                  </a:txBody>
+                  <a:tcPr marL="25400" marR="25400" marT="12700" marB="12700">
+                    <a:lnL w="6350" cap="flat" cmpd="sng" algn="ctr">
+                      <a:solidFill>
+                        <a:srgbClr val="D5DEE5"/>
+                      </a:solidFill>
+                      <a:prstDash val="solid"/>
+                      <a:round/>
+                      <a:headEnd type="none" w="med" len="med"/>
+                      <a:tailEnd type="none" w="med" len="med"/>
+                    </a:lnL>
+                    <a:lnR w="6350" cap="flat" cmpd="sng" algn="ctr">
+                      <a:solidFill>
+                        <a:srgbClr val="D5DEE5"/>
+                      </a:solidFill>
+                      <a:prstDash val="solid"/>
+                      <a:round/>
+                      <a:headEnd type="none" w="med" len="med"/>
+                      <a:tailEnd type="none" w="med" len="med"/>
+                    </a:lnR>
+                    <a:lnT w="6350" cap="flat" cmpd="sng" algn="ctr">
+                      <a:solidFill>
+                        <a:srgbClr val="D5DEE5"/>
+                      </a:solidFill>
+                      <a:prstDash val="solid"/>
+                      <a:round/>
+                      <a:headEnd type="none" w="med" len="med"/>
+                      <a:tailEnd type="none" w="med" len="med"/>
+                    </a:lnT>
+                    <a:lnB w="6350" cap="flat" cmpd="sng" algn="ctr">
+                      <a:solidFill>
+                        <a:srgbClr val="D5DEE5"/>
+                      </a:solidFill>
+                      <a:prstDash val="solid"/>
+                      <a:round/>
+                      <a:headEnd type="none" w="med" len="med"/>
+                      <a:tailEnd type="none" w="med" len="med"/>
+                    </a:lnB>
+                    <a:solidFill>
+                      <a:srgbClr val="F7FAFB"/>
+                    </a:solidFill>
+                  </a:tcPr>
+                </a:tc>
+                <a:tc>
+                  <a:txBody>
+                    <a:bodyPr/>
+                    <a:lstStyle/>
+                    <a:p>
+                      <a:pPr algn="ctr" indent="0" marL="0">
+                        <a:buNone/>
+                      </a:pPr>
+                      <a:r>
+                        <a:rPr lang="en-US" sz="1200" dirty="0">
+                          <a:solidFill>
+                            <a:srgbClr val="1B2733"/>
+                          </a:solidFill>
+                          <a:latin typeface="Calibri" pitchFamily="34" charset="0"/>
+                          <a:ea typeface="Calibri" pitchFamily="34" charset="-122"/>
+                          <a:cs typeface="Calibri" pitchFamily="34" charset="-120"/>
+                        </a:rPr>
+                        <a:t>14</a:t>
+                      </a:r>
+                      <a:endParaRPr lang="en-US" sz="1200" dirty="0">
+                        <a:latin typeface="Calibri" charset="0"/>
+                        <a:ea typeface="Calibri" charset="0"/>
+                        <a:cs typeface="Calibri" charset="0"/>
+                      </a:endParaRPr>
+                    </a:p>
+                  </a:txBody>
+                  <a:tcPr marL="25400" marR="25400" marT="12700" marB="12700">
+                    <a:lnL w="6350" cap="flat" cmpd="sng" algn="ctr">
+                      <a:solidFill>
+                        <a:srgbClr val="D5DEE5"/>
+                      </a:solidFill>
+                      <a:prstDash val="solid"/>
+                      <a:round/>
+                      <a:headEnd type="none" w="med" len="med"/>
+                      <a:tailEnd type="none" w="med" len="med"/>
+                    </a:lnL>
+                    <a:lnR w="6350" cap="flat" cmpd="sng" algn="ctr">
+                      <a:solidFill>
+                        <a:srgbClr val="D5DEE5"/>
+                      </a:solidFill>
+                      <a:prstDash val="solid"/>
+                      <a:round/>
+                      <a:headEnd type="none" w="med" len="med"/>
+                      <a:tailEnd type="none" w="med" len="med"/>
+                    </a:lnR>
+                    <a:lnT w="6350" cap="flat" cmpd="sng" algn="ctr">
+                      <a:solidFill>
+                        <a:srgbClr val="D5DEE5"/>
+                      </a:solidFill>
+                      <a:prstDash val="solid"/>
+                      <a:round/>
+                      <a:headEnd type="none" w="med" len="med"/>
+                      <a:tailEnd type="none" w="med" len="med"/>
+                    </a:lnT>
+                    <a:lnB w="6350" cap="flat" cmpd="sng" algn="ctr">
+                      <a:solidFill>
+                        <a:srgbClr val="D5DEE5"/>
+                      </a:solidFill>
+                      <a:prstDash val="solid"/>
+                      <a:round/>
+                      <a:headEnd type="none" w="med" len="med"/>
+                      <a:tailEnd type="none" w="med" len="med"/>
+                    </a:lnB>
+                    <a:solidFill>
+                      <a:srgbClr val="DEE2E4"/>
+                    </a:solidFill>
+                  </a:tcPr>
+                </a:tc>
+                <a:tc>
+                  <a:txBody>
+                    <a:bodyPr/>
+                    <a:lstStyle/>
+                    <a:p>
+                      <a:pPr algn="ctr" indent="0" marL="0">
+                        <a:buNone/>
+                      </a:pPr>
+                      <a:r>
+                        <a:rPr lang="en-US" sz="1200" dirty="0">
+                          <a:solidFill>
+                            <a:srgbClr val="1B2733"/>
+                          </a:solidFill>
+                          <a:latin typeface="Calibri" pitchFamily="34" charset="0"/>
+                          <a:ea typeface="Calibri" pitchFamily="34" charset="-122"/>
+                          <a:cs typeface="Calibri" pitchFamily="34" charset="-120"/>
+                        </a:rPr>
+                        <a:t>1</a:t>
+                      </a:r>
+                      <a:endParaRPr lang="en-US" sz="1200" dirty="0">
+                        <a:latin typeface="Calibri" charset="0"/>
+                        <a:ea typeface="Calibri" charset="0"/>
+                        <a:cs typeface="Calibri" charset="0"/>
+                      </a:endParaRPr>
+                    </a:p>
+                  </a:txBody>
+                  <a:tcPr marL="25400" marR="25400" marT="12700" marB="12700">
+                    <a:lnL w="6350" cap="flat" cmpd="sng" algn="ctr">
+                      <a:solidFill>
+                        <a:srgbClr val="D5DEE5"/>
+                      </a:solidFill>
+                      <a:prstDash val="solid"/>
+                      <a:round/>
+                      <a:headEnd type="none" w="med" len="med"/>
+                      <a:tailEnd type="none" w="med" len="med"/>
+                    </a:lnL>
+                    <a:lnR w="6350" cap="flat" cmpd="sng" algn="ctr">
+                      <a:solidFill>
+                        <a:srgbClr val="D5DEE5"/>
+                      </a:solidFill>
+                      <a:prstDash val="solid"/>
+                      <a:round/>
+                      <a:headEnd type="none" w="med" len="med"/>
+                      <a:tailEnd type="none" w="med" len="med"/>
+                    </a:lnR>
+                    <a:lnT w="6350" cap="flat" cmpd="sng" algn="ctr">
+                      <a:solidFill>
+                        <a:srgbClr val="D5DEE5"/>
+                      </a:solidFill>
+                      <a:prstDash val="solid"/>
+                      <a:round/>
+                      <a:headEnd type="none" w="med" len="med"/>
+                      <a:tailEnd type="none" w="med" len="med"/>
+                    </a:lnT>
+                    <a:lnB w="6350" cap="flat" cmpd="sng" algn="ctr">
+                      <a:solidFill>
+                        <a:srgbClr val="D5DEE5"/>
+                      </a:solidFill>
+                      <a:prstDash val="solid"/>
+                      <a:round/>
+                      <a:headEnd type="none" w="med" len="med"/>
+                      <a:tailEnd type="none" w="med" len="med"/>
+                    </a:lnB>
+                    <a:solidFill>
+                      <a:srgbClr val="FDFDFD"/>
+                    </a:solidFill>
+                  </a:tcPr>
+                </a:tc>
+                <a:tc>
+                  <a:txBody>
+                    <a:bodyPr/>
+                    <a:lstStyle/>
+                    <a:p>
+                      <a:pPr algn="ctr" indent="0" marL="0">
+                        <a:buNone/>
+                      </a:pPr>
+                      <a:r>
+                        <a:rPr lang="en-US" sz="1200" dirty="0">
+                          <a:solidFill>
+                            <a:srgbClr val="1B2733"/>
+                          </a:solidFill>
+                          <a:latin typeface="Calibri" pitchFamily="34" charset="0"/>
+                          <a:ea typeface="Calibri" pitchFamily="34" charset="-122"/>
+                          <a:cs typeface="Calibri" pitchFamily="34" charset="-120"/>
+                        </a:rPr>
+                        <a:t>5</a:t>
+                      </a:r>
+                      <a:endParaRPr lang="en-US" sz="1200" dirty="0">
+                        <a:latin typeface="Calibri" charset="0"/>
+                        <a:ea typeface="Calibri" charset="0"/>
+                        <a:cs typeface="Calibri" charset="0"/>
+                      </a:endParaRPr>
+                    </a:p>
+                  </a:txBody>
+                  <a:tcPr marL="25400" marR="25400" marT="12700" marB="12700">
+                    <a:lnL w="6350" cap="flat" cmpd="sng" algn="ctr">
+                      <a:solidFill>
+                        <a:srgbClr val="D5DEE5"/>
+                      </a:solidFill>
+                      <a:prstDash val="solid"/>
+                      <a:round/>
+                      <a:headEnd type="none" w="med" len="med"/>
+                      <a:tailEnd type="none" w="med" len="med"/>
+                    </a:lnL>
+                    <a:lnR w="6350" cap="flat" cmpd="sng" algn="ctr">
+                      <a:solidFill>
+                        <a:srgbClr val="D5DEE5"/>
+                      </a:solidFill>
+                      <a:prstDash val="solid"/>
+                      <a:round/>
+                      <a:headEnd type="none" w="med" len="med"/>
+                      <a:tailEnd type="none" w="med" len="med"/>
+                    </a:lnR>
+                    <a:lnT w="6350" cap="flat" cmpd="sng" algn="ctr">
+                      <a:solidFill>
+                        <a:srgbClr val="D5DEE5"/>
+                      </a:solidFill>
+                      <a:prstDash val="solid"/>
+                      <a:round/>
+                      <a:headEnd type="none" w="med" len="med"/>
+                      <a:tailEnd type="none" w="med" len="med"/>
+                    </a:lnT>
+                    <a:lnB w="6350" cap="flat" cmpd="sng" algn="ctr">
+                      <a:solidFill>
+                        <a:srgbClr val="D5DEE5"/>
+                      </a:solidFill>
+                      <a:prstDash val="solid"/>
+                      <a:round/>
+                      <a:headEnd type="none" w="med" len="med"/>
+                      <a:tailEnd type="none" w="med" len="med"/>
+                    </a:lnB>
+                    <a:solidFill>
+                      <a:srgbClr val="F2F3F4"/>
+                    </a:solidFill>
+                  </a:tcPr>
+                </a:tc>
+                <a:tc>
+                  <a:txBody>
+                    <a:bodyPr/>
+                    <a:lstStyle/>
+                    <a:p>
+                      <a:pPr algn="ctr" indent="0" marL="0">
+                        <a:buNone/>
+                      </a:pPr>
+                      <a:r>
+                        <a:rPr lang="en-US" sz="1200" dirty="0">
+                          <a:solidFill>
+                            <a:srgbClr val="1B2733"/>
+                          </a:solidFill>
+                          <a:latin typeface="Calibri" pitchFamily="34" charset="0"/>
+                          <a:ea typeface="Calibri" pitchFamily="34" charset="-122"/>
+                          <a:cs typeface="Calibri" pitchFamily="34" charset="-120"/>
+                        </a:rPr>
+                        <a:t>10</a:t>
+                      </a:r>
+                      <a:endParaRPr lang="en-US" sz="1200" dirty="0">
+                        <a:latin typeface="Calibri" charset="0"/>
+                        <a:ea typeface="Calibri" charset="0"/>
+                        <a:cs typeface="Calibri" charset="0"/>
+                      </a:endParaRPr>
+                    </a:p>
+                  </a:txBody>
+                  <a:tcPr marL="25400" marR="25400" marT="12700" marB="12700">
+                    <a:lnL w="6350" cap="flat" cmpd="sng" algn="ctr">
+                      <a:solidFill>
+                        <a:srgbClr val="D5DEE5"/>
+                      </a:solidFill>
+                      <a:prstDash val="solid"/>
+                      <a:round/>
+                      <a:headEnd type="none" w="med" len="med"/>
+                      <a:tailEnd type="none" w="med" len="med"/>
+                    </a:lnL>
+                    <a:lnR w="6350" cap="flat" cmpd="sng" algn="ctr">
+                      <a:solidFill>
+                        <a:srgbClr val="D5DEE5"/>
+                      </a:solidFill>
+                      <a:prstDash val="solid"/>
+                      <a:round/>
+                      <a:headEnd type="none" w="med" len="med"/>
+                      <a:tailEnd type="none" w="med" len="med"/>
+                    </a:lnR>
+                    <a:lnT w="6350" cap="flat" cmpd="sng" algn="ctr">
+                      <a:solidFill>
+                        <a:srgbClr val="D5DEE5"/>
+                      </a:solidFill>
+                      <a:prstDash val="solid"/>
+                      <a:round/>
+                      <a:headEnd type="none" w="med" len="med"/>
+                      <a:tailEnd type="none" w="med" len="med"/>
+                    </a:lnT>
+                    <a:lnB w="6350" cap="flat" cmpd="sng" algn="ctr">
+                      <a:solidFill>
+                        <a:srgbClr val="D5DEE5"/>
+                      </a:solidFill>
+                      <a:prstDash val="solid"/>
+                      <a:round/>
+                      <a:headEnd type="none" w="med" len="med"/>
+                      <a:tailEnd type="none" w="med" len="med"/>
+                    </a:lnB>
+                    <a:solidFill>
+                      <a:srgbClr val="E7E9EB"/>
+                    </a:solidFill>
+                  </a:tcPr>
+                </a:tc>
+                <a:tc>
+                  <a:txBody>
+                    <a:bodyPr/>
+                    <a:lstStyle/>
+                    <a:p>
+                      <a:pPr algn="ctr" indent="0" marL="0">
+                        <a:buNone/>
+                      </a:pPr>
+                      <a:r>
+                        <a:rPr lang="en-US" sz="1200" dirty="0">
+                          <a:solidFill>
+                            <a:srgbClr val="1B2733"/>
+                          </a:solidFill>
+                          <a:latin typeface="Calibri" pitchFamily="34" charset="0"/>
+                          <a:ea typeface="Calibri" pitchFamily="34" charset="-122"/>
+                          <a:cs typeface="Calibri" pitchFamily="34" charset="-120"/>
+                        </a:rPr>
+                        <a:t>0</a:t>
+                      </a:r>
+                      <a:endParaRPr lang="en-US" sz="1200" dirty="0">
+                        <a:latin typeface="Calibri" charset="0"/>
+                        <a:ea typeface="Calibri" charset="0"/>
+                        <a:cs typeface="Calibri" charset="0"/>
+                      </a:endParaRPr>
+                    </a:p>
+                  </a:txBody>
+                  <a:tcPr marL="25400" marR="25400" marT="12700" marB="12700">
+                    <a:lnL w="6350" cap="flat" cmpd="sng" algn="ctr">
+                      <a:solidFill>
+                        <a:srgbClr val="D5DEE5"/>
+                      </a:solidFill>
+                      <a:prstDash val="solid"/>
+                      <a:round/>
+                      <a:headEnd type="none" w="med" len="med"/>
+                      <a:tailEnd type="none" w="med" len="med"/>
+                    </a:lnL>
+                    <a:lnR w="6350" cap="flat" cmpd="sng" algn="ctr">
+                      <a:solidFill>
+                        <a:srgbClr val="D5DEE5"/>
+                      </a:solidFill>
+                      <a:prstDash val="solid"/>
+                      <a:round/>
+                      <a:headEnd type="none" w="med" len="med"/>
+                      <a:tailEnd type="none" w="med" len="med"/>
+                    </a:lnR>
+                    <a:lnT w="6350" cap="flat" cmpd="sng" algn="ctr">
+                      <a:solidFill>
+                        <a:srgbClr val="D5DEE5"/>
+                      </a:solidFill>
+                      <a:prstDash val="solid"/>
+                      <a:round/>
+                      <a:headEnd type="none" w="med" len="med"/>
+                      <a:tailEnd type="none" w="med" len="med"/>
+                    </a:lnT>
+                    <a:lnB w="6350" cap="flat" cmpd="sng" algn="ctr">
+                      <a:solidFill>
+                        <a:srgbClr val="D5DEE5"/>
+                      </a:solidFill>
+                      <a:prstDash val="solid"/>
+                      <a:round/>
+                      <a:headEnd type="none" w="med" len="med"/>
+                      <a:tailEnd type="none" w="med" len="med"/>
+                    </a:lnB>
+                    <a:solidFill>
+                      <a:srgbClr val="FFFFFF"/>
+                    </a:solidFill>
+                  </a:tcPr>
+                </a:tc>
+                <a:tc>
+                  <a:txBody>
+                    <a:bodyPr/>
+                    <a:lstStyle/>
+                    <a:p>
+                      <a:pPr algn="ctr" indent="0" marL="0">
+                        <a:buNone/>
+                      </a:pPr>
+                      <a:r>
+                        <a:rPr lang="en-US" sz="1200" b="1" dirty="0">
+                          <a:solidFill>
+                            <a:srgbClr val="1B2733"/>
+                          </a:solidFill>
+                          <a:latin typeface="Calibri" pitchFamily="34" charset="0"/>
+                          <a:ea typeface="Calibri" pitchFamily="34" charset="-122"/>
+                          <a:cs typeface="Calibri" pitchFamily="34" charset="-120"/>
+                        </a:rPr>
+                        <a:t>34</a:t>
+                      </a:r>
+                      <a:endParaRPr lang="en-US" sz="1200" dirty="0">
+                        <a:latin typeface="Calibri" charset="0"/>
+                        <a:ea typeface="Calibri" charset="0"/>
+                        <a:cs typeface="Calibri" charset="0"/>
+                      </a:endParaRPr>
+                    </a:p>
+                  </a:txBody>
+                  <a:tcPr marL="25400" marR="25400" marT="12700" marB="12700">
+                    <a:lnL w="6350" cap="flat" cmpd="sng" algn="ctr">
+                      <a:solidFill>
+                        <a:srgbClr val="D5DEE5"/>
+                      </a:solidFill>
+                      <a:prstDash val="solid"/>
+                      <a:round/>
+                      <a:headEnd type="none" w="med" len="med"/>
+                      <a:tailEnd type="none" w="med" len="med"/>
+                    </a:lnL>
+                    <a:lnR w="6350" cap="flat" cmpd="sng" algn="ctr">
+                      <a:solidFill>
+                        <a:srgbClr val="D5DEE5"/>
+                      </a:solidFill>
+                      <a:prstDash val="solid"/>
+                      <a:round/>
+                      <a:headEnd type="none" w="med" len="med"/>
+                      <a:tailEnd type="none" w="med" len="med"/>
+                    </a:lnR>
+                    <a:lnT w="6350" cap="flat" cmpd="sng" algn="ctr">
+                      <a:solidFill>
+                        <a:srgbClr val="D5DEE5"/>
+                      </a:solidFill>
+                      <a:prstDash val="solid"/>
+                      <a:round/>
+                      <a:headEnd type="none" w="med" len="med"/>
+                      <a:tailEnd type="none" w="med" len="med"/>
+                    </a:lnT>
+                    <a:lnB w="6350" cap="flat" cmpd="sng" algn="ctr">
+                      <a:solidFill>
+                        <a:srgbClr val="D5DEE5"/>
+                      </a:solidFill>
+                      <a:prstDash val="solid"/>
+                      <a:round/>
+                      <a:headEnd type="none" w="med" len="med"/>
+                      <a:tailEnd type="none" w="med" len="med"/>
+                    </a:lnB>
+                    <a:solidFill>
+                      <a:srgbClr val="AEB7BD"/>
+                    </a:solidFill>
+                  </a:tcPr>
+                </a:tc>
+                <a:tc>
+                  <a:txBody>
+                    <a:bodyPr/>
+                    <a:lstStyle/>
+                    <a:p>
+                      <a:pPr algn="ctr" indent="0" marL="0">
+                        <a:buNone/>
+                      </a:pPr>
+                      <a:r>
+                        <a:rPr lang="en-US" sz="1200" dirty="0">
+                          <a:solidFill>
+                            <a:srgbClr val="1B2733"/>
+                          </a:solidFill>
+                          <a:latin typeface="Calibri" pitchFamily="34" charset="0"/>
+                          <a:ea typeface="Calibri" pitchFamily="34" charset="-122"/>
+                          <a:cs typeface="Calibri" pitchFamily="34" charset="-120"/>
+                        </a:rPr>
+                        <a:t>0</a:t>
+                      </a:r>
+                      <a:endParaRPr lang="en-US" sz="1200" dirty="0">
+                        <a:latin typeface="Calibri" charset="0"/>
+                        <a:ea typeface="Calibri" charset="0"/>
+                        <a:cs typeface="Calibri" charset="0"/>
+                      </a:endParaRPr>
+                    </a:p>
+                  </a:txBody>
+                  <a:tcPr marL="25400" marR="25400" marT="12700" marB="12700">
+                    <a:lnL w="6350" cap="flat" cmpd="sng" algn="ctr">
+                      <a:solidFill>
+                        <a:srgbClr val="D5DEE5"/>
+                      </a:solidFill>
+                      <a:prstDash val="solid"/>
+                      <a:round/>
+                      <a:headEnd type="none" w="med" len="med"/>
+                      <a:tailEnd type="none" w="med" len="med"/>
+                    </a:lnL>
+                    <a:lnR w="6350" cap="flat" cmpd="sng" algn="ctr">
+                      <a:solidFill>
+                        <a:srgbClr val="D5DEE5"/>
+                      </a:solidFill>
+                      <a:prstDash val="solid"/>
+                      <a:round/>
+                      <a:headEnd type="none" w="med" len="med"/>
+                      <a:tailEnd type="none" w="med" len="med"/>
+                    </a:lnR>
+                    <a:lnT w="6350" cap="flat" cmpd="sng" algn="ctr">
+                      <a:solidFill>
+                        <a:srgbClr val="D5DEE5"/>
+                      </a:solidFill>
+                      <a:prstDash val="solid"/>
+                      <a:round/>
+                      <a:headEnd type="none" w="med" len="med"/>
+                      <a:tailEnd type="none" w="med" len="med"/>
+                    </a:lnT>
+                    <a:lnB w="6350" cap="flat" cmpd="sng" algn="ctr">
+                      <a:solidFill>
+                        <a:srgbClr val="D5DEE5"/>
+                      </a:solidFill>
+                      <a:prstDash val="solid"/>
+                      <a:round/>
+                      <a:headEnd type="none" w="med" len="med"/>
+                      <a:tailEnd type="none" w="med" len="med"/>
+                    </a:lnB>
+                    <a:solidFill>
+                      <a:srgbClr val="FFFFFF"/>
+                    </a:solidFill>
+                  </a:tcPr>
+                </a:tc>
+                <a:tc>
+                  <a:txBody>
+                    <a:bodyPr/>
+                    <a:lstStyle/>
+                    <a:p>
+                      <a:pPr algn="ctr" indent="0" marL="0">
+                        <a:buNone/>
+                      </a:pPr>
+                      <a:r>
+                        <a:rPr lang="en-US" sz="1200" dirty="0">
+                          <a:solidFill>
+                            <a:srgbClr val="1B2733"/>
+                          </a:solidFill>
+                          <a:latin typeface="Calibri" pitchFamily="34" charset="0"/>
+                          <a:ea typeface="Calibri" pitchFamily="34" charset="-122"/>
+                          <a:cs typeface="Calibri" pitchFamily="34" charset="-120"/>
+                        </a:rPr>
+                        <a:t>0</a:t>
+                      </a:r>
+                      <a:endParaRPr lang="en-US" sz="1200" dirty="0">
+                        <a:latin typeface="Calibri" charset="0"/>
+                        <a:ea typeface="Calibri" charset="0"/>
+                        <a:cs typeface="Calibri" charset="0"/>
+                      </a:endParaRPr>
+                    </a:p>
+                  </a:txBody>
+                  <a:tcPr marL="25400" marR="25400" marT="12700" marB="12700">
+                    <a:lnL w="6350" cap="flat" cmpd="sng" algn="ctr">
+                      <a:solidFill>
+                        <a:srgbClr val="D5DEE5"/>
+                      </a:solidFill>
+                      <a:prstDash val="solid"/>
+                      <a:round/>
+                      <a:headEnd type="none" w="med" len="med"/>
+                      <a:tailEnd type="none" w="med" len="med"/>
+                    </a:lnL>
+                    <a:lnR w="6350" cap="flat" cmpd="sng" algn="ctr">
+                      <a:solidFill>
+                        <a:srgbClr val="D5DEE5"/>
+                      </a:solidFill>
+                      <a:prstDash val="solid"/>
+                      <a:round/>
+                      <a:headEnd type="none" w="med" len="med"/>
+                      <a:tailEnd type="none" w="med" len="med"/>
+                    </a:lnR>
+                    <a:lnT w="6350" cap="flat" cmpd="sng" algn="ctr">
+                      <a:solidFill>
+                        <a:srgbClr val="D5DEE5"/>
+                      </a:solidFill>
+                      <a:prstDash val="solid"/>
+                      <a:round/>
+                      <a:headEnd type="none" w="med" len="med"/>
+                      <a:tailEnd type="none" w="med" len="med"/>
+                    </a:lnT>
+                    <a:lnB w="6350" cap="flat" cmpd="sng" algn="ctr">
+                      <a:solidFill>
+                        <a:srgbClr val="D5DEE5"/>
+                      </a:solidFill>
+                      <a:prstDash val="solid"/>
+                      <a:round/>
+                      <a:headEnd type="none" w="med" len="med"/>
+                      <a:tailEnd type="none" w="med" len="med"/>
+                    </a:lnB>
+                    <a:solidFill>
+                      <a:srgbClr val="FFFFFF"/>
+                    </a:solidFill>
+                  </a:tcPr>
+                </a:tc>
+              </a:tr>
+              <a:tr h="457200">
+                <a:tc>
+                  <a:txBody>
+                    <a:bodyPr/>
+                    <a:lstStyle/>
+                    <a:p>
+                      <a:pPr indent="0" marL="0">
+                        <a:buNone/>
+                      </a:pPr>
+                      <a:r>
+                        <a:rPr lang="en-US" sz="1000" b="1" dirty="0">
+                          <a:solidFill>
+                            <a:srgbClr val="1B2733"/>
+                          </a:solidFill>
+                          <a:latin typeface="Calibri" pitchFamily="34" charset="0"/>
+                          <a:ea typeface="Calibri" pitchFamily="34" charset="-122"/>
+                          <a:cs typeface="Calibri" pitchFamily="34" charset="-120"/>
+                        </a:rPr>
+                        <a:t>AGE</a:t>
+                      </a:r>
+                      <a:endParaRPr lang="en-US" sz="1000" dirty="0">
+                        <a:latin typeface="Calibri" charset="0"/>
+                        <a:ea typeface="Calibri" charset="0"/>
+                        <a:cs typeface="Calibri" charset="0"/>
+                      </a:endParaRPr>
+                    </a:p>
+                  </a:txBody>
+                  <a:tcPr marL="25400" marR="25400" marT="12700" marB="12700">
+                    <a:lnL w="6350" cap="flat" cmpd="sng" algn="ctr">
+                      <a:solidFill>
+                        <a:srgbClr val="D5DEE5"/>
+                      </a:solidFill>
+                      <a:prstDash val="solid"/>
+                      <a:round/>
+                      <a:headEnd type="none" w="med" len="med"/>
+                      <a:tailEnd type="none" w="med" len="med"/>
+                    </a:lnL>
+                    <a:lnR w="6350" cap="flat" cmpd="sng" algn="ctr">
+                      <a:solidFill>
+                        <a:srgbClr val="D5DEE5"/>
+                      </a:solidFill>
+                      <a:prstDash val="solid"/>
+                      <a:round/>
+                      <a:headEnd type="none" w="med" len="med"/>
+                      <a:tailEnd type="none" w="med" len="med"/>
+                    </a:lnR>
+                    <a:lnT w="6350" cap="flat" cmpd="sng" algn="ctr">
+                      <a:solidFill>
+                        <a:srgbClr val="D5DEE5"/>
+                      </a:solidFill>
+                      <a:prstDash val="solid"/>
+                      <a:round/>
+                      <a:headEnd type="none" w="med" len="med"/>
+                      <a:tailEnd type="none" w="med" len="med"/>
+                    </a:lnT>
+                    <a:lnB w="6350" cap="flat" cmpd="sng" algn="ctr">
+                      <a:solidFill>
+                        <a:srgbClr val="D5DEE5"/>
+                      </a:solidFill>
+                      <a:prstDash val="solid"/>
+                      <a:round/>
+                      <a:headEnd type="none" w="med" len="med"/>
+                      <a:tailEnd type="none" w="med" len="med"/>
+                    </a:lnB>
+                    <a:solidFill>
+                      <a:srgbClr val="F7FAFB"/>
+                    </a:solidFill>
+                  </a:tcPr>
+                </a:tc>
+                <a:tc>
+                  <a:txBody>
+                    <a:bodyPr/>
+                    <a:lstStyle/>
+                    <a:p>
+                      <a:pPr algn="ctr" indent="0" marL="0">
+                        <a:buNone/>
+                      </a:pPr>
+                      <a:r>
+                        <a:rPr lang="en-US" sz="1200" dirty="0">
+                          <a:solidFill>
+                            <a:srgbClr val="1B2733"/>
+                          </a:solidFill>
+                          <a:latin typeface="Calibri" pitchFamily="34" charset="0"/>
+                          <a:ea typeface="Calibri" pitchFamily="34" charset="-122"/>
+                          <a:cs typeface="Calibri" pitchFamily="34" charset="-120"/>
+                        </a:rPr>
+                        <a:t>9</a:t>
+                      </a:r>
+                      <a:endParaRPr lang="en-US" sz="1200" dirty="0">
+                        <a:latin typeface="Calibri" charset="0"/>
+                        <a:ea typeface="Calibri" charset="0"/>
+                        <a:cs typeface="Calibri" charset="0"/>
+                      </a:endParaRPr>
+                    </a:p>
+                  </a:txBody>
+                  <a:tcPr marL="25400" marR="25400" marT="12700" marB="12700">
+                    <a:lnL w="6350" cap="flat" cmpd="sng" algn="ctr">
+                      <a:solidFill>
+                        <a:srgbClr val="D5DEE5"/>
+                      </a:solidFill>
+                      <a:prstDash val="solid"/>
+                      <a:round/>
+                      <a:headEnd type="none" w="med" len="med"/>
+                      <a:tailEnd type="none" w="med" len="med"/>
+                    </a:lnL>
+                    <a:lnR w="6350" cap="flat" cmpd="sng" algn="ctr">
+                      <a:solidFill>
+                        <a:srgbClr val="D5DEE5"/>
+                      </a:solidFill>
+                      <a:prstDash val="solid"/>
+                      <a:round/>
+                      <a:headEnd type="none" w="med" len="med"/>
+                      <a:tailEnd type="none" w="med" len="med"/>
+                    </a:lnR>
+                    <a:lnT w="6350" cap="flat" cmpd="sng" algn="ctr">
+                      <a:solidFill>
+                        <a:srgbClr val="D5DEE5"/>
+                      </a:solidFill>
+                      <a:prstDash val="solid"/>
+                      <a:round/>
+                      <a:headEnd type="none" w="med" len="med"/>
+                      <a:tailEnd type="none" w="med" len="med"/>
+                    </a:lnT>
+                    <a:lnB w="6350" cap="flat" cmpd="sng" algn="ctr">
+                      <a:solidFill>
+                        <a:srgbClr val="D5DEE5"/>
+                      </a:solidFill>
+                      <a:prstDash val="solid"/>
+                      <a:round/>
+                      <a:headEnd type="none" w="med" len="med"/>
+                      <a:tailEnd type="none" w="med" len="med"/>
+                    </a:lnB>
+                    <a:solidFill>
+                      <a:srgbClr val="E9EBED"/>
+                    </a:solidFill>
+                  </a:tcPr>
+                </a:tc>
+                <a:tc>
+                  <a:txBody>
+                    <a:bodyPr/>
+                    <a:lstStyle/>
+                    <a:p>
+                      <a:pPr algn="ctr" indent="0" marL="0">
+                        <a:buNone/>
+                      </a:pPr>
+                      <a:r>
+                        <a:rPr lang="en-US" sz="1200" dirty="0">
+                          <a:solidFill>
+                            <a:srgbClr val="1B2733"/>
+                          </a:solidFill>
+                          <a:latin typeface="Calibri" pitchFamily="34" charset="0"/>
+                          <a:ea typeface="Calibri" pitchFamily="34" charset="-122"/>
+                          <a:cs typeface="Calibri" pitchFamily="34" charset="-120"/>
+                        </a:rPr>
+                        <a:t>4</a:t>
+                      </a:r>
+                      <a:endParaRPr lang="en-US" sz="1200" dirty="0">
+                        <a:latin typeface="Calibri" charset="0"/>
+                        <a:ea typeface="Calibri" charset="0"/>
+                        <a:cs typeface="Calibri" charset="0"/>
+                      </a:endParaRPr>
+                    </a:p>
+                  </a:txBody>
+                  <a:tcPr marL="25400" marR="25400" marT="12700" marB="12700">
+                    <a:lnL w="6350" cap="flat" cmpd="sng" algn="ctr">
+                      <a:solidFill>
+                        <a:srgbClr val="D5DEE5"/>
+                      </a:solidFill>
+                      <a:prstDash val="solid"/>
+                      <a:round/>
+                      <a:headEnd type="none" w="med" len="med"/>
+                      <a:tailEnd type="none" w="med" len="med"/>
+                    </a:lnL>
+                    <a:lnR w="6350" cap="flat" cmpd="sng" algn="ctr">
+                      <a:solidFill>
+                        <a:srgbClr val="D5DEE5"/>
+                      </a:solidFill>
+                      <a:prstDash val="solid"/>
+                      <a:round/>
+                      <a:headEnd type="none" w="med" len="med"/>
+                      <a:tailEnd type="none" w="med" len="med"/>
+                    </a:lnR>
+                    <a:lnT w="6350" cap="flat" cmpd="sng" algn="ctr">
+                      <a:solidFill>
+                        <a:srgbClr val="D5DEE5"/>
+                      </a:solidFill>
+                      <a:prstDash val="solid"/>
+                      <a:round/>
+                      <a:headEnd type="none" w="med" len="med"/>
+                      <a:tailEnd type="none" w="med" len="med"/>
+                    </a:lnT>
+                    <a:lnB w="6350" cap="flat" cmpd="sng" algn="ctr">
+                      <a:solidFill>
+                        <a:srgbClr val="D5DEE5"/>
+                      </a:solidFill>
+                      <a:prstDash val="solid"/>
+                      <a:round/>
+                      <a:headEnd type="none" w="med" len="med"/>
+                      <a:tailEnd type="none" w="med" len="med"/>
+                    </a:lnB>
+                    <a:solidFill>
+                      <a:srgbClr val="F6F7F8"/>
+                    </a:solidFill>
+                  </a:tcPr>
+                </a:tc>
+                <a:tc>
+                  <a:txBody>
+                    <a:bodyPr/>
+                    <a:lstStyle/>
+                    <a:p>
+                      <a:pPr algn="ctr" indent="0" marL="0">
+                        <a:buNone/>
+                      </a:pPr>
+                      <a:r>
+                        <a:rPr lang="en-US" sz="1200" dirty="0">
+                          <a:solidFill>
+                            <a:srgbClr val="1B2733"/>
+                          </a:solidFill>
+                          <a:latin typeface="Calibri" pitchFamily="34" charset="0"/>
+                          <a:ea typeface="Calibri" pitchFamily="34" charset="-122"/>
+                          <a:cs typeface="Calibri" pitchFamily="34" charset="-120"/>
+                        </a:rPr>
+                        <a:t>0</a:t>
+                      </a:r>
+                      <a:endParaRPr lang="en-US" sz="1200" dirty="0">
+                        <a:latin typeface="Calibri" charset="0"/>
+                        <a:ea typeface="Calibri" charset="0"/>
+                        <a:cs typeface="Calibri" charset="0"/>
+                      </a:endParaRPr>
+                    </a:p>
+                  </a:txBody>
+                  <a:tcPr marL="25400" marR="25400" marT="12700" marB="12700">
+                    <a:lnL w="6350" cap="flat" cmpd="sng" algn="ctr">
+                      <a:solidFill>
+                        <a:srgbClr val="D5DEE5"/>
+                      </a:solidFill>
+                      <a:prstDash val="solid"/>
+                      <a:round/>
+                      <a:headEnd type="none" w="med" len="med"/>
+                      <a:tailEnd type="none" w="med" len="med"/>
+                    </a:lnL>
+                    <a:lnR w="6350" cap="flat" cmpd="sng" algn="ctr">
+                      <a:solidFill>
+                        <a:srgbClr val="D5DEE5"/>
+                      </a:solidFill>
+                      <a:prstDash val="solid"/>
+                      <a:round/>
+                      <a:headEnd type="none" w="med" len="med"/>
+                      <a:tailEnd type="none" w="med" len="med"/>
+                    </a:lnR>
+                    <a:lnT w="6350" cap="flat" cmpd="sng" algn="ctr">
+                      <a:solidFill>
+                        <a:srgbClr val="D5DEE5"/>
+                      </a:solidFill>
+                      <a:prstDash val="solid"/>
+                      <a:round/>
+                      <a:headEnd type="none" w="med" len="med"/>
+                      <a:tailEnd type="none" w="med" len="med"/>
+                    </a:lnT>
+                    <a:lnB w="6350" cap="flat" cmpd="sng" algn="ctr">
+                      <a:solidFill>
+                        <a:srgbClr val="D5DEE5"/>
+                      </a:solidFill>
+                      <a:prstDash val="solid"/>
+                      <a:round/>
+                      <a:headEnd type="none" w="med" len="med"/>
+                      <a:tailEnd type="none" w="med" len="med"/>
+                    </a:lnB>
+                    <a:solidFill>
+                      <a:srgbClr val="FFFFFF"/>
+                    </a:solidFill>
+                  </a:tcPr>
+                </a:tc>
+                <a:tc>
+                  <a:txBody>
+                    <a:bodyPr/>
+                    <a:lstStyle/>
+                    <a:p>
+                      <a:pPr algn="ctr" indent="0" marL="0">
+                        <a:buNone/>
+                      </a:pPr>
+                      <a:r>
+                        <a:rPr lang="en-US" sz="1200" dirty="0">
+                          <a:solidFill>
+                            <a:srgbClr val="1B2733"/>
+                          </a:solidFill>
+                          <a:latin typeface="Calibri" pitchFamily="34" charset="0"/>
+                          <a:ea typeface="Calibri" pitchFamily="34" charset="-122"/>
+                          <a:cs typeface="Calibri" pitchFamily="34" charset="-120"/>
+                        </a:rPr>
+                        <a:t>0</a:t>
+                      </a:r>
+                      <a:endParaRPr lang="en-US" sz="1200" dirty="0">
+                        <a:latin typeface="Calibri" charset="0"/>
+                        <a:ea typeface="Calibri" charset="0"/>
+                        <a:cs typeface="Calibri" charset="0"/>
+                      </a:endParaRPr>
+                    </a:p>
+                  </a:txBody>
+                  <a:tcPr marL="25400" marR="25400" marT="12700" marB="12700">
+                    <a:lnL w="6350" cap="flat" cmpd="sng" algn="ctr">
+                      <a:solidFill>
+                        <a:srgbClr val="D5DEE5"/>
+                      </a:solidFill>
+                      <a:prstDash val="solid"/>
+                      <a:round/>
+                      <a:headEnd type="none" w="med" len="med"/>
+                      <a:tailEnd type="none" w="med" len="med"/>
+                    </a:lnL>
+                    <a:lnR w="6350" cap="flat" cmpd="sng" algn="ctr">
+                      <a:solidFill>
+                        <a:srgbClr val="D5DEE5"/>
+                      </a:solidFill>
+                      <a:prstDash val="solid"/>
+                      <a:round/>
+                      <a:headEnd type="none" w="med" len="med"/>
+                      <a:tailEnd type="none" w="med" len="med"/>
+                    </a:lnR>
+                    <a:lnT w="6350" cap="flat" cmpd="sng" algn="ctr">
+                      <a:solidFill>
+                        <a:srgbClr val="D5DEE5"/>
+                      </a:solidFill>
+                      <a:prstDash val="solid"/>
+                      <a:round/>
+                      <a:headEnd type="none" w="med" len="med"/>
+                      <a:tailEnd type="none" w="med" len="med"/>
+                    </a:lnT>
+                    <a:lnB w="6350" cap="flat" cmpd="sng" algn="ctr">
+                      <a:solidFill>
+                        <a:srgbClr val="D5DEE5"/>
+                      </a:solidFill>
+                      <a:prstDash val="solid"/>
+                      <a:round/>
+                      <a:headEnd type="none" w="med" len="med"/>
+                      <a:tailEnd type="none" w="med" len="med"/>
+                    </a:lnB>
+                    <a:solidFill>
+                      <a:srgbClr val="FFFFFF"/>
+                    </a:solidFill>
+                  </a:tcPr>
+                </a:tc>
+                <a:tc>
+                  <a:txBody>
+                    <a:bodyPr/>
+                    <a:lstStyle/>
+                    <a:p>
+                      <a:pPr algn="ctr" indent="0" marL="0">
+                        <a:buNone/>
+                      </a:pPr>
+                      <a:r>
+                        <a:rPr lang="en-US" sz="1200" dirty="0">
+                          <a:solidFill>
+                            <a:srgbClr val="1B2733"/>
+                          </a:solidFill>
+                          <a:latin typeface="Calibri" pitchFamily="34" charset="0"/>
+                          <a:ea typeface="Calibri" pitchFamily="34" charset="-122"/>
+                          <a:cs typeface="Calibri" pitchFamily="34" charset="-120"/>
+                        </a:rPr>
+                        <a:t>1</a:t>
+                      </a:r>
+                      <a:endParaRPr lang="en-US" sz="1200" dirty="0">
+                        <a:latin typeface="Calibri" charset="0"/>
+                        <a:ea typeface="Calibri" charset="0"/>
+                        <a:cs typeface="Calibri" charset="0"/>
+                      </a:endParaRPr>
+                    </a:p>
+                  </a:txBody>
+                  <a:tcPr marL="25400" marR="25400" marT="12700" marB="12700">
+                    <a:lnL w="6350" cap="flat" cmpd="sng" algn="ctr">
+                      <a:solidFill>
+                        <a:srgbClr val="D5DEE5"/>
+                      </a:solidFill>
+                      <a:prstDash val="solid"/>
+                      <a:round/>
+                      <a:headEnd type="none" w="med" len="med"/>
+                      <a:tailEnd type="none" w="med" len="med"/>
+                    </a:lnL>
+                    <a:lnR w="6350" cap="flat" cmpd="sng" algn="ctr">
+                      <a:solidFill>
+                        <a:srgbClr val="D5DEE5"/>
+                      </a:solidFill>
+                      <a:prstDash val="solid"/>
+                      <a:round/>
+                      <a:headEnd type="none" w="med" len="med"/>
+                      <a:tailEnd type="none" w="med" len="med"/>
+                    </a:lnR>
+                    <a:lnT w="6350" cap="flat" cmpd="sng" algn="ctr">
+                      <a:solidFill>
+                        <a:srgbClr val="D5DEE5"/>
+                      </a:solidFill>
+                      <a:prstDash val="solid"/>
+                      <a:round/>
+                      <a:headEnd type="none" w="med" len="med"/>
+                      <a:tailEnd type="none" w="med" len="med"/>
+                    </a:lnT>
+                    <a:lnB w="6350" cap="flat" cmpd="sng" algn="ctr">
+                      <a:solidFill>
+                        <a:srgbClr val="D5DEE5"/>
+                      </a:solidFill>
+                      <a:prstDash val="solid"/>
+                      <a:round/>
+                      <a:headEnd type="none" w="med" len="med"/>
+                      <a:tailEnd type="none" w="med" len="med"/>
+                    </a:lnB>
+                    <a:solidFill>
+                      <a:srgbClr val="FCFCFC"/>
+                    </a:solidFill>
+                  </a:tcPr>
+                </a:tc>
+                <a:tc>
+                  <a:txBody>
+                    <a:bodyPr/>
+                    <a:lstStyle/>
+                    <a:p>
+                      <a:pPr algn="ctr" indent="0" marL="0">
+                        <a:buNone/>
+                      </a:pPr>
+                      <a:r>
+                        <a:rPr lang="en-US" sz="1200" dirty="0">
+                          <a:solidFill>
+                            <a:srgbClr val="1B2733"/>
+                          </a:solidFill>
+                          <a:latin typeface="Calibri" pitchFamily="34" charset="0"/>
+                          <a:ea typeface="Calibri" pitchFamily="34" charset="-122"/>
+                          <a:cs typeface="Calibri" pitchFamily="34" charset="-120"/>
+                        </a:rPr>
+                        <a:t>0</a:t>
+                      </a:r>
+                      <a:endParaRPr lang="en-US" sz="1200" dirty="0">
+                        <a:latin typeface="Calibri" charset="0"/>
+                        <a:ea typeface="Calibri" charset="0"/>
+                        <a:cs typeface="Calibri" charset="0"/>
+                      </a:endParaRPr>
+                    </a:p>
+                  </a:txBody>
+                  <a:tcPr marL="25400" marR="25400" marT="12700" marB="12700">
+                    <a:lnL w="6350" cap="flat" cmpd="sng" algn="ctr">
+                      <a:solidFill>
+                        <a:srgbClr val="D5DEE5"/>
+                      </a:solidFill>
+                      <a:prstDash val="solid"/>
+                      <a:round/>
+                      <a:headEnd type="none" w="med" len="med"/>
+                      <a:tailEnd type="none" w="med" len="med"/>
+                    </a:lnL>
+                    <a:lnR w="6350" cap="flat" cmpd="sng" algn="ctr">
+                      <a:solidFill>
+                        <a:srgbClr val="D5DEE5"/>
+                      </a:solidFill>
+                      <a:prstDash val="solid"/>
+                      <a:round/>
+                      <a:headEnd type="none" w="med" len="med"/>
+                      <a:tailEnd type="none" w="med" len="med"/>
+                    </a:lnR>
+                    <a:lnT w="6350" cap="flat" cmpd="sng" algn="ctr">
+                      <a:solidFill>
+                        <a:srgbClr val="D5DEE5"/>
+                      </a:solidFill>
+                      <a:prstDash val="solid"/>
+                      <a:round/>
+                      <a:headEnd type="none" w="med" len="med"/>
+                      <a:tailEnd type="none" w="med" len="med"/>
+                    </a:lnT>
+                    <a:lnB w="6350" cap="flat" cmpd="sng" algn="ctr">
+                      <a:solidFill>
+                        <a:srgbClr val="D5DEE5"/>
+                      </a:solidFill>
+                      <a:prstDash val="solid"/>
+                      <a:round/>
+                      <a:headEnd type="none" w="med" len="med"/>
+                      <a:tailEnd type="none" w="med" len="med"/>
+                    </a:lnB>
+                    <a:solidFill>
+                      <a:srgbClr val="FFFFFF"/>
+                    </a:solidFill>
+                  </a:tcPr>
+                </a:tc>
+                <a:tc>
+                  <a:txBody>
+                    <a:bodyPr/>
+                    <a:lstStyle/>
+                    <a:p>
+                      <a:pPr algn="ctr" indent="0" marL="0">
+                        <a:buNone/>
+                      </a:pPr>
+                      <a:r>
+                        <a:rPr lang="en-US" sz="1200" b="1" dirty="0">
+                          <a:solidFill>
+                            <a:srgbClr val="FFFFFF"/>
+                          </a:solidFill>
+                          <a:latin typeface="Calibri" pitchFamily="34" charset="0"/>
+                          <a:ea typeface="Calibri" pitchFamily="34" charset="-122"/>
+                          <a:cs typeface="Calibri" pitchFamily="34" charset="-120"/>
+                        </a:rPr>
+                        <a:t>78</a:t>
+                      </a:r>
+                      <a:endParaRPr lang="en-US" sz="1200" dirty="0">
+                        <a:latin typeface="Calibri" charset="0"/>
+                        <a:ea typeface="Calibri" charset="0"/>
+                        <a:cs typeface="Calibri" charset="0"/>
+                      </a:endParaRPr>
+                    </a:p>
+                  </a:txBody>
+                  <a:tcPr marL="25400" marR="25400" marT="12700" marB="12700">
+                    <a:lnL w="6350" cap="flat" cmpd="sng" algn="ctr">
+                      <a:solidFill>
+                        <a:srgbClr val="D5DEE5"/>
+                      </a:solidFill>
+                      <a:prstDash val="solid"/>
+                      <a:round/>
+                      <a:headEnd type="none" w="med" len="med"/>
+                      <a:tailEnd type="none" w="med" len="med"/>
+                    </a:lnL>
+                    <a:lnR w="6350" cap="flat" cmpd="sng" algn="ctr">
+                      <a:solidFill>
+                        <a:srgbClr val="D5DEE5"/>
+                      </a:solidFill>
+                      <a:prstDash val="solid"/>
+                      <a:round/>
+                      <a:headEnd type="none" w="med" len="med"/>
+                      <a:tailEnd type="none" w="med" len="med"/>
+                    </a:lnR>
+                    <a:lnT w="6350" cap="flat" cmpd="sng" algn="ctr">
+                      <a:solidFill>
+                        <a:srgbClr val="D5DEE5"/>
+                      </a:solidFill>
+                      <a:prstDash val="solid"/>
+                      <a:round/>
+                      <a:headEnd type="none" w="med" len="med"/>
+                      <a:tailEnd type="none" w="med" len="med"/>
+                    </a:lnT>
+                    <a:lnB w="6350" cap="flat" cmpd="sng" algn="ctr">
+                      <a:solidFill>
+                        <a:srgbClr val="D5DEE5"/>
+                      </a:solidFill>
+                      <a:prstDash val="solid"/>
+                      <a:round/>
+                      <a:headEnd type="none" w="med" len="med"/>
+                      <a:tailEnd type="none" w="med" len="med"/>
+                    </a:lnB>
+                    <a:solidFill>
+                      <a:srgbClr val="435867"/>
+                    </a:solidFill>
+                  </a:tcPr>
+                </a:tc>
+                <a:tc>
+                  <a:txBody>
+                    <a:bodyPr/>
+                    <a:lstStyle/>
+                    <a:p>
+                      <a:pPr algn="ctr" indent="0" marL="0">
+                        <a:buNone/>
+                      </a:pPr>
+                      <a:r>
+                        <a:rPr lang="en-US" sz="1200" dirty="0">
+                          <a:solidFill>
+                            <a:srgbClr val="1B2733"/>
+                          </a:solidFill>
+                          <a:latin typeface="Calibri" pitchFamily="34" charset="0"/>
+                          <a:ea typeface="Calibri" pitchFamily="34" charset="-122"/>
+                          <a:cs typeface="Calibri" pitchFamily="34" charset="-120"/>
+                        </a:rPr>
+                        <a:t>1</a:t>
+                      </a:r>
+                      <a:endParaRPr lang="en-US" sz="1200" dirty="0">
+                        <a:latin typeface="Calibri" charset="0"/>
+                        <a:ea typeface="Calibri" charset="0"/>
+                        <a:cs typeface="Calibri" charset="0"/>
+                      </a:endParaRPr>
+                    </a:p>
+                  </a:txBody>
+                  <a:tcPr marL="25400" marR="25400" marT="12700" marB="12700">
+                    <a:lnL w="6350" cap="flat" cmpd="sng" algn="ctr">
+                      <a:solidFill>
+                        <a:srgbClr val="D5DEE5"/>
+                      </a:solidFill>
+                      <a:prstDash val="solid"/>
+                      <a:round/>
+                      <a:headEnd type="none" w="med" len="med"/>
+                      <a:tailEnd type="none" w="med" len="med"/>
+                    </a:lnL>
+                    <a:lnR w="6350" cap="flat" cmpd="sng" algn="ctr">
+                      <a:solidFill>
+                        <a:srgbClr val="D5DEE5"/>
+                      </a:solidFill>
+                      <a:prstDash val="solid"/>
+                      <a:round/>
+                      <a:headEnd type="none" w="med" len="med"/>
+                      <a:tailEnd type="none" w="med" len="med"/>
+                    </a:lnR>
+                    <a:lnT w="6350" cap="flat" cmpd="sng" algn="ctr">
+                      <a:solidFill>
+                        <a:srgbClr val="D5DEE5"/>
+                      </a:solidFill>
+                      <a:prstDash val="solid"/>
+                      <a:round/>
+                      <a:headEnd type="none" w="med" len="med"/>
+                      <a:tailEnd type="none" w="med" len="med"/>
+                    </a:lnT>
+                    <a:lnB w="6350" cap="flat" cmpd="sng" algn="ctr">
+                      <a:solidFill>
+                        <a:srgbClr val="D5DEE5"/>
+                      </a:solidFill>
+                      <a:prstDash val="solid"/>
+                      <a:round/>
+                      <a:headEnd type="none" w="med" len="med"/>
+                      <a:tailEnd type="none" w="med" len="med"/>
+                    </a:lnB>
+                    <a:solidFill>
+                      <a:srgbClr val="FDFDFD"/>
+                    </a:solidFill>
+                  </a:tcPr>
+                </a:tc>
+              </a:tr>
+              <a:tr h="457200">
+                <a:tc>
+                  <a:txBody>
+                    <a:bodyPr/>
+                    <a:lstStyle/>
+                    <a:p>
+                      <a:pPr indent="0" marL="0">
+                        <a:buNone/>
+                      </a:pPr>
+                      <a:r>
+                        <a:rPr lang="en-US" sz="1000" b="1" dirty="0">
+                          <a:solidFill>
+                            <a:srgbClr val="1B2733"/>
+                          </a:solidFill>
+                          <a:latin typeface="Calibri" pitchFamily="34" charset="0"/>
+                          <a:ea typeface="Calibri" pitchFamily="34" charset="-122"/>
+                          <a:cs typeface="Calibri" pitchFamily="34" charset="-120"/>
+                        </a:rPr>
+                        <a:t>OCCUPAT</a:t>
+                      </a:r>
+                      <a:endParaRPr lang="en-US" sz="1000" dirty="0">
+                        <a:latin typeface="Calibri" charset="0"/>
+                        <a:ea typeface="Calibri" charset="0"/>
+                        <a:cs typeface="Calibri" charset="0"/>
+                      </a:endParaRPr>
+                    </a:p>
+                  </a:txBody>
+                  <a:tcPr marL="25400" marR="25400" marT="12700" marB="12700">
+                    <a:lnL w="6350" cap="flat" cmpd="sng" algn="ctr">
+                      <a:solidFill>
+                        <a:srgbClr val="D5DEE5"/>
+                      </a:solidFill>
+                      <a:prstDash val="solid"/>
+                      <a:round/>
+                      <a:headEnd type="none" w="med" len="med"/>
+                      <a:tailEnd type="none" w="med" len="med"/>
+                    </a:lnL>
+                    <a:lnR w="6350" cap="flat" cmpd="sng" algn="ctr">
+                      <a:solidFill>
+                        <a:srgbClr val="D5DEE5"/>
+                      </a:solidFill>
+                      <a:prstDash val="solid"/>
+                      <a:round/>
+                      <a:headEnd type="none" w="med" len="med"/>
+                      <a:tailEnd type="none" w="med" len="med"/>
+                    </a:lnR>
+                    <a:lnT w="6350" cap="flat" cmpd="sng" algn="ctr">
+                      <a:solidFill>
+                        <a:srgbClr val="D5DEE5"/>
+                      </a:solidFill>
+                      <a:prstDash val="solid"/>
+                      <a:round/>
+                      <a:headEnd type="none" w="med" len="med"/>
+                      <a:tailEnd type="none" w="med" len="med"/>
+                    </a:lnT>
+                    <a:lnB w="6350" cap="flat" cmpd="sng" algn="ctr">
+                      <a:solidFill>
+                        <a:srgbClr val="D5DEE5"/>
+                      </a:solidFill>
+                      <a:prstDash val="solid"/>
+                      <a:round/>
+                      <a:headEnd type="none" w="med" len="med"/>
+                      <a:tailEnd type="none" w="med" len="med"/>
+                    </a:lnB>
+                    <a:solidFill>
+                      <a:srgbClr val="F7FAFB"/>
+                    </a:solidFill>
+                  </a:tcPr>
+                </a:tc>
+                <a:tc>
+                  <a:txBody>
+                    <a:bodyPr/>
+                    <a:lstStyle/>
+                    <a:p>
+                      <a:pPr algn="ctr" indent="0" marL="0">
+                        <a:buNone/>
+                      </a:pPr>
+                      <a:r>
+                        <a:rPr lang="en-US" sz="1200" dirty="0">
+                          <a:solidFill>
+                            <a:srgbClr val="1B2733"/>
+                          </a:solidFill>
+                          <a:latin typeface="Calibri" pitchFamily="34" charset="0"/>
+                          <a:ea typeface="Calibri" pitchFamily="34" charset="-122"/>
+                          <a:cs typeface="Calibri" pitchFamily="34" charset="-120"/>
+                        </a:rPr>
+                        <a:t>2</a:t>
+                      </a:r>
+                      <a:endParaRPr lang="en-US" sz="1200" dirty="0">
+                        <a:latin typeface="Calibri" charset="0"/>
+                        <a:ea typeface="Calibri" charset="0"/>
+                        <a:cs typeface="Calibri" charset="0"/>
+                      </a:endParaRPr>
+                    </a:p>
+                  </a:txBody>
+                  <a:tcPr marL="25400" marR="25400" marT="12700" marB="12700">
+                    <a:lnL w="6350" cap="flat" cmpd="sng" algn="ctr">
+                      <a:solidFill>
+                        <a:srgbClr val="D5DEE5"/>
+                      </a:solidFill>
+                      <a:prstDash val="solid"/>
+                      <a:round/>
+                      <a:headEnd type="none" w="med" len="med"/>
+                      <a:tailEnd type="none" w="med" len="med"/>
+                    </a:lnL>
+                    <a:lnR w="6350" cap="flat" cmpd="sng" algn="ctr">
+                      <a:solidFill>
+                        <a:srgbClr val="D5DEE5"/>
+                      </a:solidFill>
+                      <a:prstDash val="solid"/>
+                      <a:round/>
+                      <a:headEnd type="none" w="med" len="med"/>
+                      <a:tailEnd type="none" w="med" len="med"/>
+                    </a:lnR>
+                    <a:lnT w="6350" cap="flat" cmpd="sng" algn="ctr">
+                      <a:solidFill>
+                        <a:srgbClr val="D5DEE5"/>
+                      </a:solidFill>
+                      <a:prstDash val="solid"/>
+                      <a:round/>
+                      <a:headEnd type="none" w="med" len="med"/>
+                      <a:tailEnd type="none" w="med" len="med"/>
+                    </a:lnT>
+                    <a:lnB w="6350" cap="flat" cmpd="sng" algn="ctr">
+                      <a:solidFill>
+                        <a:srgbClr val="D5DEE5"/>
+                      </a:solidFill>
+                      <a:prstDash val="solid"/>
+                      <a:round/>
+                      <a:headEnd type="none" w="med" len="med"/>
+                      <a:tailEnd type="none" w="med" len="med"/>
+                    </a:lnB>
+                    <a:solidFill>
+                      <a:srgbClr val="FAFBFB"/>
+                    </a:solidFill>
+                  </a:tcPr>
+                </a:tc>
+                <a:tc>
+                  <a:txBody>
+                    <a:bodyPr/>
+                    <a:lstStyle/>
+                    <a:p>
+                      <a:pPr algn="ctr" indent="0" marL="0">
+                        <a:buNone/>
+                      </a:pPr>
+                      <a:r>
+                        <a:rPr lang="en-US" sz="1200" dirty="0">
+                          <a:solidFill>
+                            <a:srgbClr val="1B2733"/>
+                          </a:solidFill>
+                          <a:latin typeface="Calibri" pitchFamily="34" charset="0"/>
+                          <a:ea typeface="Calibri" pitchFamily="34" charset="-122"/>
+                          <a:cs typeface="Calibri" pitchFamily="34" charset="-120"/>
+                        </a:rPr>
+                        <a:t>0</a:t>
+                      </a:r>
+                      <a:endParaRPr lang="en-US" sz="1200" dirty="0">
+                        <a:latin typeface="Calibri" charset="0"/>
+                        <a:ea typeface="Calibri" charset="0"/>
+                        <a:cs typeface="Calibri" charset="0"/>
+                      </a:endParaRPr>
+                    </a:p>
+                  </a:txBody>
+                  <a:tcPr marL="25400" marR="25400" marT="12700" marB="12700">
+                    <a:lnL w="6350" cap="flat" cmpd="sng" algn="ctr">
+                      <a:solidFill>
+                        <a:srgbClr val="D5DEE5"/>
+                      </a:solidFill>
+                      <a:prstDash val="solid"/>
+                      <a:round/>
+                      <a:headEnd type="none" w="med" len="med"/>
+                      <a:tailEnd type="none" w="med" len="med"/>
+                    </a:lnL>
+                    <a:lnR w="6350" cap="flat" cmpd="sng" algn="ctr">
+                      <a:solidFill>
+                        <a:srgbClr val="D5DEE5"/>
+                      </a:solidFill>
+                      <a:prstDash val="solid"/>
+                      <a:round/>
+                      <a:headEnd type="none" w="med" len="med"/>
+                      <a:tailEnd type="none" w="med" len="med"/>
+                    </a:lnR>
+                    <a:lnT w="6350" cap="flat" cmpd="sng" algn="ctr">
+                      <a:solidFill>
+                        <a:srgbClr val="D5DEE5"/>
+                      </a:solidFill>
+                      <a:prstDash val="solid"/>
+                      <a:round/>
+                      <a:headEnd type="none" w="med" len="med"/>
+                      <a:tailEnd type="none" w="med" len="med"/>
+                    </a:lnT>
+                    <a:lnB w="6350" cap="flat" cmpd="sng" algn="ctr">
+                      <a:solidFill>
+                        <a:srgbClr val="D5DEE5"/>
+                      </a:solidFill>
+                      <a:prstDash val="solid"/>
+                      <a:round/>
+                      <a:headEnd type="none" w="med" len="med"/>
+                      <a:tailEnd type="none" w="med" len="med"/>
+                    </a:lnB>
+                    <a:solidFill>
+                      <a:srgbClr val="FFFFFF"/>
+                    </a:solidFill>
+                  </a:tcPr>
+                </a:tc>
+                <a:tc>
+                  <a:txBody>
+                    <a:bodyPr/>
+                    <a:lstStyle/>
+                    <a:p>
+                      <a:pPr algn="ctr" indent="0" marL="0">
+                        <a:buNone/>
+                      </a:pPr>
+                      <a:r>
+                        <a:rPr lang="en-US" sz="1200" dirty="0">
+                          <a:solidFill>
+                            <a:srgbClr val="1B2733"/>
+                          </a:solidFill>
+                          <a:latin typeface="Calibri" pitchFamily="34" charset="0"/>
+                          <a:ea typeface="Calibri" pitchFamily="34" charset="-122"/>
+                          <a:cs typeface="Calibri" pitchFamily="34" charset="-120"/>
+                        </a:rPr>
+                        <a:t>0</a:t>
+                      </a:r>
+                      <a:endParaRPr lang="en-US" sz="1200" dirty="0">
+                        <a:latin typeface="Calibri" charset="0"/>
+                        <a:ea typeface="Calibri" charset="0"/>
+                        <a:cs typeface="Calibri" charset="0"/>
+                      </a:endParaRPr>
+                    </a:p>
+                  </a:txBody>
+                  <a:tcPr marL="25400" marR="25400" marT="12700" marB="12700">
+                    <a:lnL w="6350" cap="flat" cmpd="sng" algn="ctr">
+                      <a:solidFill>
+                        <a:srgbClr val="D5DEE5"/>
+                      </a:solidFill>
+                      <a:prstDash val="solid"/>
+                      <a:round/>
+                      <a:headEnd type="none" w="med" len="med"/>
+                      <a:tailEnd type="none" w="med" len="med"/>
+                    </a:lnL>
+                    <a:lnR w="6350" cap="flat" cmpd="sng" algn="ctr">
+                      <a:solidFill>
+                        <a:srgbClr val="D5DEE5"/>
+                      </a:solidFill>
+                      <a:prstDash val="solid"/>
+                      <a:round/>
+                      <a:headEnd type="none" w="med" len="med"/>
+                      <a:tailEnd type="none" w="med" len="med"/>
+                    </a:lnR>
+                    <a:lnT w="6350" cap="flat" cmpd="sng" algn="ctr">
+                      <a:solidFill>
+                        <a:srgbClr val="D5DEE5"/>
+                      </a:solidFill>
+                      <a:prstDash val="solid"/>
+                      <a:round/>
+                      <a:headEnd type="none" w="med" len="med"/>
+                      <a:tailEnd type="none" w="med" len="med"/>
+                    </a:lnT>
+                    <a:lnB w="6350" cap="flat" cmpd="sng" algn="ctr">
+                      <a:solidFill>
+                        <a:srgbClr val="D5DEE5"/>
+                      </a:solidFill>
+                      <a:prstDash val="solid"/>
+                      <a:round/>
+                      <a:headEnd type="none" w="med" len="med"/>
+                      <a:tailEnd type="none" w="med" len="med"/>
+                    </a:lnB>
+                    <a:solidFill>
+                      <a:srgbClr val="FEFEFE"/>
+                    </a:solidFill>
+                  </a:tcPr>
+                </a:tc>
+                <a:tc>
+                  <a:txBody>
+                    <a:bodyPr/>
+                    <a:lstStyle/>
+                    <a:p>
+                      <a:pPr algn="ctr" indent="0" marL="0">
+                        <a:buNone/>
+                      </a:pPr>
+                      <a:r>
+                        <a:rPr lang="en-US" sz="1200" dirty="0">
+                          <a:solidFill>
+                            <a:srgbClr val="1B2733"/>
+                          </a:solidFill>
+                          <a:latin typeface="Calibri" pitchFamily="34" charset="0"/>
+                          <a:ea typeface="Calibri" pitchFamily="34" charset="-122"/>
+                          <a:cs typeface="Calibri" pitchFamily="34" charset="-120"/>
+                        </a:rPr>
+                        <a:t>0</a:t>
+                      </a:r>
+                      <a:endParaRPr lang="en-US" sz="1200" dirty="0">
+                        <a:latin typeface="Calibri" charset="0"/>
+                        <a:ea typeface="Calibri" charset="0"/>
+                        <a:cs typeface="Calibri" charset="0"/>
+                      </a:endParaRPr>
+                    </a:p>
+                  </a:txBody>
+                  <a:tcPr marL="25400" marR="25400" marT="12700" marB="12700">
+                    <a:lnL w="6350" cap="flat" cmpd="sng" algn="ctr">
+                      <a:solidFill>
+                        <a:srgbClr val="D5DEE5"/>
+                      </a:solidFill>
+                      <a:prstDash val="solid"/>
+                      <a:round/>
+                      <a:headEnd type="none" w="med" len="med"/>
+                      <a:tailEnd type="none" w="med" len="med"/>
+                    </a:lnL>
+                    <a:lnR w="6350" cap="flat" cmpd="sng" algn="ctr">
+                      <a:solidFill>
+                        <a:srgbClr val="D5DEE5"/>
+                      </a:solidFill>
+                      <a:prstDash val="solid"/>
+                      <a:round/>
+                      <a:headEnd type="none" w="med" len="med"/>
+                      <a:tailEnd type="none" w="med" len="med"/>
+                    </a:lnR>
+                    <a:lnT w="6350" cap="flat" cmpd="sng" algn="ctr">
+                      <a:solidFill>
+                        <a:srgbClr val="D5DEE5"/>
+                      </a:solidFill>
+                      <a:prstDash val="solid"/>
+                      <a:round/>
+                      <a:headEnd type="none" w="med" len="med"/>
+                      <a:tailEnd type="none" w="med" len="med"/>
+                    </a:lnT>
+                    <a:lnB w="6350" cap="flat" cmpd="sng" algn="ctr">
+                      <a:solidFill>
+                        <a:srgbClr val="D5DEE5"/>
+                      </a:solidFill>
+                      <a:prstDash val="solid"/>
+                      <a:round/>
+                      <a:headEnd type="none" w="med" len="med"/>
+                      <a:tailEnd type="none" w="med" len="med"/>
+                    </a:lnB>
+                    <a:solidFill>
+                      <a:srgbClr val="FEFEFF"/>
+                    </a:solidFill>
+                  </a:tcPr>
+                </a:tc>
+                <a:tc>
+                  <a:txBody>
+                    <a:bodyPr/>
+                    <a:lstStyle/>
+                    <a:p>
+                      <a:pPr algn="ctr" indent="0" marL="0">
+                        <a:buNone/>
+                      </a:pPr>
+                      <a:r>
+                        <a:rPr lang="en-US" sz="1200" dirty="0">
+                          <a:solidFill>
+                            <a:srgbClr val="1B2733"/>
+                          </a:solidFill>
+                          <a:latin typeface="Calibri" pitchFamily="34" charset="0"/>
+                          <a:ea typeface="Calibri" pitchFamily="34" charset="-122"/>
+                          <a:cs typeface="Calibri" pitchFamily="34" charset="-120"/>
+                        </a:rPr>
+                        <a:t>0</a:t>
+                      </a:r>
+                      <a:endParaRPr lang="en-US" sz="1200" dirty="0">
+                        <a:latin typeface="Calibri" charset="0"/>
+                        <a:ea typeface="Calibri" charset="0"/>
+                        <a:cs typeface="Calibri" charset="0"/>
+                      </a:endParaRPr>
+                    </a:p>
+                  </a:txBody>
+                  <a:tcPr marL="25400" marR="25400" marT="12700" marB="12700">
+                    <a:lnL w="6350" cap="flat" cmpd="sng" algn="ctr">
+                      <a:solidFill>
+                        <a:srgbClr val="D5DEE5"/>
+                      </a:solidFill>
+                      <a:prstDash val="solid"/>
+                      <a:round/>
+                      <a:headEnd type="none" w="med" len="med"/>
+                      <a:tailEnd type="none" w="med" len="med"/>
+                    </a:lnL>
+                    <a:lnR w="6350" cap="flat" cmpd="sng" algn="ctr">
+                      <a:solidFill>
+                        <a:srgbClr val="D5DEE5"/>
+                      </a:solidFill>
+                      <a:prstDash val="solid"/>
+                      <a:round/>
+                      <a:headEnd type="none" w="med" len="med"/>
+                      <a:tailEnd type="none" w="med" len="med"/>
+                    </a:lnR>
+                    <a:lnT w="6350" cap="flat" cmpd="sng" algn="ctr">
+                      <a:solidFill>
+                        <a:srgbClr val="D5DEE5"/>
+                      </a:solidFill>
+                      <a:prstDash val="solid"/>
+                      <a:round/>
+                      <a:headEnd type="none" w="med" len="med"/>
+                      <a:tailEnd type="none" w="med" len="med"/>
+                    </a:lnT>
+                    <a:lnB w="6350" cap="flat" cmpd="sng" algn="ctr">
+                      <a:solidFill>
+                        <a:srgbClr val="D5DEE5"/>
+                      </a:solidFill>
+                      <a:prstDash val="solid"/>
+                      <a:round/>
+                      <a:headEnd type="none" w="med" len="med"/>
+                      <a:tailEnd type="none" w="med" len="med"/>
+                    </a:lnB>
+                    <a:solidFill>
+                      <a:srgbClr val="FFFFFF"/>
+                    </a:solidFill>
+                  </a:tcPr>
+                </a:tc>
+                <a:tc>
+                  <a:txBody>
+                    <a:bodyPr/>
+                    <a:lstStyle/>
+                    <a:p>
+                      <a:pPr algn="ctr" indent="0" marL="0">
+                        <a:buNone/>
+                      </a:pPr>
+                      <a:r>
+                        <a:rPr lang="en-US" sz="1200" dirty="0">
+                          <a:solidFill>
+                            <a:srgbClr val="1B2733"/>
+                          </a:solidFill>
+                          <a:latin typeface="Calibri" pitchFamily="34" charset="0"/>
+                          <a:ea typeface="Calibri" pitchFamily="34" charset="-122"/>
+                          <a:cs typeface="Calibri" pitchFamily="34" charset="-120"/>
+                        </a:rPr>
+                        <a:t>1</a:t>
+                      </a:r>
+                      <a:endParaRPr lang="en-US" sz="1200" dirty="0">
+                        <a:latin typeface="Calibri" charset="0"/>
+                        <a:ea typeface="Calibri" charset="0"/>
+                        <a:cs typeface="Calibri" charset="0"/>
+                      </a:endParaRPr>
+                    </a:p>
+                  </a:txBody>
+                  <a:tcPr marL="25400" marR="25400" marT="12700" marB="12700">
+                    <a:lnL w="6350" cap="flat" cmpd="sng" algn="ctr">
+                      <a:solidFill>
+                        <a:srgbClr val="D5DEE5"/>
+                      </a:solidFill>
+                      <a:prstDash val="solid"/>
+                      <a:round/>
+                      <a:headEnd type="none" w="med" len="med"/>
+                      <a:tailEnd type="none" w="med" len="med"/>
+                    </a:lnL>
+                    <a:lnR w="6350" cap="flat" cmpd="sng" algn="ctr">
+                      <a:solidFill>
+                        <a:srgbClr val="D5DEE5"/>
+                      </a:solidFill>
+                      <a:prstDash val="solid"/>
+                      <a:round/>
+                      <a:headEnd type="none" w="med" len="med"/>
+                      <a:tailEnd type="none" w="med" len="med"/>
+                    </a:lnR>
+                    <a:lnT w="6350" cap="flat" cmpd="sng" algn="ctr">
+                      <a:solidFill>
+                        <a:srgbClr val="D5DEE5"/>
+                      </a:solidFill>
+                      <a:prstDash val="solid"/>
+                      <a:round/>
+                      <a:headEnd type="none" w="med" len="med"/>
+                      <a:tailEnd type="none" w="med" len="med"/>
+                    </a:lnT>
+                    <a:lnB w="6350" cap="flat" cmpd="sng" algn="ctr">
+                      <a:solidFill>
+                        <a:srgbClr val="D5DEE5"/>
+                      </a:solidFill>
+                      <a:prstDash val="solid"/>
+                      <a:round/>
+                      <a:headEnd type="none" w="med" len="med"/>
+                      <a:tailEnd type="none" w="med" len="med"/>
+                    </a:lnB>
+                    <a:solidFill>
+                      <a:srgbClr val="FEFEFE"/>
+                    </a:solidFill>
+                  </a:tcPr>
+                </a:tc>
+                <a:tc>
+                  <a:txBody>
+                    <a:bodyPr/>
+                    <a:lstStyle/>
+                    <a:p>
+                      <a:pPr algn="ctr" indent="0" marL="0">
+                        <a:buNone/>
+                      </a:pPr>
+                      <a:r>
+                        <a:rPr lang="en-US" sz="1200" dirty="0">
+                          <a:solidFill>
+                            <a:srgbClr val="1B2733"/>
+                          </a:solidFill>
+                          <a:latin typeface="Calibri" pitchFamily="34" charset="0"/>
+                          <a:ea typeface="Calibri" pitchFamily="34" charset="-122"/>
+                          <a:cs typeface="Calibri" pitchFamily="34" charset="-120"/>
+                        </a:rPr>
+                        <a:t>0</a:t>
+                      </a:r>
+                      <a:endParaRPr lang="en-US" sz="1200" dirty="0">
+                        <a:latin typeface="Calibri" charset="0"/>
+                        <a:ea typeface="Calibri" charset="0"/>
+                        <a:cs typeface="Calibri" charset="0"/>
+                      </a:endParaRPr>
+                    </a:p>
+                  </a:txBody>
+                  <a:tcPr marL="25400" marR="25400" marT="12700" marB="12700">
+                    <a:lnL w="6350" cap="flat" cmpd="sng" algn="ctr">
+                      <a:solidFill>
+                        <a:srgbClr val="D5DEE5"/>
+                      </a:solidFill>
+                      <a:prstDash val="solid"/>
+                      <a:round/>
+                      <a:headEnd type="none" w="med" len="med"/>
+                      <a:tailEnd type="none" w="med" len="med"/>
+                    </a:lnL>
+                    <a:lnR w="6350" cap="flat" cmpd="sng" algn="ctr">
+                      <a:solidFill>
+                        <a:srgbClr val="D5DEE5"/>
+                      </a:solidFill>
+                      <a:prstDash val="solid"/>
+                      <a:round/>
+                      <a:headEnd type="none" w="med" len="med"/>
+                      <a:tailEnd type="none" w="med" len="med"/>
+                    </a:lnR>
+                    <a:lnT w="6350" cap="flat" cmpd="sng" algn="ctr">
+                      <a:solidFill>
+                        <a:srgbClr val="D5DEE5"/>
+                      </a:solidFill>
+                      <a:prstDash val="solid"/>
+                      <a:round/>
+                      <a:headEnd type="none" w="med" len="med"/>
+                      <a:tailEnd type="none" w="med" len="med"/>
+                    </a:lnT>
+                    <a:lnB w="6350" cap="flat" cmpd="sng" algn="ctr">
+                      <a:solidFill>
+                        <a:srgbClr val="D5DEE5"/>
+                      </a:solidFill>
+                      <a:prstDash val="solid"/>
+                      <a:round/>
+                      <a:headEnd type="none" w="med" len="med"/>
+                      <a:tailEnd type="none" w="med" len="med"/>
+                    </a:lnB>
+                    <a:solidFill>
+                      <a:srgbClr val="FFFFFF"/>
+                    </a:solidFill>
+                  </a:tcPr>
+                </a:tc>
+                <a:tc>
+                  <a:txBody>
+                    <a:bodyPr/>
+                    <a:lstStyle/>
+                    <a:p>
+                      <a:pPr algn="ctr" indent="0" marL="0">
+                        <a:buNone/>
+                      </a:pPr>
+                      <a:r>
+                        <a:rPr lang="en-US" sz="1200" b="1" dirty="0">
+                          <a:solidFill>
+                            <a:srgbClr val="FFFFFF"/>
+                          </a:solidFill>
+                          <a:latin typeface="Calibri" pitchFamily="34" charset="0"/>
+                          <a:ea typeface="Calibri" pitchFamily="34" charset="-122"/>
+                          <a:cs typeface="Calibri" pitchFamily="34" charset="-120"/>
+                        </a:rPr>
+                        <a:t>96</a:t>
+                      </a:r>
+                      <a:endParaRPr lang="en-US" sz="1200" dirty="0">
+                        <a:latin typeface="Calibri" charset="0"/>
+                        <a:ea typeface="Calibri" charset="0"/>
+                        <a:cs typeface="Calibri" charset="0"/>
+                      </a:endParaRPr>
+                    </a:p>
+                  </a:txBody>
+                  <a:tcPr marL="25400" marR="25400" marT="12700" marB="12700">
+                    <a:lnL w="6350" cap="flat" cmpd="sng" algn="ctr">
+                      <a:solidFill>
+                        <a:srgbClr val="D5DEE5"/>
+                      </a:solidFill>
+                      <a:prstDash val="solid"/>
+                      <a:round/>
+                      <a:headEnd type="none" w="med" len="med"/>
+                      <a:tailEnd type="none" w="med" len="med"/>
+                    </a:lnL>
+                    <a:lnR w="6350" cap="flat" cmpd="sng" algn="ctr">
+                      <a:solidFill>
+                        <a:srgbClr val="D5DEE5"/>
+                      </a:solidFill>
+                      <a:prstDash val="solid"/>
+                      <a:round/>
+                      <a:headEnd type="none" w="med" len="med"/>
+                      <a:tailEnd type="none" w="med" len="med"/>
+                    </a:lnR>
+                    <a:lnT w="6350" cap="flat" cmpd="sng" algn="ctr">
+                      <a:solidFill>
+                        <a:srgbClr val="D5DEE5"/>
+                      </a:solidFill>
+                      <a:prstDash val="solid"/>
+                      <a:round/>
+                      <a:headEnd type="none" w="med" len="med"/>
+                      <a:tailEnd type="none" w="med" len="med"/>
+                    </a:lnT>
+                    <a:lnB w="6350" cap="flat" cmpd="sng" algn="ctr">
+                      <a:solidFill>
+                        <a:srgbClr val="D5DEE5"/>
+                      </a:solidFill>
+                      <a:prstDash val="solid"/>
+                      <a:round/>
+                      <a:headEnd type="none" w="med" len="med"/>
+                      <a:tailEnd type="none" w="med" len="med"/>
+                    </a:lnB>
+                    <a:solidFill>
+                      <a:srgbClr val="193345"/>
+                    </a:solidFill>
+                  </a:tcPr>
+                </a:tc>
+              </a:tr>
+            </a:tbl>
+          </a:graphicData>
+        </a:graphic>
+      </p:graphicFrame>
+      <p:sp>
+        <p:nvSpPr>
+          <p:cNvPr id="15" name="Text 12"/>
+          <p:cNvSpPr txBox="1"/>
+          <p:nvPr/>
+        </p:nvSpPr>
+        <p:spPr>
+          <a:xfrm>
+            <a:off x="548640" y="5486400"/>
+            <a:ext cx="5394960" cy="548640"/>
+          </a:xfrm>
+          <a:prstGeom prst="rect">
+            <a:avLst/>
+          </a:prstGeom>
+          <a:noFill/>
+          <a:ln/>
+        </p:spPr>
+        <p:txBody>
+          <a:bodyPr wrap="square" lIns="0" tIns="0" rIns="0" bIns="0" rtlCol="0" anchor="t"/>
+          <a:lstStyle/>
+          <a:p>
+            <a:pPr algn="l" indent="0" marL="0">
+              <a:buNone/>
+            </a:pPr>
+            <a:r>
+              <a:rPr lang="en-US" sz="1100" i="1" dirty="0">
+                <a:solidFill>
+                  <a:srgbClr val="5B6B7A"/>
+                </a:solidFill>
+                <a:latin typeface="Calibri" pitchFamily="34" charset="0"/>
+                <a:ea typeface="Calibri" pitchFamily="34" charset="-122"/>
+                <a:cs typeface="Calibri" pitchFamily="34" charset="-120"/>
+              </a:rPr>
+              <a:t>Confusion mức token của ViHealthBERT trên test, % theo hàng; 7 loại nhiều nhất + O (đủ 18 loại trong báo cáo).</a:t>
+            </a:r>
+            <a:endParaRPr lang="en-US" sz="1100" dirty="0"/>
+          </a:p>
+        </p:txBody>
+      </p:sp>
+      <p:graphicFrame>
+        <p:nvGraphicFramePr>
+          <p:cNvPr id="33" name="Table 1"/>
           <p:cNvGraphicFramePr>
             <a:graphicFrameLocks noGrp="1"/>
           </p:cNvGraphicFramePr>
@@ -22802,7 +28380,7 @@
       </p:graphicFrame>
       <p:sp>
         <p:nvSpPr>
-          <p:cNvPr id="16" name="Shape 12"/>
+          <p:cNvPr id="17" name="Shape 13"/>
           <p:cNvSpPr/>
           <p:nvPr/>
         </p:nvSpPr>
@@ -22829,7 +28407,7 @@
       </p:sp>
       <p:sp>
         <p:nvSpPr>
-          <p:cNvPr id="17" name="Text 13"/>
+          <p:cNvPr id="18" name="Text 14"/>
           <p:cNvSpPr txBox="1"/>
           <p:nvPr/>
         </p:nvSpPr>
@@ -22868,7 +28446,7 @@
       </p:sp>
       <p:sp>
         <p:nvSpPr>
-          <p:cNvPr id="18" name="Text 14"/>
+          <p:cNvPr id="19" name="Text 15"/>
           <p:cNvSpPr txBox="1"/>
           <p:nvPr/>
         </p:nvSpPr>
@@ -22964,7 +28542,7 @@
       </p:sp>
       <p:sp>
         <p:nvSpPr>
-          <p:cNvPr id="19" name="Text 15"/>
+          <p:cNvPr id="20" name="Text 16"/>
           <p:cNvSpPr txBox="1"/>
           <p:nvPr/>
         </p:nvSpPr>
@@ -22995,7 +28573,7 @@
                 <a:ea typeface="Calibri" pitchFamily="34" charset="-122"/>
                 <a:cs typeface="Calibri" pitchFamily="34" charset="-120"/>
               </a:rPr>
-              <a:t>Nguồn: model_comparison.json (span_outcomes), fig_confusion_vihealthbert.png (confusion mức token, chuẩn hoá theo hàng)</a:t>
+              <a:t>Nguồn: model_comparison.json (span_outcomes), confusion_all_models.json (ViHealthBERT, chuẩn hoá theo hàng)</a:t>
             </a:r>
             <a:endParaRPr lang="en-US" sz="850" dirty="0"/>
           </a:p>
@@ -26690,7 +32268,7 @@
                 <a:ea typeface="Calibri" pitchFamily="34" charset="-122"/>
                 <a:cs typeface="Calibri" pitchFamily="34" charset="-120"/>
               </a:rPr>
-              <a:t>Whisper-small của demo: </a:t>
+              <a:t>500 transcript Whisper-small hiện có: </a:t>
             </a:r>
             <a:r>
               <a:rPr lang="en-US" sz="1300" b="1" dirty="0">
@@ -26701,7 +32279,7 @@
                 <a:ea typeface="Calibri" pitchFamily="34" charset="-122"/>
                 <a:cs typeface="Calibri" pitchFamily="34" charset="-120"/>
               </a:rPr>
-              <a:t>0%</a:t>
+              <a:t>0</a:t>
             </a:r>
             <a:r>
               <a:rPr lang="en-US" sz="1300" dirty="0">
@@ -26712,29 +32290,7 @@
                 <a:ea typeface="Calibri" pitchFamily="34" charset="-122"/>
                 <a:cs typeface="Calibri" pitchFamily="34" charset="-120"/>
               </a:rPr>
-              <a:t> câu có dấu câu ⇒ chuẩn hoá </a:t>
-            </a:r>
-            <a:r>
-              <a:rPr lang="en-US" sz="1300" b="1" dirty="0">
-                <a:solidFill>
-                  <a:srgbClr val="1B2733"/>
-                </a:solidFill>
-                <a:latin typeface="Calibri" pitchFamily="34" charset="0"/>
-                <a:ea typeface="Calibri" pitchFamily="34" charset="-122"/>
-                <a:cs typeface="Calibri" pitchFamily="34" charset="-120"/>
-              </a:rPr>
-              <a:t>không thay đổi gì</a:t>
-            </a:r>
-            <a:r>
-              <a:rPr lang="en-US" sz="1300" dirty="0">
-                <a:solidFill>
-                  <a:srgbClr val="1B2733"/>
-                </a:solidFill>
-                <a:latin typeface="Calibri" pitchFamily="34" charset="0"/>
-                <a:ea typeface="Calibri" pitchFamily="34" charset="-122"/>
-                <a:cs typeface="Calibri" pitchFamily="34" charset="-120"/>
-              </a:rPr>
-              <a:t> cho demo</a:t>
+              <a:t> câu có chữ hoa hoặc dấu câu ⇒ bước chuẩn hoá sẽ không đổi câu nào; chưa đo tác động lên pipeline demo</a:t>
             </a:r>
             <a:endParaRPr lang="en-US" sz="1300" dirty="0"/>
           </a:p>
@@ -26850,7 +32406,7 @@
                 <a:ea typeface="Calibri" pitchFamily="34" charset="-122"/>
                 <a:cs typeface="Calibri" pitchFamily="34" charset="-120"/>
               </a:rPr>
-              <a:t>Nguồn: experiments/005-correction-before-ner/results.json (ner, normalized_comparison, text_changes), README.md; asr_eda.json (style)</a:t>
+              <a:t>Nguồn: experiments/005-correction-before-ner/results.json (ner, normalized_comparison, text_changes), README.md; ket_qua_goc/asr_test_whisper_small.jsonl (đếm lúc build)</a:t>
             </a:r>
             <a:endParaRPr lang="en-US" sz="850" dirty="0"/>
           </a:p>
@@ -29984,7 +35540,7 @@
                 <a:ea typeface="Cambria" pitchFamily="34" charset="-122"/>
                 <a:cs typeface="Cambria" pitchFamily="34" charset="-120"/>
               </a:rPr>
-              <a:t>Phía âm thanh: 78,5% thực thể còn nguyên sau ASR</a:t>
+              <a:t>PhoWhisper-medium giữ 78,5% thực thể (3.437 câu)</a:t>
             </a:r>
             <a:endParaRPr lang="en-US" sz="2300" dirty="0"/>
           </a:p>
@@ -30910,7 +36466,7 @@
         <p:spPr>
           <a:xfrm>
             <a:off x="548640" y="5577840"/>
-            <a:ext cx="5760720" cy="274320"/>
+            <a:ext cx="5852160" cy="777240"/>
           </a:xfrm>
           <a:prstGeom prst="rect">
             <a:avLst/>
@@ -30926,17 +36482,61 @@
               <a:buNone/>
             </a:pPr>
             <a:r>
-              <a:rPr lang="en-US" sz="1100" i="1" dirty="0">
-                <a:solidFill>
-                  <a:srgbClr val="5B6B7A"/>
+              <a:rPr lang="en-US" sz="1250" dirty="0">
+                <a:solidFill>
+                  <a:srgbClr val="E4572E"/>
                 </a:solidFill>
                 <a:latin typeface="Calibri" pitchFamily="34" charset="0"/>
                 <a:ea typeface="Calibri" pitchFamily="34" charset="-122"/>
                 <a:cs typeface="Calibri" pitchFamily="34" charset="-120"/>
               </a:rPr>
-              <a:t>Pipeline demo</a:t>
+              <a:t>Pipeline demo dùng </a:t>
             </a:r>
-            <a:endParaRPr lang="en-US" sz="1100" dirty="0"/>
+            <a:r>
+              <a:rPr lang="en-US" sz="1250" b="1" dirty="0">
+                <a:solidFill>
+                  <a:srgbClr val="E4572E"/>
+                </a:solidFill>
+                <a:latin typeface="Calibri" pitchFamily="34" charset="0"/>
+                <a:ea typeface="Calibri" pitchFamily="34" charset="-122"/>
+                <a:cs typeface="Calibri" pitchFamily="34" charset="-120"/>
+              </a:rPr>
+              <a:t>Whisper-small</a:t>
+            </a:r>
+            <a:r>
+              <a:rPr lang="en-US" sz="1250" dirty="0">
+                <a:solidFill>
+                  <a:srgbClr val="E4572E"/>
+                </a:solidFill>
+                <a:latin typeface="Calibri" pitchFamily="34" charset="0"/>
+                <a:ea typeface="Calibri" pitchFamily="34" charset="-122"/>
+                <a:cs typeface="Calibri" pitchFamily="34" charset="-120"/>
+              </a:rPr>
+              <a:t>: thực thể còn nguyên </a:t>
+            </a:r>
+            <a:r>
+              <a:rPr lang="en-US" sz="1250" b="1" dirty="0">
+                <a:solidFill>
+                  <a:srgbClr val="E4572E"/>
+                </a:solidFill>
+                <a:latin typeface="Calibri" pitchFamily="34" charset="0"/>
+                <a:ea typeface="Calibri" pitchFamily="34" charset="-122"/>
+                <a:cs typeface="Calibri" pitchFamily="34" charset="-120"/>
+              </a:rPr>
+              <a:t>61,4%</a:t>
+            </a:r>
+            <a:r>
+              <a:rPr lang="en-US" sz="1250" dirty="0">
+                <a:solidFill>
+                  <a:srgbClr val="E4572E"/>
+                </a:solidFill>
+                <a:latin typeface="Calibri" pitchFamily="34" charset="0"/>
+                <a:ea typeface="Calibri" pitchFamily="34" charset="-122"/>
+                <a:cs typeface="Calibri" pitchFamily="34" charset="-120"/>
+              </a:rPr>
+              <a:t> (n = 1.118 thực thể, 500 câu nói), thấp hơn PhoWhisper-medium.</a:t>
+            </a:r>
+            <a:endParaRPr lang="en-US" sz="1250" dirty="0"/>
           </a:p>
         </p:txBody>
       </p:sp>
@@ -30963,9 +36563,9 @@
             <a:tbl>
               <a:tblPr/>
               <a:tblGrid>
-                <a:gridCol w="1874520"/>
-                <a:gridCol w="822960"/>
+                <a:gridCol w="1828800"/>
                 <a:gridCol w="914400"/>
+                <a:gridCol w="868680"/>
                 <a:gridCol w="1463040"/>
               </a:tblGrid>
               <a:tr h="347472">
@@ -31054,7 +36654,7 @@
                           <a:ea typeface="Calibri" pitchFamily="34" charset="-122"/>
                           <a:cs typeface="Calibri" pitchFamily="34" charset="-120"/>
                         </a:rPr>
-                        <a:t>Số câu</a:t>
+                        <a:t>Số câu nói</a:t>
                       </a:r>
                       <a:endParaRPr lang="en-US" sz="1200" dirty="0">
                         <a:latin typeface="Calibri" charset="0"/>
@@ -32786,7 +38386,7 @@
                 <a:ea typeface="Calibri" pitchFamily="34" charset="-122"/>
                 <a:cs typeface="Calibri" pitchFamily="34" charset="-120"/>
               </a:rPr>
-              <a:t> bootstrap và nhiều seed cho thấy PhoBERT ≈ ViHealthBERT</a:t>
+              <a:t> bootstrap và nhiều seed: PhoBERT − ViHealthBERT không phân biệt được với 0</a:t>
             </a:r>
             <a:endParaRPr lang="en-US" sz="1700" dirty="0"/>
           </a:p>
@@ -33292,7 +38892,7 @@
                 <a:ea typeface="Cambria" pitchFamily="34" charset="-122"/>
                 <a:cs typeface="Cambria" pitchFamily="34" charset="-120"/>
               </a:rPr>
-              <a:t>62,42 ≈ 62,74</a:t>
+              <a:t>62,42 / 62,74</a:t>
             </a:r>
             <a:endParaRPr lang="en-US" sz="2400" dirty="0"/>
           </a:p>
@@ -33331,7 +38931,7 @@
                 <a:ea typeface="Calibri" pitchFamily="34" charset="-122"/>
                 <a:cs typeface="Calibri" pitchFamily="34" charset="-120"/>
               </a:rPr>
-              <a:t>PhoBERT ≈ ViHealthBERT (CI chứa 0)</a:t>
+              <a:t>PhoBERT vs ViHealthBERT: chênh lệch không phân biệt được với 0</a:t>
             </a:r>
             <a:endParaRPr lang="en-US" sz="1300" dirty="0"/>
           </a:p>
